--- a/вкр/презентация по_ВКР_Демьянцев_Виталий_Владиславович_606_22.pptx
+++ b/вкр/презентация по_ВКР_Демьянцев_Виталий_Владиславович_606_22.pptx
@@ -231,7 +231,7 @@
           <a:p>
             <a:fld id="{07640263-EA9F-497A-96B0-1CCF8BC43BB1}" type="datetimeFigureOut">
               <a:rPr lang="ru-RU" smtClean="0"/>
-              <a:t>21.06.2026</a:t>
+              <a:t>22.06.2026</a:t>
             </a:fld>
             <a:endParaRPr lang="ru-RU"/>
           </a:p>
@@ -409,7 +409,7 @@
           <a:p>
             <a:fld id="{66574A11-D777-4A21-A270-6F8A09B2D137}" type="datetimeFigureOut">
               <a:rPr lang="ru-RU" smtClean="0"/>
-              <a:t>21.06.2026</a:t>
+              <a:t>22.06.2026</a:t>
             </a:fld>
             <a:endParaRPr lang="ru-RU"/>
           </a:p>
@@ -838,7 +838,7 @@
           <a:p>
             <a:fld id="{E916E196-4804-4F42-898A-0FC902D9B484}" type="datetime1">
               <a:rPr lang="ru-RU" smtClean="0"/>
-              <a:t>21.06.2026</a:t>
+              <a:t>22.06.2026</a:t>
             </a:fld>
             <a:endParaRPr lang="ru-RU"/>
           </a:p>
@@ -1068,7 +1068,7 @@
           <a:p>
             <a:fld id="{665369D4-ACF4-452B-B065-8EB5038972C3}" type="datetime1">
               <a:rPr lang="ru-RU" smtClean="0"/>
-              <a:t>21.06.2026</a:t>
+              <a:t>22.06.2026</a:t>
             </a:fld>
             <a:endParaRPr lang="ru-RU"/>
           </a:p>
@@ -1298,7 +1298,7 @@
           <a:p>
             <a:fld id="{51B40BE4-505E-422D-8FE2-7C14F619B5A8}" type="datetime1">
               <a:rPr lang="ru-RU" smtClean="0"/>
-              <a:t>21.06.2026</a:t>
+              <a:t>22.06.2026</a:t>
             </a:fld>
             <a:endParaRPr lang="ru-RU"/>
           </a:p>
@@ -1528,7 +1528,7 @@
           <a:p>
             <a:fld id="{303C7D8F-2A26-4A8C-918C-F8DEED5C5692}" type="datetime1">
               <a:rPr lang="ru-RU" smtClean="0"/>
-              <a:t>21.06.2026</a:t>
+              <a:t>22.06.2026</a:t>
             </a:fld>
             <a:endParaRPr lang="ru-RU"/>
           </a:p>
@@ -1839,7 +1839,7 @@
           <a:p>
             <a:fld id="{47F38BAD-298E-4C7C-BB8A-26FD3D33ECCE}" type="datetime1">
               <a:rPr lang="ru-RU" smtClean="0"/>
-              <a:t>21.06.2026</a:t>
+              <a:t>22.06.2026</a:t>
             </a:fld>
             <a:endParaRPr lang="ru-RU"/>
           </a:p>
@@ -2134,7 +2134,7 @@
           <a:p>
             <a:fld id="{4F74C74B-F198-4F1D-A85F-7D813148100B}" type="datetime1">
               <a:rPr lang="ru-RU" smtClean="0"/>
-              <a:t>21.06.2026</a:t>
+              <a:t>22.06.2026</a:t>
             </a:fld>
             <a:endParaRPr lang="ru-RU"/>
           </a:p>
@@ -2577,7 +2577,7 @@
           <a:p>
             <a:fld id="{2BB4B2F3-C8F7-4496-AB1D-5B712B52D4CC}" type="datetime1">
               <a:rPr lang="ru-RU" smtClean="0"/>
-              <a:t>21.06.2026</a:t>
+              <a:t>22.06.2026</a:t>
             </a:fld>
             <a:endParaRPr lang="ru-RU"/>
           </a:p>
@@ -2742,7 +2742,7 @@
           <a:p>
             <a:fld id="{69017ECC-D4AC-4388-A12E-1F5EBDCBE0DE}" type="datetime1">
               <a:rPr lang="ru-RU" smtClean="0"/>
-              <a:t>21.06.2026</a:t>
+              <a:t>22.06.2026</a:t>
             </a:fld>
             <a:endParaRPr lang="ru-RU"/>
           </a:p>
@@ -2871,7 +2871,7 @@
           <a:p>
             <a:fld id="{A7ABE4D9-AEC4-4B77-B4CC-7FBE63FE841C}" type="datetime1">
               <a:rPr lang="ru-RU" smtClean="0"/>
-              <a:t>21.06.2026</a:t>
+              <a:t>22.06.2026</a:t>
             </a:fld>
             <a:endParaRPr lang="ru-RU"/>
           </a:p>
@@ -3207,7 +3207,7 @@
           <a:p>
             <a:fld id="{21664E07-3D79-4A05-BB0B-898AD5671495}" type="datetime1">
               <a:rPr lang="ru-RU" smtClean="0"/>
-              <a:t>21.06.2026</a:t>
+              <a:t>22.06.2026</a:t>
             </a:fld>
             <a:endParaRPr lang="ru-RU"/>
           </a:p>
@@ -3520,7 +3520,7 @@
           <a:p>
             <a:fld id="{69552C21-0914-4B44-973B-AE86C28FD0CC}" type="datetime1">
               <a:rPr lang="ru-RU" smtClean="0"/>
-              <a:t>21.06.2026</a:t>
+              <a:t>22.06.2026</a:t>
             </a:fld>
             <a:endParaRPr lang="ru-RU"/>
           </a:p>
@@ -4089,7 +4089,7 @@
         <p:spPr>
           <a:xfrm>
             <a:off x="2249424" y="2967334"/>
-            <a:ext cx="7991856" cy="1569660"/>
+            <a:ext cx="7991856" cy="1200329"/>
           </a:xfrm>
           <a:prstGeom prst="rect">
             <a:avLst/>
@@ -4122,21 +4122,7 @@
                 <a:latin typeface="Times New Roman" panose="02020603050405020304" pitchFamily="18" charset="0"/>
                 <a:cs typeface="Times New Roman" panose="02020603050405020304" pitchFamily="18" charset="0"/>
               </a:rPr>
-              <a:t>«Разработка мультимодальной системы распознавания эмоций человека на основе искусственных нейронных</a:t>
-            </a:r>
-            <a:r>
-              <a:rPr lang="en-US" sz="2400" dirty="0">
-                <a:latin typeface="Times New Roman" panose="02020603050405020304" pitchFamily="18" charset="0"/>
-                <a:cs typeface="Times New Roman" panose="02020603050405020304" pitchFamily="18" charset="0"/>
-              </a:rPr>
-              <a:t> </a:t>
-            </a:r>
-            <a:r>
-              <a:rPr lang="ru-RU" sz="2400" dirty="0">
-                <a:latin typeface="Times New Roman" panose="02020603050405020304" pitchFamily="18" charset="0"/>
-                <a:cs typeface="Times New Roman" panose="02020603050405020304" pitchFamily="18" charset="0"/>
-              </a:rPr>
-              <a:t>сетей»</a:t>
+              <a:t>«Система распознавания эмоций человека на основе искусственной нейронной сети»</a:t>
             </a:r>
           </a:p>
         </p:txBody>
@@ -5676,24 +5662,13 @@
             </a:r>
             <a:r>
               <a:rPr lang="ru-RU" sz="2400" dirty="0"/>
-              <a:t> модель (</a:t>
-            </a:r>
-            <a:r>
-              <a:rPr lang="ru-RU" sz="2400" dirty="0" err="1"/>
-              <a:t>RuBERT</a:t>
-            </a:r>
-            <a:r>
-              <a:rPr lang="ru-RU" sz="2400" dirty="0"/>
-              <a:t>/</a:t>
-            </a:r>
-            <a:r>
-              <a:rPr lang="ru-RU" sz="2400" dirty="0" err="1"/>
+              <a:t> модель </a:t>
+            </a:r>
+            <a:r>
+              <a:rPr lang="ru-RU" sz="2400"/>
               <a:t>DistilBERT</a:t>
             </a:r>
-            <a:r>
-              <a:rPr lang="ru-RU" sz="2400" dirty="0"/>
-              <a:t>)</a:t>
-            </a:r>
+            <a:endParaRPr lang="ru-RU" sz="2400" dirty="0"/>
           </a:p>
           <a:p>
             <a:pPr marL="0" indent="0" algn="just">

--- a/вкр/презентация по_ВКР_Демьянцев_Виталий_Владиславович_606_22.pptx
+++ b/вкр/презентация по_ВКР_Демьянцев_Виталий_Владиславович_606_22.pptx
@@ -5392,7 +5392,15 @@
             </a:pPr>
             <a:r>
               <a:rPr lang="ru-RU" sz="2400" dirty="0"/>
-              <a:t>• Обучение на 680 000 часов аудиоданных</a:t>
+              <a:t>• Обеспечивает высокое качество </a:t>
+            </a:r>
+            <a:r>
+              <a:rPr lang="ru-RU" sz="2400" dirty="0" err="1"/>
+              <a:t>транскрибации</a:t>
+            </a:r>
+            <a:r>
+              <a:rPr lang="ru-RU" sz="2400" dirty="0"/>
+              <a:t> речи</a:t>
             </a:r>
           </a:p>
           <a:p>
@@ -5401,7 +5409,7 @@
             </a:pPr>
             <a:r>
               <a:rPr lang="ru-RU" sz="2400" dirty="0"/>
-              <a:t>• Поддержка 99 языков</a:t>
+              <a:t>• Поддержка множества языков</a:t>
             </a:r>
           </a:p>
           <a:p>

--- a/вкр/презентация по_ВКР_Демьянцев_Виталий_Владиславович_606_22.pptx
+++ b/вкр/презентация по_ВКР_Демьянцев_Виталий_Владиславович_606_22.pptx
@@ -5,10 +5,10 @@
     <p:sldMasterId id="2147483648" r:id="rId1"/>
   </p:sldMasterIdLst>
   <p:notesMasterIdLst>
-    <p:notesMasterId r:id="rId22"/>
+    <p:notesMasterId r:id="rId21"/>
   </p:notesMasterIdLst>
   <p:handoutMasterIdLst>
-    <p:handoutMasterId r:id="rId23"/>
+    <p:handoutMasterId r:id="rId22"/>
   </p:handoutMasterIdLst>
   <p:sldIdLst>
     <p:sldId id="256" r:id="rId2"/>
@@ -22,15 +22,14 @@
     <p:sldId id="301" r:id="rId10"/>
     <p:sldId id="295" r:id="rId11"/>
     <p:sldId id="259" r:id="rId12"/>
-    <p:sldId id="287" r:id="rId13"/>
-    <p:sldId id="294" r:id="rId14"/>
-    <p:sldId id="266" r:id="rId15"/>
-    <p:sldId id="260" r:id="rId16"/>
-    <p:sldId id="288" r:id="rId17"/>
-    <p:sldId id="302" r:id="rId18"/>
-    <p:sldId id="284" r:id="rId19"/>
-    <p:sldId id="289" r:id="rId20"/>
-    <p:sldId id="280" r:id="rId21"/>
+    <p:sldId id="294" r:id="rId13"/>
+    <p:sldId id="266" r:id="rId14"/>
+    <p:sldId id="260" r:id="rId15"/>
+    <p:sldId id="288" r:id="rId16"/>
+    <p:sldId id="302" r:id="rId17"/>
+    <p:sldId id="284" r:id="rId18"/>
+    <p:sldId id="289" r:id="rId19"/>
+    <p:sldId id="280" r:id="rId20"/>
   </p:sldIdLst>
   <p:sldSz cx="12192000" cy="6858000"/>
   <p:notesSz cx="6858000" cy="9144000"/>
@@ -4612,7 +4611,7 @@
           <p:cNvPr id="2" name="Заголовок 1">
             <a:extLst>
               <a:ext uri="{FF2B5EF4-FFF2-40B4-BE49-F238E27FC236}">
-                <a16:creationId xmlns:a16="http://schemas.microsoft.com/office/drawing/2014/main" id="{9F89600A-14F2-4F8C-96F2-69CA1CCBAC5E}"/>
+                <a16:creationId xmlns:a16="http://schemas.microsoft.com/office/drawing/2014/main" id="{6AE47E73-D877-4497-A30F-9D6C2A470274}"/>
               </a:ext>
             </a:extLst>
           </p:cNvPr>
@@ -4625,90 +4624,29 @@
         </p:nvSpPr>
         <p:spPr>
           <a:xfrm>
-            <a:off x="394317" y="68231"/>
-            <a:ext cx="10515600" cy="1325563"/>
-          </a:xfrm>
-        </p:spPr>
-        <p:txBody>
-          <a:bodyPr/>
-          <a:lstStyle/>
-          <a:p>
-            <a:r>
-              <a:rPr lang="ru-RU" sz="4400" dirty="0"/>
-              <a:t>Средства и технологии разработки</a:t>
-            </a:r>
-            <a:endParaRPr lang="ru-RU" dirty="0"/>
-          </a:p>
-        </p:txBody>
-      </p:sp>
-      <p:sp>
-        <p:nvSpPr>
-          <p:cNvPr id="3" name="Объект 2">
-            <a:extLst>
-              <a:ext uri="{FF2B5EF4-FFF2-40B4-BE49-F238E27FC236}">
-                <a16:creationId xmlns:a16="http://schemas.microsoft.com/office/drawing/2014/main" id="{A0F3E649-ADA8-4250-87FF-0757785BBB12}"/>
-              </a:ext>
-            </a:extLst>
-          </p:cNvPr>
-          <p:cNvSpPr>
-            <a:spLocks noGrp="1"/>
-          </p:cNvSpPr>
-          <p:nvPr>
-            <p:ph idx="1"/>
-          </p:nvPr>
-        </p:nvSpPr>
-        <p:spPr>
-          <a:xfrm>
-            <a:off x="523783" y="1118586"/>
-            <a:ext cx="10830017" cy="5513033"/>
+            <a:off x="426720" y="502887"/>
+            <a:ext cx="4806346" cy="1325563"/>
           </a:xfrm>
         </p:spPr>
         <p:txBody>
           <a:bodyPr>
-            <a:normAutofit fontScale="92500" lnSpcReduction="10000"/>
+            <a:normAutofit fontScale="90000"/>
           </a:bodyPr>
           <a:lstStyle/>
           <a:p>
-            <a:pPr algn="just"/>
             <a:r>
               <a:rPr lang="ru-RU" dirty="0"/>
-              <a:t>Искусственный интеллект (ИИ) — это направление компьютерных наук, нацеленное на создание систем, способных выполнять задачи, требующие человеческого интеллекта.</a:t>
-            </a:r>
-            <a:endParaRPr lang="en-US" dirty="0"/>
-          </a:p>
-          <a:p>
-            <a:pPr algn="just"/>
-            <a:r>
-              <a:rPr lang="ru-RU" dirty="0" err="1"/>
-              <a:t>Свёрточные</a:t>
-            </a:r>
-            <a:r>
-              <a:rPr lang="ru-RU" dirty="0"/>
-              <a:t> нейронные сети (CNN) – архитектура глубокого обучения, автоматически извлекающая иерархические признаки из изображений. Идеально подходит для анализа мимики и детекции объектов в видеопотоке без ручного выделения характеристик.</a:t>
-            </a:r>
-          </a:p>
-          <a:p>
-            <a:pPr algn="just"/>
-            <a:r>
-              <a:rPr lang="ru-RU" dirty="0"/>
-              <a:t>Рекуррентные нейронные сети и трансформеры – модели, оптимизированные для работы с последовательностями данных. Применяются для анализа аудиопотока, распознавания речи и выявления просодических маркеров эмоционального состояния.</a:t>
-            </a:r>
-          </a:p>
-          <a:p>
-            <a:pPr algn="just"/>
-            <a:r>
-              <a:rPr lang="ru-RU" dirty="0"/>
-              <a:t>Мультимодальный анализ – методология совместной обработки разнородных данных (видео, аудио, текст), позволяющая компенсировать ограничения отдельных модальностей и повысить надёжность классификации в реальных условиях.</a:t>
-            </a:r>
-          </a:p>
-        </p:txBody>
-      </p:sp>
-      <p:sp>
-        <p:nvSpPr>
-          <p:cNvPr id="5" name="Номер слайда 4">
-            <a:extLst>
-              <a:ext uri="{FF2B5EF4-FFF2-40B4-BE49-F238E27FC236}">
-                <a16:creationId xmlns:a16="http://schemas.microsoft.com/office/drawing/2014/main" id="{05FBF554-F197-8F3F-ACC5-5580642F6229}"/>
+              <a:t>Алгоритмическое обеспечение. Алгоритм работы программы</a:t>
+            </a:r>
+          </a:p>
+        </p:txBody>
+      </p:sp>
+      <p:sp>
+        <p:nvSpPr>
+          <p:cNvPr id="3" name="Номер слайда 2">
+            <a:extLst>
+              <a:ext uri="{FF2B5EF4-FFF2-40B4-BE49-F238E27FC236}">
+                <a16:creationId xmlns:a16="http://schemas.microsoft.com/office/drawing/2014/main" id="{7F01DB20-C1C1-2C1C-3C13-1BAAD2296A64}"/>
               </a:ext>
             </a:extLst>
           </p:cNvPr>
@@ -4732,10 +4670,46 @@
           </a:p>
         </p:txBody>
       </p:sp>
+      <p:pic>
+        <p:nvPicPr>
+          <p:cNvPr id="6" name="Рисунок 5" descr="Изображение выглядит как текст, снимок экрана, Шрифт, дизайн">
+            <a:extLst>
+              <a:ext uri="{FF2B5EF4-FFF2-40B4-BE49-F238E27FC236}">
+                <a16:creationId xmlns:a16="http://schemas.microsoft.com/office/drawing/2014/main" id="{7706B93A-2B11-6CF7-0EF1-40E0C302D211}"/>
+              </a:ext>
+            </a:extLst>
+          </p:cNvPr>
+          <p:cNvPicPr>
+            <a:picLocks noChangeAspect="1"/>
+          </p:cNvPicPr>
+          <p:nvPr/>
+        </p:nvPicPr>
+        <p:blipFill>
+          <a:blip r:embed="rId2">
+            <a:extLst>
+              <a:ext uri="{28A0092B-C50C-407E-A947-70E740481C1C}">
+                <a14:useLocalDpi xmlns:a14="http://schemas.microsoft.com/office/drawing/2010/main" val="0"/>
+              </a:ext>
+            </a:extLst>
+          </a:blip>
+          <a:stretch>
+            <a:fillRect/>
+          </a:stretch>
+        </p:blipFill>
+        <p:spPr>
+          <a:xfrm>
+            <a:off x="4166616" y="368963"/>
+            <a:ext cx="7855751" cy="6120073"/>
+          </a:xfrm>
+          <a:prstGeom prst="rect">
+            <a:avLst/>
+          </a:prstGeom>
+        </p:spPr>
+      </p:pic>
     </p:spTree>
     <p:extLst>
       <p:ext uri="{BB962C8B-B14F-4D97-AF65-F5344CB8AC3E}">
-        <p14:creationId xmlns:p14="http://schemas.microsoft.com/office/powerpoint/2010/main" val="2908790082"/>
+        <p14:creationId xmlns:p14="http://schemas.microsoft.com/office/powerpoint/2010/main" val="1922315057"/>
       </p:ext>
     </p:extLst>
   </p:cSld>
@@ -4767,7 +4741,7 @@
           <p:cNvPr id="2" name="Заголовок 1">
             <a:extLst>
               <a:ext uri="{FF2B5EF4-FFF2-40B4-BE49-F238E27FC236}">
-                <a16:creationId xmlns:a16="http://schemas.microsoft.com/office/drawing/2014/main" id="{6AE47E73-D877-4497-A30F-9D6C2A470274}"/>
+                <a16:creationId xmlns:a16="http://schemas.microsoft.com/office/drawing/2014/main" id="{554A4237-7384-4D65-B40A-9F7802E2C2BF}"/>
               </a:ext>
             </a:extLst>
           </p:cNvPr>
@@ -4778,31 +4752,95 @@
             <p:ph type="title"/>
           </p:nvPr>
         </p:nvSpPr>
-        <p:spPr>
-          <a:xfrm>
-            <a:off x="426720" y="502887"/>
-            <a:ext cx="4806346" cy="1325563"/>
+        <p:spPr/>
+        <p:txBody>
+          <a:bodyPr/>
+          <a:lstStyle/>
+          <a:p>
+            <a:r>
+              <a:rPr lang="ru-RU" dirty="0"/>
+              <a:t>Информационное обеспечение</a:t>
+            </a:r>
+          </a:p>
+        </p:txBody>
+      </p:sp>
+      <p:sp>
+        <p:nvSpPr>
+          <p:cNvPr id="3" name="Объект 2">
+            <a:extLst>
+              <a:ext uri="{FF2B5EF4-FFF2-40B4-BE49-F238E27FC236}">
+                <a16:creationId xmlns:a16="http://schemas.microsoft.com/office/drawing/2014/main" id="{A03513E5-CE54-4AB7-8986-EBEFE16031CF}"/>
+              </a:ext>
+            </a:extLst>
+          </p:cNvPr>
+          <p:cNvSpPr>
+            <a:spLocks noGrp="1"/>
+          </p:cNvSpPr>
+          <p:nvPr>
+            <p:ph idx="1"/>
+          </p:nvPr>
+        </p:nvSpPr>
+        <p:spPr>
+          <a:xfrm>
+            <a:off x="676656" y="1690688"/>
+            <a:ext cx="10677144" cy="4802187"/>
           </a:xfrm>
         </p:spPr>
         <p:txBody>
           <a:bodyPr>
-            <a:normAutofit fontScale="90000"/>
+            <a:normAutofit fontScale="92500" lnSpcReduction="10000"/>
           </a:bodyPr>
           <a:lstStyle/>
           <a:p>
+            <a:pPr algn="just"/>
             <a:r>
               <a:rPr lang="ru-RU" dirty="0"/>
-              <a:t>Алгоритмическое обеспечение. Алгоритм работы программы</a:t>
-            </a:r>
-          </a:p>
-        </p:txBody>
-      </p:sp>
-      <p:sp>
-        <p:nvSpPr>
-          <p:cNvPr id="3" name="Номер слайда 2">
-            <a:extLst>
-              <a:ext uri="{FF2B5EF4-FFF2-40B4-BE49-F238E27FC236}">
-                <a16:creationId xmlns:a16="http://schemas.microsoft.com/office/drawing/2014/main" id="{7F01DB20-C1C1-2C1C-3C13-1BAAD2296A64}"/>
+              <a:t>Информационное обеспечение АСУ – совокупность системно-ориентированных данных, описывающих принятый в системе словарь базовых описаний, классификаторы и актуализируемых данных о состоянии информационной модели на всех этапах жизненного цикла.</a:t>
+            </a:r>
+          </a:p>
+          <a:p>
+            <a:pPr algn="just"/>
+            <a:r>
+              <a:rPr lang="ru-RU" dirty="0"/>
+              <a:t>Информационным обеспечением системы является набор обученных нейросетевых моделей, конфигурационных файлов и алгоритмов агрегации, с которыми взаимодействует программный комплекс.</a:t>
+            </a:r>
+          </a:p>
+          <a:p>
+            <a:pPr algn="just"/>
+            <a:r>
+              <a:rPr lang="ru-RU" dirty="0"/>
+              <a:t>Входной информацией является:</a:t>
+            </a:r>
+          </a:p>
+          <a:p>
+            <a:pPr lvl="1" algn="just"/>
+            <a:r>
+              <a:rPr lang="ru-RU" dirty="0"/>
+              <a:t>Видеопоток с веб-камеры </a:t>
+            </a:r>
+          </a:p>
+          <a:p>
+            <a:pPr lvl="1" algn="just"/>
+            <a:r>
+              <a:rPr lang="ru-RU" dirty="0"/>
+              <a:t>Аудиопоток с микрофона</a:t>
+            </a:r>
+          </a:p>
+          <a:p>
+            <a:pPr algn="just"/>
+            <a:r>
+              <a:rPr lang="ru-RU" dirty="0"/>
+              <a:t>Данные поступают непрерывно, обрабатываются в изолированных AI-шлюзах и сохраняются в реляционной СУБД с использованием формата JSONB для гибкого хранения разнородных аналитических событий.</a:t>
+            </a:r>
+          </a:p>
+        </p:txBody>
+      </p:sp>
+      <p:sp>
+        <p:nvSpPr>
+          <p:cNvPr id="4" name="Номер слайда 3">
+            <a:extLst>
+              <a:ext uri="{FF2B5EF4-FFF2-40B4-BE49-F238E27FC236}">
+                <a16:creationId xmlns:a16="http://schemas.microsoft.com/office/drawing/2014/main" id="{CC5BD3B4-94D6-9BF1-6ED5-AA71E42B8AE9}"/>
               </a:ext>
             </a:extLst>
           </p:cNvPr>
@@ -4822,50 +4860,14 @@
               <a:rPr lang="ru-RU" smtClean="0"/>
               <a:t>13</a:t>
             </a:fld>
-            <a:endParaRPr lang="ru-RU" dirty="0"/>
-          </a:p>
-        </p:txBody>
-      </p:sp>
-      <p:pic>
-        <p:nvPicPr>
-          <p:cNvPr id="6" name="Рисунок 5" descr="Изображение выглядит как текст, снимок экрана, Шрифт, дизайн">
-            <a:extLst>
-              <a:ext uri="{FF2B5EF4-FFF2-40B4-BE49-F238E27FC236}">
-                <a16:creationId xmlns:a16="http://schemas.microsoft.com/office/drawing/2014/main" id="{7706B93A-2B11-6CF7-0EF1-40E0C302D211}"/>
-              </a:ext>
-            </a:extLst>
-          </p:cNvPr>
-          <p:cNvPicPr>
-            <a:picLocks noChangeAspect="1"/>
-          </p:cNvPicPr>
-          <p:nvPr/>
-        </p:nvPicPr>
-        <p:blipFill>
-          <a:blip r:embed="rId2">
-            <a:extLst>
-              <a:ext uri="{28A0092B-C50C-407E-A947-70E740481C1C}">
-                <a14:useLocalDpi xmlns:a14="http://schemas.microsoft.com/office/drawing/2010/main" val="0"/>
-              </a:ext>
-            </a:extLst>
-          </a:blip>
-          <a:stretch>
-            <a:fillRect/>
-          </a:stretch>
-        </p:blipFill>
-        <p:spPr>
-          <a:xfrm>
-            <a:off x="4166616" y="368963"/>
-            <a:ext cx="7855751" cy="6120073"/>
-          </a:xfrm>
-          <a:prstGeom prst="rect">
-            <a:avLst/>
-          </a:prstGeom>
-        </p:spPr>
-      </p:pic>
+            <a:endParaRPr lang="ru-RU"/>
+          </a:p>
+        </p:txBody>
+      </p:sp>
     </p:spTree>
     <p:extLst>
       <p:ext uri="{BB962C8B-B14F-4D97-AF65-F5344CB8AC3E}">
-        <p14:creationId xmlns:p14="http://schemas.microsoft.com/office/powerpoint/2010/main" val="1922315057"/>
+        <p14:creationId xmlns:p14="http://schemas.microsoft.com/office/powerpoint/2010/main" val="2419490598"/>
       </p:ext>
     </p:extLst>
   </p:cSld>
@@ -4894,10 +4896,127 @@
       </p:grpSpPr>
       <p:sp>
         <p:nvSpPr>
+          <p:cNvPr id="3" name="Объект 2">
+            <a:extLst>
+              <a:ext uri="{FF2B5EF4-FFF2-40B4-BE49-F238E27FC236}">
+                <a16:creationId xmlns:a16="http://schemas.microsoft.com/office/drawing/2014/main" id="{C9F7A7BF-345D-4464-BA61-1943803CE2E9}"/>
+              </a:ext>
+            </a:extLst>
+          </p:cNvPr>
+          <p:cNvSpPr>
+            <a:spLocks noGrp="1"/>
+          </p:cNvSpPr>
+          <p:nvPr>
+            <p:ph idx="1"/>
+          </p:nvPr>
+        </p:nvSpPr>
+        <p:spPr>
+          <a:xfrm>
+            <a:off x="374371" y="898762"/>
+            <a:ext cx="11339093" cy="4011565"/>
+          </a:xfrm>
+        </p:spPr>
+        <p:txBody>
+          <a:bodyPr>
+            <a:noAutofit/>
+          </a:bodyPr>
+          <a:lstStyle/>
+          <a:p>
+            <a:pPr marL="0" indent="0">
+              <a:buNone/>
+            </a:pPr>
+            <a:r>
+              <a:rPr lang="ru-RU" sz="2400" dirty="0"/>
+              <a:t>Технологии:</a:t>
+            </a:r>
+          </a:p>
+          <a:p>
+            <a:r>
+              <a:rPr lang="ru-RU" sz="2400" dirty="0"/>
+              <a:t>MTCNN — детекция лиц и ключевых точек</a:t>
+            </a:r>
+          </a:p>
+          <a:p>
+            <a:r>
+              <a:rPr lang="ru-RU" sz="2400" dirty="0" err="1"/>
+              <a:t>DeepFace</a:t>
+            </a:r>
+            <a:r>
+              <a:rPr lang="ru-RU" sz="2400" dirty="0"/>
+              <a:t> (VGG-Face, Facenet512) — классификация эмоций</a:t>
+            </a:r>
+          </a:p>
+          <a:p>
+            <a:r>
+              <a:rPr lang="ru-RU" sz="2400" dirty="0" err="1"/>
+              <a:t>MediaPipe</a:t>
+            </a:r>
+            <a:r>
+              <a:rPr lang="ru-RU" sz="2400" dirty="0"/>
+              <a:t> Face </a:t>
+            </a:r>
+            <a:r>
+              <a:rPr lang="ru-RU" sz="2400" dirty="0" err="1"/>
+              <a:t>Landmarker</a:t>
+            </a:r>
+            <a:r>
+              <a:rPr lang="ru-RU" sz="2400" dirty="0"/>
+              <a:t> — коэффициенты мимической активности</a:t>
+            </a:r>
+          </a:p>
+          <a:p>
+            <a:pPr marL="0" indent="0">
+              <a:buNone/>
+            </a:pPr>
+            <a:r>
+              <a:rPr lang="ru-RU" sz="2400" dirty="0"/>
+              <a:t>Классификация по модели Пола Экмана:</a:t>
+            </a:r>
+          </a:p>
+          <a:p>
+            <a:r>
+              <a:rPr lang="ru-RU" sz="2400" dirty="0"/>
+              <a:t>Радость</a:t>
+            </a:r>
+          </a:p>
+          <a:p>
+            <a:r>
+              <a:rPr lang="ru-RU" sz="2400" dirty="0"/>
+              <a:t>грусть</a:t>
+            </a:r>
+          </a:p>
+          <a:p>
+            <a:r>
+              <a:rPr lang="ru-RU" sz="2400" dirty="0"/>
+              <a:t>гнев</a:t>
+            </a:r>
+          </a:p>
+          <a:p>
+            <a:r>
+              <a:rPr lang="ru-RU" sz="2400" dirty="0"/>
+              <a:t>Страх</a:t>
+            </a:r>
+          </a:p>
+          <a:p>
+            <a:r>
+              <a:rPr lang="ru-RU" sz="2400" dirty="0"/>
+              <a:t>Удивление</a:t>
+            </a:r>
+          </a:p>
+          <a:p>
+            <a:r>
+              <a:rPr lang="ru-RU" sz="2400" dirty="0"/>
+              <a:t>отвращение</a:t>
+            </a:r>
+          </a:p>
+        </p:txBody>
+      </p:sp>
+      <p:sp>
+        <p:nvSpPr>
           <p:cNvPr id="2" name="Заголовок 1">
             <a:extLst>
               <a:ext uri="{FF2B5EF4-FFF2-40B4-BE49-F238E27FC236}">
-                <a16:creationId xmlns:a16="http://schemas.microsoft.com/office/drawing/2014/main" id="{554A4237-7384-4D65-B40A-9F7802E2C2BF}"/>
+                <a16:creationId xmlns:a16="http://schemas.microsoft.com/office/drawing/2014/main" id="{1B58CB9A-86AF-B0B7-3E9B-73D490908836}"/>
               </a:ext>
             </a:extLst>
           </p:cNvPr>
@@ -4908,111 +5027,31 @@
             <p:ph type="title"/>
           </p:nvPr>
         </p:nvSpPr>
-        <p:spPr/>
-        <p:txBody>
-          <a:bodyPr/>
-          <a:lstStyle/>
-          <a:p>
-            <a:r>
-              <a:rPr lang="ru-RU" dirty="0"/>
-              <a:t>Информационное обеспечение</a:t>
-            </a:r>
-          </a:p>
-        </p:txBody>
-      </p:sp>
-      <p:sp>
-        <p:nvSpPr>
-          <p:cNvPr id="3" name="Объект 2">
-            <a:extLst>
-              <a:ext uri="{FF2B5EF4-FFF2-40B4-BE49-F238E27FC236}">
-                <a16:creationId xmlns:a16="http://schemas.microsoft.com/office/drawing/2014/main" id="{A03513E5-CE54-4AB7-8986-EBEFE16031CF}"/>
-              </a:ext>
-            </a:extLst>
-          </p:cNvPr>
-          <p:cNvSpPr>
-            <a:spLocks noGrp="1"/>
-          </p:cNvSpPr>
-          <p:nvPr>
-            <p:ph idx="1"/>
-          </p:nvPr>
-        </p:nvSpPr>
-        <p:spPr>
-          <a:xfrm>
-            <a:off x="676656" y="1690688"/>
-            <a:ext cx="10677144" cy="4802187"/>
+        <p:spPr>
+          <a:xfrm>
+            <a:off x="374371" y="103553"/>
+            <a:ext cx="10515600" cy="673688"/>
           </a:xfrm>
         </p:spPr>
         <p:txBody>
           <a:bodyPr>
-            <a:normAutofit fontScale="92500" lnSpcReduction="20000"/>
+            <a:normAutofit/>
           </a:bodyPr>
           <a:lstStyle/>
           <a:p>
-            <a:pPr algn="just"/>
-            <a:r>
-              <a:rPr lang="ru-RU" dirty="0"/>
-              <a:t>Информационное обеспечение АСУ – совокупность системно-ориентированных данных, описывающих принятый в системе словарь базовых описаний, классификаторы и актуализируемых данных о состоянии информационной модели на всех этапах жизненного цикла.</a:t>
-            </a:r>
-          </a:p>
-          <a:p>
-            <a:pPr algn="just"/>
-            <a:r>
-              <a:rPr lang="ru-RU" dirty="0"/>
-              <a:t>Информационным обеспечением системы является набор обученных нейросетевых моделей, конфигурационных файлов и алгоритмов агрегации, с которыми взаимодействует программный комплекс.</a:t>
-            </a:r>
-          </a:p>
-          <a:p>
-            <a:pPr algn="just"/>
-            <a:r>
-              <a:rPr lang="ru-RU" dirty="0"/>
-              <a:t>Входной информацией является:</a:t>
-            </a:r>
-          </a:p>
-          <a:p>
-            <a:pPr lvl="1" algn="just"/>
-            <a:r>
-              <a:rPr lang="ru-RU" dirty="0"/>
-              <a:t>Видеопоток с веб-камеры (640×480+, 15–30 кадров/с, формат JPEG через </a:t>
-            </a:r>
-            <a:r>
-              <a:rPr lang="ru-RU" dirty="0" err="1"/>
-              <a:t>WebSocket</a:t>
-            </a:r>
-            <a:r>
-              <a:rPr lang="ru-RU" dirty="0"/>
-              <a:t>)</a:t>
-            </a:r>
-          </a:p>
-          <a:p>
-            <a:pPr lvl="1" algn="just"/>
-            <a:r>
-              <a:rPr lang="ru-RU" dirty="0"/>
-              <a:t>Аудиопоток с микрофона (16 кГц, моно, формат </a:t>
-            </a:r>
-            <a:r>
-              <a:rPr lang="ru-RU" dirty="0" err="1"/>
-              <a:t>WebM</a:t>
-            </a:r>
-            <a:r>
-              <a:rPr lang="ru-RU" dirty="0"/>
-              <a:t>/Opus)</a:t>
-            </a:r>
-          </a:p>
-          <a:p>
-            <a:pPr algn="just"/>
-            <a:r>
-              <a:rPr lang="ru-RU" dirty="0"/>
-              <a:t>Данные поступают непрерывно, обрабатываются в изолированных AI-шлюзах и сохраняются в реляционной СУБД с использованием формата JSONB для гибкого хранения разнородных аналитических событий.</a:t>
-            </a:r>
-          </a:p>
-        </p:txBody>
-      </p:sp>
-      <p:sp>
-        <p:nvSpPr>
-          <p:cNvPr id="4" name="Номер слайда 3">
-            <a:extLst>
-              <a:ext uri="{FF2B5EF4-FFF2-40B4-BE49-F238E27FC236}">
-                <a16:creationId xmlns:a16="http://schemas.microsoft.com/office/drawing/2014/main" id="{CC5BD3B4-94D6-9BF1-6ED5-AA71E42B8AE9}"/>
+            <a:r>
+              <a:rPr lang="ru-RU" sz="4000" dirty="0"/>
+              <a:t>Модуль анализа лица и эмоций</a:t>
+            </a:r>
+          </a:p>
+        </p:txBody>
+      </p:sp>
+      <p:sp>
+        <p:nvSpPr>
+          <p:cNvPr id="5" name="Номер слайда 4">
+            <a:extLst>
+              <a:ext uri="{FF2B5EF4-FFF2-40B4-BE49-F238E27FC236}">
+                <a16:creationId xmlns:a16="http://schemas.microsoft.com/office/drawing/2014/main" id="{6AC9E070-DAEE-B241-0A58-56DA4A87F8B3}"/>
               </a:ext>
             </a:extLst>
           </p:cNvPr>
@@ -5032,14 +5071,14 @@
               <a:rPr lang="ru-RU" smtClean="0"/>
               <a:t>14</a:t>
             </a:fld>
-            <a:endParaRPr lang="ru-RU"/>
+            <a:endParaRPr lang="ru-RU" dirty="0"/>
           </a:p>
         </p:txBody>
       </p:sp>
     </p:spTree>
     <p:extLst>
       <p:ext uri="{BB962C8B-B14F-4D97-AF65-F5344CB8AC3E}">
-        <p14:creationId xmlns:p14="http://schemas.microsoft.com/office/powerpoint/2010/main" val="2419490598"/>
+        <p14:creationId xmlns:p14="http://schemas.microsoft.com/office/powerpoint/2010/main" val="3376878861"/>
       </p:ext>
     </p:extLst>
   </p:cSld>
@@ -5084,8 +5123,8 @@
         </p:nvSpPr>
         <p:spPr>
           <a:xfrm>
-            <a:off x="374371" y="898762"/>
-            <a:ext cx="11339093" cy="4011565"/>
+            <a:off x="637032" y="839485"/>
+            <a:ext cx="10515600" cy="5839612"/>
           </a:xfrm>
         </p:spPr>
         <p:txBody>
@@ -5094,25 +5133,24 @@
           </a:bodyPr>
           <a:lstStyle/>
           <a:p>
-            <a:pPr marL="0" indent="0">
+            <a:pPr marL="0" indent="0" algn="just">
               <a:buNone/>
             </a:pPr>
             <a:r>
               <a:rPr lang="ru-RU" sz="2400" dirty="0"/>
-              <a:t>Технологии:</a:t>
-            </a:r>
-          </a:p>
-          <a:p>
-            <a:pPr marL="0" indent="0">
-              <a:buNone/>
-            </a:pPr>
+              <a:t>Модель </a:t>
+            </a:r>
+            <a:r>
+              <a:rPr lang="ru-RU" sz="2400" dirty="0" err="1"/>
+              <a:t>Whisper</a:t>
+            </a:r>
             <a:r>
               <a:rPr lang="ru-RU" sz="2400" dirty="0"/>
-              <a:t>• MTCNN — детекция лиц и ключевых точек</a:t>
-            </a:r>
-          </a:p>
-          <a:p>
-            <a:pPr marL="0" indent="0">
+              <a:t>:</a:t>
+            </a:r>
+          </a:p>
+          <a:p>
+            <a:pPr marL="0" indent="0" algn="just">
               <a:buNone/>
             </a:pPr>
             <a:r>
@@ -5121,15 +5159,94 @@
             </a:r>
             <a:r>
               <a:rPr lang="ru-RU" sz="2400" dirty="0" err="1"/>
-              <a:t>DeepFace</a:t>
+              <a:t>Encoder-decoder</a:t>
             </a:r>
             <a:r>
               <a:rPr lang="ru-RU" sz="2400" dirty="0"/>
-              <a:t> (VGG-Face, Facenet512) — классификация эмоций</a:t>
-            </a:r>
-          </a:p>
-          <a:p>
-            <a:pPr marL="0" indent="0">
+              <a:t> трансформер</a:t>
+            </a:r>
+          </a:p>
+          <a:p>
+            <a:pPr marL="0" indent="0" algn="just">
+              <a:buNone/>
+            </a:pPr>
+            <a:r>
+              <a:rPr lang="ru-RU" sz="2400" dirty="0"/>
+              <a:t>• Обеспечивает высокое качество </a:t>
+            </a:r>
+            <a:r>
+              <a:rPr lang="ru-RU" sz="2400" dirty="0" err="1"/>
+              <a:t>транскрибации</a:t>
+            </a:r>
+            <a:r>
+              <a:rPr lang="ru-RU" sz="2400" dirty="0"/>
+              <a:t> речи</a:t>
+            </a:r>
+          </a:p>
+          <a:p>
+            <a:pPr marL="0" indent="0" algn="just">
+              <a:buNone/>
+            </a:pPr>
+            <a:r>
+              <a:rPr lang="ru-RU" sz="2400" dirty="0"/>
+              <a:t>• Поддержка множества языков</a:t>
+            </a:r>
+          </a:p>
+          <a:p>
+            <a:pPr marL="0" indent="0" algn="just">
+              <a:buNone/>
+            </a:pPr>
+            <a:r>
+              <a:rPr lang="ru-RU" sz="2400" dirty="0"/>
+              <a:t>Оптимизация:</a:t>
+            </a:r>
+          </a:p>
+          <a:p>
+            <a:pPr marL="0" indent="0" algn="just">
+              <a:buNone/>
+            </a:pPr>
+            <a:r>
+              <a:rPr lang="ru-RU" sz="2400" dirty="0"/>
+              <a:t>• Квантование весов (float32 → int8/float16)</a:t>
+            </a:r>
+          </a:p>
+          <a:p>
+            <a:pPr marL="0" indent="0" algn="just">
+              <a:buNone/>
+            </a:pPr>
+            <a:r>
+              <a:rPr lang="ru-RU" sz="2400" dirty="0"/>
+              <a:t>• Пакетная обработка (</a:t>
+            </a:r>
+            <a:r>
+              <a:rPr lang="ru-RU" sz="2400" dirty="0" err="1"/>
+              <a:t>batching</a:t>
+            </a:r>
+            <a:r>
+              <a:rPr lang="ru-RU" sz="2400" dirty="0"/>
+              <a:t>)</a:t>
+            </a:r>
+          </a:p>
+          <a:p>
+            <a:pPr marL="0" indent="0" algn="just">
+              <a:buNone/>
+            </a:pPr>
+            <a:r>
+              <a:rPr lang="ru-RU" sz="2400" dirty="0"/>
+              <a:t>• Использование GPU</a:t>
+            </a:r>
+          </a:p>
+          <a:p>
+            <a:pPr marL="0" indent="0" algn="just">
+              <a:buNone/>
+            </a:pPr>
+            <a:r>
+              <a:rPr lang="ru-RU" sz="2400" dirty="0"/>
+              <a:t>Результаты:</a:t>
+            </a:r>
+          </a:p>
+          <a:p>
+            <a:pPr marL="0" indent="0" algn="just">
               <a:buNone/>
             </a:pPr>
             <a:r>
@@ -5138,95 +5255,29 @@
             </a:r>
             <a:r>
               <a:rPr lang="ru-RU" sz="2400" dirty="0" err="1"/>
-              <a:t>MediaPipe</a:t>
+              <a:t>Транскрибация</a:t>
             </a:r>
             <a:r>
               <a:rPr lang="ru-RU" sz="2400" dirty="0"/>
-              <a:t> Face </a:t>
-            </a:r>
-            <a:r>
-              <a:rPr lang="ru-RU" sz="2400" dirty="0" err="1"/>
-              <a:t>Landmarker</a:t>
-            </a:r>
+              <a:t> речи в реальном времени</a:t>
+            </a:r>
+          </a:p>
+          <a:p>
+            <a:pPr marL="0" indent="0" algn="just">
+              <a:buNone/>
+            </a:pPr>
             <a:r>
               <a:rPr lang="ru-RU" sz="2400" dirty="0"/>
-              <a:t> — 468 3D-точек, </a:t>
-            </a:r>
-            <a:r>
-              <a:rPr lang="ru-RU" sz="2400" dirty="0" err="1"/>
-              <a:t>blendshape</a:t>
-            </a:r>
+              <a:t>• Разделение реплик по участникам</a:t>
+            </a:r>
+          </a:p>
+          <a:p>
+            <a:pPr marL="0" indent="0" algn="just">
+              <a:buNone/>
+            </a:pPr>
             <a:r>
               <a:rPr lang="ru-RU" sz="2400" dirty="0"/>
-              <a:t>-коэффициенты</a:t>
-            </a:r>
-          </a:p>
-          <a:p>
-            <a:pPr marL="0" indent="0">
-              <a:buNone/>
-            </a:pPr>
-            <a:r>
-              <a:rPr lang="ru-RU" sz="2400" dirty="0"/>
-              <a:t>Классификация по модели Пола Экмана:</a:t>
-            </a:r>
-          </a:p>
-          <a:p>
-            <a:pPr marL="0" indent="0">
-              <a:buNone/>
-            </a:pPr>
-            <a:r>
-              <a:rPr lang="ru-RU" sz="2400" dirty="0"/>
-              <a:t>• Радость, грусть, гнев</a:t>
-            </a:r>
-          </a:p>
-          <a:p>
-            <a:pPr marL="0" indent="0">
-              <a:buNone/>
-            </a:pPr>
-            <a:r>
-              <a:rPr lang="ru-RU" sz="2400" dirty="0"/>
-              <a:t>• Страх, удивление, отвращение</a:t>
-            </a:r>
-          </a:p>
-          <a:p>
-            <a:pPr marL="0" indent="0">
-              <a:buNone/>
-            </a:pPr>
-            <a:r>
-              <a:rPr lang="ru-RU" sz="2400" dirty="0"/>
-              <a:t>Инженерная реализация:</a:t>
-            </a:r>
-          </a:p>
-          <a:p>
-            <a:pPr marL="0" indent="0">
-              <a:buNone/>
-            </a:pPr>
-            <a:r>
-              <a:rPr lang="ru-RU" sz="2400" dirty="0"/>
-              <a:t>• Семафор для ограничения параллельных </a:t>
-            </a:r>
-            <a:r>
-              <a:rPr lang="ru-RU" sz="2400" dirty="0" err="1"/>
-              <a:t>инференсов</a:t>
-            </a:r>
-            <a:endParaRPr lang="ru-RU" sz="2400" dirty="0"/>
-          </a:p>
-          <a:p>
-            <a:pPr marL="0" indent="0">
-              <a:buNone/>
-            </a:pPr>
-            <a:r>
-              <a:rPr lang="ru-RU" sz="2400" dirty="0"/>
-              <a:t>• Адаптивная частота отправки кадров</a:t>
-            </a:r>
-          </a:p>
-          <a:p>
-            <a:pPr marL="0" indent="0">
-              <a:buNone/>
-            </a:pPr>
-            <a:r>
-              <a:rPr lang="ru-RU" sz="2400" dirty="0"/>
-              <a:t>• Фильтрация ложных срабатываний</a:t>
+              <a:t>• Временные метки для каждой реплики</a:t>
             </a:r>
           </a:p>
         </p:txBody>
@@ -5249,8 +5300,8 @@
         </p:nvSpPr>
         <p:spPr>
           <a:xfrm>
-            <a:off x="374371" y="103553"/>
-            <a:ext cx="10515600" cy="673688"/>
+            <a:off x="465811" y="176704"/>
+            <a:ext cx="10515600" cy="1325563"/>
           </a:xfrm>
         </p:spPr>
         <p:txBody>
@@ -5261,7 +5312,7 @@
           <a:p>
             <a:r>
               <a:rPr lang="ru-RU" sz="4000" dirty="0"/>
-              <a:t>Модуль анализа лица и эмоций</a:t>
+              <a:t>Модуль распознавания речи</a:t>
             </a:r>
           </a:p>
         </p:txBody>
@@ -5271,7 +5322,7 @@
           <p:cNvPr id="5" name="Номер слайда 4">
             <a:extLst>
               <a:ext uri="{FF2B5EF4-FFF2-40B4-BE49-F238E27FC236}">
-                <a16:creationId xmlns:a16="http://schemas.microsoft.com/office/drawing/2014/main" id="{6AC9E070-DAEE-B241-0A58-56DA4A87F8B3}"/>
+                <a16:creationId xmlns:a16="http://schemas.microsoft.com/office/drawing/2014/main" id="{20F5E886-65AE-3D29-A128-93D0A6C755B6}"/>
               </a:ext>
             </a:extLst>
           </p:cNvPr>
@@ -5291,14 +5342,14 @@
               <a:rPr lang="ru-RU" smtClean="0"/>
               <a:t>15</a:t>
             </a:fld>
-            <a:endParaRPr lang="ru-RU" dirty="0"/>
+            <a:endParaRPr lang="ru-RU"/>
           </a:p>
         </p:txBody>
       </p:sp>
     </p:spTree>
     <p:extLst>
       <p:ext uri="{BB962C8B-B14F-4D97-AF65-F5344CB8AC3E}">
-        <p14:creationId xmlns:p14="http://schemas.microsoft.com/office/powerpoint/2010/main" val="3376878861"/>
+        <p14:creationId xmlns:p14="http://schemas.microsoft.com/office/powerpoint/2010/main" val="281831545"/>
       </p:ext>
     </p:extLst>
   </p:cSld>
@@ -5358,15 +5409,15 @@
             </a:pPr>
             <a:r>
               <a:rPr lang="ru-RU" sz="2400" dirty="0"/>
-              <a:t>Модель </a:t>
+              <a:t>Модуль </a:t>
             </a:r>
             <a:r>
               <a:rPr lang="ru-RU" sz="2400" dirty="0" err="1"/>
-              <a:t>Whisper</a:t>
+              <a:t>Sentiment</a:t>
             </a:r>
             <a:r>
               <a:rPr lang="ru-RU" sz="2400" dirty="0"/>
-              <a:t> (OpenAI):</a:t>
+              <a:t> Analysis:</a:t>
             </a:r>
           </a:p>
           <a:p>
@@ -5375,16 +5426,21 @@
             </a:pPr>
             <a:r>
               <a:rPr lang="ru-RU" sz="2400" dirty="0"/>
-              <a:t>• </a:t>
+              <a:t>• Легковесная </a:t>
             </a:r>
             <a:r>
               <a:rPr lang="ru-RU" sz="2400" dirty="0" err="1"/>
-              <a:t>Encoder-decoder</a:t>
+              <a:t>трансформерная</a:t>
             </a:r>
             <a:r>
               <a:rPr lang="ru-RU" sz="2400" dirty="0"/>
-              <a:t> трансформер</a:t>
-            </a:r>
+              <a:t> модель </a:t>
+            </a:r>
+            <a:r>
+              <a:rPr lang="ru-RU" sz="2400" dirty="0" err="1"/>
+              <a:t>DistilBERT</a:t>
+            </a:r>
+            <a:endParaRPr lang="ru-RU" sz="2400" dirty="0"/>
           </a:p>
           <a:p>
             <a:pPr marL="0" indent="0" algn="just">
@@ -5392,15 +5448,33 @@
             </a:pPr>
             <a:r>
               <a:rPr lang="ru-RU" sz="2400" dirty="0"/>
-              <a:t>• Обеспечивает высокое качество </a:t>
+              <a:t>• Классификация тональности: позитивная / нейтральная / негативная</a:t>
+            </a:r>
+          </a:p>
+          <a:p>
+            <a:pPr marL="0" indent="0" algn="just">
+              <a:buNone/>
+            </a:pPr>
+            <a:r>
+              <a:rPr lang="ru-RU" sz="2400" dirty="0"/>
+              <a:t>Алгоритм работы:</a:t>
+            </a:r>
+          </a:p>
+          <a:p>
+            <a:pPr marL="0" indent="0" algn="just">
+              <a:buNone/>
+            </a:pPr>
+            <a:r>
+              <a:rPr lang="ru-RU" sz="2400" dirty="0"/>
+              <a:t>1. Сегментация и </a:t>
             </a:r>
             <a:r>
               <a:rPr lang="ru-RU" sz="2400" dirty="0" err="1"/>
-              <a:t>транскрибации</a:t>
+              <a:t>токенизация</a:t>
             </a:r>
             <a:r>
               <a:rPr lang="ru-RU" sz="2400" dirty="0"/>
-              <a:t> речи</a:t>
+              <a:t> транскрипта</a:t>
             </a:r>
           </a:p>
           <a:p>
@@ -5409,7 +5483,15 @@
             </a:pPr>
             <a:r>
               <a:rPr lang="ru-RU" sz="2400" dirty="0"/>
-              <a:t>• Поддержка множества языков</a:t>
+              <a:t>2. </a:t>
+            </a:r>
+            <a:r>
+              <a:rPr lang="ru-RU" sz="2400" dirty="0" err="1"/>
+              <a:t>Инференс</a:t>
+            </a:r>
+            <a:r>
+              <a:rPr lang="ru-RU" sz="2400" dirty="0"/>
+              <a:t> модели</a:t>
             </a:r>
           </a:p>
           <a:p>
@@ -5418,94 +5500,59 @@
             </a:pPr>
             <a:r>
               <a:rPr lang="ru-RU" sz="2400" dirty="0"/>
-              <a:t>Оптимизация (</a:t>
+              <a:t>3. Присвоение метки тональности</a:t>
+            </a:r>
+          </a:p>
+          <a:p>
+            <a:pPr marL="0" indent="0" algn="just">
+              <a:buNone/>
+            </a:pPr>
+            <a:r>
+              <a:rPr lang="ru-RU" sz="2400" dirty="0"/>
+              <a:t>Интеграция:</a:t>
+            </a:r>
+          </a:p>
+          <a:p>
+            <a:pPr marL="0" indent="0" algn="just">
+              <a:buNone/>
+            </a:pPr>
+            <a:r>
+              <a:rPr lang="ru-RU" sz="2400" dirty="0"/>
+              <a:t>• Сохранение в JSONB с привязкой к временным меткам</a:t>
+            </a:r>
+          </a:p>
+          <a:p>
+            <a:pPr marL="0" indent="0" algn="just">
+              <a:buNone/>
+            </a:pPr>
+            <a:r>
+              <a:rPr lang="ru-RU" sz="2400" dirty="0"/>
+              <a:t>• Сопоставление с визуальными и акустическими признаками</a:t>
+            </a:r>
+          </a:p>
+          <a:p>
+            <a:pPr marL="0" indent="0" algn="just">
+              <a:buNone/>
+            </a:pPr>
+            <a:r>
+              <a:rPr lang="ru-RU" sz="2400" dirty="0"/>
+              <a:t>• Принцип </a:t>
             </a:r>
             <a:r>
               <a:rPr lang="ru-RU" sz="2400" dirty="0" err="1"/>
-              <a:t>faster-whisper</a:t>
+              <a:t>late</a:t>
             </a:r>
             <a:r>
               <a:rPr lang="ru-RU" sz="2400" dirty="0"/>
-              <a:t>):</a:t>
-            </a:r>
-          </a:p>
-          <a:p>
-            <a:pPr marL="0" indent="0" algn="just">
-              <a:buNone/>
-            </a:pPr>
+              <a:t> </a:t>
+            </a:r>
+            <a:r>
+              <a:rPr lang="ru-RU" sz="2400" dirty="0" err="1"/>
+              <a:t>fusion</a:t>
+            </a:r>
             <a:r>
               <a:rPr lang="ru-RU" sz="2400" dirty="0"/>
-              <a:t>• Квантование весов (float32 → int8/float16)</a:t>
-            </a:r>
-          </a:p>
-          <a:p>
-            <a:pPr marL="0" indent="0" algn="just">
-              <a:buNone/>
-            </a:pPr>
-            <a:r>
-              <a:rPr lang="ru-RU" sz="2400" dirty="0"/>
-              <a:t>• Пакетная обработка (</a:t>
-            </a:r>
-            <a:r>
-              <a:rPr lang="ru-RU" sz="2400" dirty="0" err="1"/>
-              <a:t>batching</a:t>
-            </a:r>
-            <a:r>
-              <a:rPr lang="ru-RU" sz="2400" dirty="0"/>
-              <a:t>)</a:t>
-            </a:r>
-          </a:p>
-          <a:p>
-            <a:pPr marL="0" indent="0" algn="just">
-              <a:buNone/>
-            </a:pPr>
-            <a:r>
-              <a:rPr lang="ru-RU" sz="2400" dirty="0"/>
-              <a:t>• Использование GPU</a:t>
-            </a:r>
-          </a:p>
-          <a:p>
-            <a:pPr marL="0" indent="0" algn="just">
-              <a:buNone/>
-            </a:pPr>
-            <a:r>
-              <a:rPr lang="ru-RU" sz="2400" dirty="0"/>
-              <a:t>Результаты:</a:t>
-            </a:r>
-          </a:p>
-          <a:p>
-            <a:pPr marL="0" indent="0" algn="just">
-              <a:buNone/>
-            </a:pPr>
-            <a:r>
-              <a:rPr lang="ru-RU" sz="2400" dirty="0"/>
-              <a:t>• </a:t>
-            </a:r>
-            <a:r>
-              <a:rPr lang="ru-RU" sz="2400" dirty="0" err="1"/>
-              <a:t>Транскрибация</a:t>
-            </a:r>
-            <a:r>
-              <a:rPr lang="ru-RU" sz="2400" dirty="0"/>
-              <a:t> речи в реальном времени</a:t>
-            </a:r>
-          </a:p>
-          <a:p>
-            <a:pPr marL="0" indent="0" algn="just">
-              <a:buNone/>
-            </a:pPr>
-            <a:r>
-              <a:rPr lang="ru-RU" sz="2400" dirty="0"/>
-              <a:t>• Разделение реплик по участникам</a:t>
-            </a:r>
-          </a:p>
-          <a:p>
-            <a:pPr marL="0" indent="0" algn="just">
-              <a:buNone/>
-            </a:pPr>
-            <a:r>
-              <a:rPr lang="ru-RU" sz="2400" dirty="0"/>
-              <a:t>• Временные метки для каждой реплики</a:t>
+              <a:t> при формировании отчёта</a:t>
             </a:r>
           </a:p>
         </p:txBody>
@@ -5540,16 +5587,13 @@
           <a:p>
             <a:r>
               <a:rPr lang="ru-RU" sz="4000" dirty="0"/>
-              <a:t>Модуль распознавания речи (</a:t>
-            </a:r>
-            <a:r>
-              <a:rPr lang="en-US" sz="4000" dirty="0"/>
-              <a:t>ASR</a:t>
-            </a:r>
-            <a:r>
-              <a:rPr lang="ru-RU" sz="4000" dirty="0"/>
-              <a:t>)</a:t>
-            </a:r>
+              <a:t>Анализ </a:t>
+            </a:r>
+            <a:r>
+              <a:rPr lang="ru-RU" sz="4000"/>
+              <a:t>тональности текста</a:t>
+            </a:r>
+            <a:endParaRPr lang="en-US" sz="4000" dirty="0"/>
           </a:p>
         </p:txBody>
       </p:sp>
@@ -5585,7 +5629,7 @@
     </p:spTree>
     <p:extLst>
       <p:ext uri="{BB962C8B-B14F-4D97-AF65-F5344CB8AC3E}">
-        <p14:creationId xmlns:p14="http://schemas.microsoft.com/office/powerpoint/2010/main" val="281831545"/>
+        <p14:creationId xmlns:p14="http://schemas.microsoft.com/office/powerpoint/2010/main" val="1215583211"/>
       </p:ext>
     </p:extLst>
   </p:cSld>
@@ -5630,189 +5674,8 @@
         </p:nvSpPr>
         <p:spPr>
           <a:xfrm>
-            <a:off x="637032" y="839485"/>
-            <a:ext cx="10515600" cy="5839612"/>
-          </a:xfrm>
-        </p:spPr>
-        <p:txBody>
-          <a:bodyPr>
-            <a:noAutofit/>
-          </a:bodyPr>
-          <a:lstStyle/>
-          <a:p>
-            <a:pPr marL="0" indent="0" algn="just">
-              <a:buNone/>
-            </a:pPr>
-            <a:r>
-              <a:rPr lang="ru-RU" sz="2400" dirty="0"/>
-              <a:t>Модуль </a:t>
-            </a:r>
-            <a:r>
-              <a:rPr lang="ru-RU" sz="2400" dirty="0" err="1"/>
-              <a:t>Sentiment</a:t>
-            </a:r>
-            <a:r>
-              <a:rPr lang="ru-RU" sz="2400" dirty="0"/>
-              <a:t> Analysis:</a:t>
-            </a:r>
-          </a:p>
-          <a:p>
-            <a:pPr marL="0" indent="0" algn="just">
-              <a:buNone/>
-            </a:pPr>
-            <a:r>
-              <a:rPr lang="ru-RU" sz="2400" dirty="0"/>
-              <a:t>• Легковесная </a:t>
-            </a:r>
-            <a:r>
-              <a:rPr lang="ru-RU" sz="2400" dirty="0" err="1"/>
-              <a:t>трансформерная</a:t>
-            </a:r>
-            <a:r>
-              <a:rPr lang="ru-RU" sz="2400" dirty="0"/>
-              <a:t> модель </a:t>
-            </a:r>
-            <a:r>
-              <a:rPr lang="ru-RU" sz="2400"/>
-              <a:t>DistilBERT</a:t>
-            </a:r>
-            <a:endParaRPr lang="ru-RU" sz="2400" dirty="0"/>
-          </a:p>
-          <a:p>
-            <a:pPr marL="0" indent="0" algn="just">
-              <a:buNone/>
-            </a:pPr>
-            <a:r>
-              <a:rPr lang="ru-RU" sz="2400" dirty="0"/>
-              <a:t>• Классификация тональности: позитивная / нейтральная / негативная</a:t>
-            </a:r>
-          </a:p>
-          <a:p>
-            <a:pPr marL="0" indent="0" algn="just">
-              <a:buNone/>
-            </a:pPr>
-            <a:r>
-              <a:rPr lang="ru-RU" sz="2400" dirty="0"/>
-              <a:t>Алгоритм работы:</a:t>
-            </a:r>
-          </a:p>
-          <a:p>
-            <a:pPr marL="0" indent="0" algn="just">
-              <a:buNone/>
-            </a:pPr>
-            <a:r>
-              <a:rPr lang="ru-RU" sz="2400" dirty="0"/>
-              <a:t>1. Сегментация и </a:t>
-            </a:r>
-            <a:r>
-              <a:rPr lang="ru-RU" sz="2400" dirty="0" err="1"/>
-              <a:t>токенизация</a:t>
-            </a:r>
-            <a:r>
-              <a:rPr lang="ru-RU" sz="2400" dirty="0"/>
-              <a:t> транскрипта</a:t>
-            </a:r>
-          </a:p>
-          <a:p>
-            <a:pPr marL="0" indent="0" algn="just">
-              <a:buNone/>
-            </a:pPr>
-            <a:r>
-              <a:rPr lang="ru-RU" sz="2400" dirty="0"/>
-              <a:t>2. </a:t>
-            </a:r>
-            <a:r>
-              <a:rPr lang="ru-RU" sz="2400" dirty="0" err="1"/>
-              <a:t>Инференс</a:t>
-            </a:r>
-            <a:r>
-              <a:rPr lang="ru-RU" sz="2400" dirty="0"/>
-              <a:t> модели</a:t>
-            </a:r>
-          </a:p>
-          <a:p>
-            <a:pPr marL="0" indent="0" algn="just">
-              <a:buNone/>
-            </a:pPr>
-            <a:r>
-              <a:rPr lang="ru-RU" sz="2400" dirty="0"/>
-              <a:t>3. Присвоение метки тональности</a:t>
-            </a:r>
-          </a:p>
-          <a:p>
-            <a:pPr marL="0" indent="0" algn="just">
-              <a:buNone/>
-            </a:pPr>
-            <a:r>
-              <a:rPr lang="ru-RU" sz="2400" dirty="0"/>
-              <a:t>Интеграция:</a:t>
-            </a:r>
-          </a:p>
-          <a:p>
-            <a:pPr marL="0" indent="0" algn="just">
-              <a:buNone/>
-            </a:pPr>
-            <a:r>
-              <a:rPr lang="ru-RU" sz="2400" dirty="0"/>
-              <a:t>• Сохранение в JSONB с привязкой к временным меткам</a:t>
-            </a:r>
-          </a:p>
-          <a:p>
-            <a:pPr marL="0" indent="0" algn="just">
-              <a:buNone/>
-            </a:pPr>
-            <a:r>
-              <a:rPr lang="ru-RU" sz="2400" dirty="0"/>
-              <a:t>• Сопоставление с визуальными и акустическими признаками</a:t>
-            </a:r>
-          </a:p>
-          <a:p>
-            <a:pPr marL="0" indent="0" algn="just">
-              <a:buNone/>
-            </a:pPr>
-            <a:r>
-              <a:rPr lang="ru-RU" sz="2400" dirty="0"/>
-              <a:t>• Принцип </a:t>
-            </a:r>
-            <a:r>
-              <a:rPr lang="ru-RU" sz="2400" dirty="0" err="1"/>
-              <a:t>late</a:t>
-            </a:r>
-            <a:r>
-              <a:rPr lang="ru-RU" sz="2400" dirty="0"/>
-              <a:t> </a:t>
-            </a:r>
-            <a:r>
-              <a:rPr lang="ru-RU" sz="2400" dirty="0" err="1"/>
-              <a:t>fusion</a:t>
-            </a:r>
-            <a:r>
-              <a:rPr lang="ru-RU" sz="2400" dirty="0"/>
-              <a:t> при формировании отчёта</a:t>
-            </a:r>
-          </a:p>
-        </p:txBody>
-      </p:sp>
-      <p:sp>
-        <p:nvSpPr>
-          <p:cNvPr id="2" name="Заголовок 1">
-            <a:extLst>
-              <a:ext uri="{FF2B5EF4-FFF2-40B4-BE49-F238E27FC236}">
-                <a16:creationId xmlns:a16="http://schemas.microsoft.com/office/drawing/2014/main" id="{1B58CB9A-86AF-B0B7-3E9B-73D490908836}"/>
-              </a:ext>
-            </a:extLst>
-          </p:cNvPr>
-          <p:cNvSpPr>
-            <a:spLocks noGrp="1"/>
-          </p:cNvSpPr>
-          <p:nvPr>
-            <p:ph type="title"/>
-          </p:nvPr>
-        </p:nvSpPr>
-        <p:spPr>
-          <a:xfrm>
-            <a:off x="465811" y="176704"/>
-            <a:ext cx="10515600" cy="1325563"/>
+            <a:off x="419164" y="969118"/>
+            <a:ext cx="4856924" cy="5839612"/>
           </a:xfrm>
         </p:spPr>
         <p:txBody>
@@ -5821,23 +5684,191 @@
           </a:bodyPr>
           <a:lstStyle/>
           <a:p>
+            <a:pPr algn="just"/>
+            <a:r>
+              <a:rPr lang="ru-RU" sz="1800" dirty="0"/>
+              <a:t>В связи с необходимостью более детального анализа мимики и положения головы в пространстве, в систему интегрирована модель </a:t>
+            </a:r>
+            <a:r>
+              <a:rPr lang="ru-RU" sz="1800" dirty="0" err="1"/>
+              <a:t>MediaPipe</a:t>
+            </a:r>
+            <a:r>
+              <a:rPr lang="ru-RU" sz="1800" dirty="0"/>
+              <a:t> Face </a:t>
+            </a:r>
+            <a:r>
+              <a:rPr lang="ru-RU" sz="1800" dirty="0" err="1"/>
+              <a:t>Landmarker</a:t>
+            </a:r>
+            <a:r>
+              <a:rPr lang="ru-RU" sz="1800" dirty="0"/>
+              <a:t> от Google.</a:t>
+            </a:r>
+          </a:p>
+          <a:p>
+            <a:pPr algn="just"/>
+            <a:r>
+              <a:rPr lang="ru-RU" sz="1800" dirty="0"/>
+              <a:t>На вход модели подаётся выровненное изображение лица. Модель строит плотную сетку из 468 трёхмерных ключевых точек, охватывающих контуры глаз, бровей, носа, губ и овала лица.</a:t>
+            </a:r>
+          </a:p>
+          <a:p>
+            <a:pPr algn="just"/>
+            <a:r>
+              <a:rPr lang="ru-RU" sz="1800" dirty="0"/>
+              <a:t>На выходе формируются </a:t>
+            </a:r>
+            <a:r>
+              <a:rPr lang="ru-RU" sz="1800" dirty="0" err="1"/>
+              <a:t>blendshape</a:t>
+            </a:r>
+            <a:r>
+              <a:rPr lang="ru-RU" sz="1800" dirty="0"/>
+              <a:t>-коэффициенты (активность групп лицевых мышц), углы поворота головы (</a:t>
+            </a:r>
+            <a:r>
+              <a:rPr lang="ru-RU" sz="1800" dirty="0" err="1"/>
+              <a:t>yaw</a:t>
+            </a:r>
+            <a:r>
+              <a:rPr lang="ru-RU" sz="1800" dirty="0"/>
+              <a:t>, </a:t>
+            </a:r>
+            <a:r>
+              <a:rPr lang="ru-RU" sz="1800" dirty="0" err="1"/>
+              <a:t>pitch</a:t>
+            </a:r>
+            <a:r>
+              <a:rPr lang="ru-RU" sz="1800" dirty="0"/>
+              <a:t>, </a:t>
+            </a:r>
+            <a:r>
+              <a:rPr lang="ru-RU" sz="1800" dirty="0" err="1"/>
+              <a:t>roll</a:t>
+            </a:r>
+            <a:r>
+              <a:rPr lang="ru-RU" sz="1800" dirty="0"/>
+              <a:t>) и данные для отслеживания </a:t>
+            </a:r>
+            <a:r>
+              <a:rPr lang="ru-RU" sz="1800" dirty="0" err="1"/>
+              <a:t>микровыражений</a:t>
+            </a:r>
+            <a:r>
+              <a:rPr lang="ru-RU" sz="1800" dirty="0"/>
+              <a:t>.</a:t>
+            </a:r>
+          </a:p>
+          <a:p>
+            <a:pPr algn="just"/>
+            <a:r>
+              <a:rPr lang="ru-RU" sz="1800" dirty="0"/>
+              <a:t>Модель перезаписывает и обогащает базовые данные классификации, позволяя системе учитывать не только статические эмоции, но и динамику мимики</a:t>
+            </a:r>
+            <a:r>
+              <a:rPr lang="en-US" sz="1800" dirty="0"/>
+              <a:t>.</a:t>
+            </a:r>
+            <a:endParaRPr lang="ru-RU" sz="1800" dirty="0"/>
+          </a:p>
+        </p:txBody>
+      </p:sp>
+      <p:sp>
+        <p:nvSpPr>
+          <p:cNvPr id="2" name="Заголовок 1">
+            <a:extLst>
+              <a:ext uri="{FF2B5EF4-FFF2-40B4-BE49-F238E27FC236}">
+                <a16:creationId xmlns:a16="http://schemas.microsoft.com/office/drawing/2014/main" id="{1B58CB9A-86AF-B0B7-3E9B-73D490908836}"/>
+              </a:ext>
+            </a:extLst>
+          </p:cNvPr>
+          <p:cNvSpPr>
+            <a:spLocks noGrp="1"/>
+          </p:cNvSpPr>
+          <p:nvPr>
+            <p:ph type="title"/>
+          </p:nvPr>
+        </p:nvSpPr>
+        <p:spPr>
+          <a:xfrm>
+            <a:off x="419164" y="103552"/>
+            <a:ext cx="10515600" cy="1325563"/>
+          </a:xfrm>
+        </p:spPr>
+        <p:txBody>
+          <a:bodyPr>
+            <a:normAutofit/>
+          </a:bodyPr>
+          <a:lstStyle/>
+          <a:p>
             <a:r>
               <a:rPr lang="ru-RU" sz="4000" dirty="0"/>
-              <a:t>Анализ тональности текста (</a:t>
+              <a:t>Модель </a:t>
+            </a:r>
+            <a:r>
+              <a:rPr lang="en-US" sz="4000" dirty="0" err="1"/>
+              <a:t>MediaPipe</a:t>
             </a:r>
             <a:r>
               <a:rPr lang="en-US" sz="4000" dirty="0"/>
-              <a:t>NLP)</a:t>
-            </a:r>
-          </a:p>
-        </p:txBody>
-      </p:sp>
+              <a:t> Face </a:t>
+            </a:r>
+            <a:r>
+              <a:rPr lang="en-US" sz="4000" dirty="0" err="1"/>
+              <a:t>Landmarker</a:t>
+            </a:r>
+            <a:endParaRPr lang="en-US" sz="4000" dirty="0"/>
+          </a:p>
+        </p:txBody>
+      </p:sp>
+      <p:pic>
+        <p:nvPicPr>
+          <p:cNvPr id="7" name="Рисунок 6" descr="Задача &quot;Опорный знак на лице&quot;">
+            <a:extLst>
+              <a:ext uri="{FF2B5EF4-FFF2-40B4-BE49-F238E27FC236}">
+                <a16:creationId xmlns:a16="http://schemas.microsoft.com/office/drawing/2014/main" id="{AC6A1973-8F20-E21C-8984-347E22110987}"/>
+              </a:ext>
+            </a:extLst>
+          </p:cNvPr>
+          <p:cNvPicPr>
+            <a:picLocks noChangeAspect="1"/>
+          </p:cNvPicPr>
+          <p:nvPr/>
+        </p:nvPicPr>
+        <p:blipFill>
+          <a:blip r:embed="rId2">
+            <a:extLst>
+              <a:ext uri="{28A0092B-C50C-407E-A947-70E740481C1C}">
+                <a14:useLocalDpi xmlns:a14="http://schemas.microsoft.com/office/drawing/2010/main" val="0"/>
+              </a:ext>
+            </a:extLst>
+          </a:blip>
+          <a:srcRect/>
+          <a:stretch>
+            <a:fillRect/>
+          </a:stretch>
+        </p:blipFill>
+        <p:spPr bwMode="auto">
+          <a:xfrm>
+            <a:off x="5832411" y="1429115"/>
+            <a:ext cx="5940425" cy="3256280"/>
+          </a:xfrm>
+          <a:prstGeom prst="rect">
+            <a:avLst/>
+          </a:prstGeom>
+          <a:noFill/>
+          <a:ln>
+            <a:noFill/>
+          </a:ln>
+        </p:spPr>
+      </p:pic>
       <p:sp>
         <p:nvSpPr>
           <p:cNvPr id="5" name="Номер слайда 4">
             <a:extLst>
               <a:ext uri="{FF2B5EF4-FFF2-40B4-BE49-F238E27FC236}">
-                <a16:creationId xmlns:a16="http://schemas.microsoft.com/office/drawing/2014/main" id="{20F5E886-65AE-3D29-A128-93D0A6C755B6}"/>
+                <a16:creationId xmlns:a16="http://schemas.microsoft.com/office/drawing/2014/main" id="{C938FBF3-4A9B-D591-C9C7-E929397E9F73}"/>
               </a:ext>
             </a:extLst>
           </p:cNvPr>
@@ -5864,7 +5895,7 @@
     </p:spTree>
     <p:extLst>
       <p:ext uri="{BB962C8B-B14F-4D97-AF65-F5344CB8AC3E}">
-        <p14:creationId xmlns:p14="http://schemas.microsoft.com/office/powerpoint/2010/main" val="1215583211"/>
+        <p14:creationId xmlns:p14="http://schemas.microsoft.com/office/powerpoint/2010/main" val="441378147"/>
       </p:ext>
     </p:extLst>
   </p:cSld>
@@ -5893,128 +5924,10 @@
       </p:grpSpPr>
       <p:sp>
         <p:nvSpPr>
-          <p:cNvPr id="3" name="Объект 2">
-            <a:extLst>
-              <a:ext uri="{FF2B5EF4-FFF2-40B4-BE49-F238E27FC236}">
-                <a16:creationId xmlns:a16="http://schemas.microsoft.com/office/drawing/2014/main" id="{C9F7A7BF-345D-4464-BA61-1943803CE2E9}"/>
-              </a:ext>
-            </a:extLst>
-          </p:cNvPr>
-          <p:cNvSpPr>
-            <a:spLocks noGrp="1"/>
-          </p:cNvSpPr>
-          <p:nvPr>
-            <p:ph idx="1"/>
-          </p:nvPr>
-        </p:nvSpPr>
-        <p:spPr>
-          <a:xfrm>
-            <a:off x="419164" y="969118"/>
-            <a:ext cx="4856924" cy="5839612"/>
-          </a:xfrm>
-        </p:spPr>
-        <p:txBody>
-          <a:bodyPr>
-            <a:normAutofit/>
-          </a:bodyPr>
-          <a:lstStyle/>
-          <a:p>
-            <a:pPr algn="just"/>
-            <a:r>
-              <a:rPr lang="ru-RU" sz="1800" dirty="0"/>
-              <a:t>В связи с необходимостью более детального анализа мимики и положения головы в пространстве, в систему интегрирована модель </a:t>
-            </a:r>
-            <a:r>
-              <a:rPr lang="ru-RU" sz="1800" dirty="0" err="1"/>
-              <a:t>MediaPipe</a:t>
-            </a:r>
-            <a:r>
-              <a:rPr lang="ru-RU" sz="1800" dirty="0"/>
-              <a:t> Face </a:t>
-            </a:r>
-            <a:r>
-              <a:rPr lang="ru-RU" sz="1800" dirty="0" err="1"/>
-              <a:t>Landmarker</a:t>
-            </a:r>
-            <a:r>
-              <a:rPr lang="ru-RU" sz="1800" dirty="0"/>
-              <a:t> от Google.</a:t>
-            </a:r>
-          </a:p>
-          <a:p>
-            <a:pPr algn="just"/>
-            <a:r>
-              <a:rPr lang="ru-RU" sz="1800" dirty="0"/>
-              <a:t>На вход модели подаётся выровненное изображение лица. Модель строит плотную сетку из 468 трёхмерных ключевых точек, охватывающих контуры глаз, бровей, носа, губ и овала лица.</a:t>
-            </a:r>
-          </a:p>
-          <a:p>
-            <a:pPr algn="just"/>
-            <a:r>
-              <a:rPr lang="ru-RU" sz="1800" dirty="0"/>
-              <a:t>На выходе формируются </a:t>
-            </a:r>
-            <a:r>
-              <a:rPr lang="ru-RU" sz="1800" dirty="0" err="1"/>
-              <a:t>blendshape</a:t>
-            </a:r>
-            <a:r>
-              <a:rPr lang="ru-RU" sz="1800" dirty="0"/>
-              <a:t>-коэффициенты (активность групп лицевых мышц), углы поворота головы (</a:t>
-            </a:r>
-            <a:r>
-              <a:rPr lang="ru-RU" sz="1800" dirty="0" err="1"/>
-              <a:t>yaw</a:t>
-            </a:r>
-            <a:r>
-              <a:rPr lang="ru-RU" sz="1800" dirty="0"/>
-              <a:t>, </a:t>
-            </a:r>
-            <a:r>
-              <a:rPr lang="ru-RU" sz="1800" dirty="0" err="1"/>
-              <a:t>pitch</a:t>
-            </a:r>
-            <a:r>
-              <a:rPr lang="ru-RU" sz="1800" dirty="0"/>
-              <a:t>, </a:t>
-            </a:r>
-            <a:r>
-              <a:rPr lang="ru-RU" sz="1800" dirty="0" err="1"/>
-              <a:t>roll</a:t>
-            </a:r>
-            <a:r>
-              <a:rPr lang="ru-RU" sz="1800" dirty="0"/>
-              <a:t>) и данные для отслеживания </a:t>
-            </a:r>
-            <a:r>
-              <a:rPr lang="ru-RU" sz="1800" dirty="0" err="1"/>
-              <a:t>микровыражений</a:t>
-            </a:r>
-            <a:r>
-              <a:rPr lang="ru-RU" sz="1800" dirty="0"/>
-              <a:t>.</a:t>
-            </a:r>
-          </a:p>
-          <a:p>
-            <a:pPr algn="just"/>
-            <a:r>
-              <a:rPr lang="ru-RU" sz="1800" dirty="0"/>
-              <a:t>Модель перезаписывает и обогащает базовые данные классификации, позволяя системе учитывать не только статические эмоции, но и динамику мимики</a:t>
-            </a:r>
-            <a:r>
-              <a:rPr lang="en-US" sz="1800" dirty="0"/>
-              <a:t>.</a:t>
-            </a:r>
-            <a:endParaRPr lang="ru-RU" sz="1800" dirty="0"/>
-          </a:p>
-        </p:txBody>
-      </p:sp>
-      <p:sp>
-        <p:nvSpPr>
-          <p:cNvPr id="2" name="Заголовок 1">
-            <a:extLst>
-              <a:ext uri="{FF2B5EF4-FFF2-40B4-BE49-F238E27FC236}">
-                <a16:creationId xmlns:a16="http://schemas.microsoft.com/office/drawing/2014/main" id="{1B58CB9A-86AF-B0B7-3E9B-73D490908836}"/>
+          <p:cNvPr id="9" name="Заголовок 8">
+            <a:extLst>
+              <a:ext uri="{FF2B5EF4-FFF2-40B4-BE49-F238E27FC236}">
+                <a16:creationId xmlns:a16="http://schemas.microsoft.com/office/drawing/2014/main" id="{97468337-8816-F43C-CDDA-7015138208A6}"/>
               </a:ext>
             </a:extLst>
           </p:cNvPr>
@@ -6027,42 +5940,56 @@
         </p:nvSpPr>
         <p:spPr>
           <a:xfrm>
-            <a:off x="419164" y="103552"/>
+            <a:off x="603504" y="93216"/>
             <a:ext cx="10515600" cy="1325563"/>
           </a:xfrm>
         </p:spPr>
         <p:txBody>
-          <a:bodyPr>
-            <a:normAutofit/>
-          </a:bodyPr>
-          <a:lstStyle/>
-          <a:p>
-            <a:r>
-              <a:rPr lang="ru-RU" sz="4000" dirty="0"/>
-              <a:t>Модель </a:t>
-            </a:r>
-            <a:r>
-              <a:rPr lang="en-US" sz="4000" dirty="0" err="1"/>
-              <a:t>MediaPipe</a:t>
-            </a:r>
-            <a:r>
-              <a:rPr lang="en-US" sz="4000" dirty="0"/>
-              <a:t> Face </a:t>
-            </a:r>
-            <a:r>
-              <a:rPr lang="en-US" sz="4000" dirty="0" err="1"/>
-              <a:t>Landmarker</a:t>
-            </a:r>
-            <a:endParaRPr lang="en-US" sz="4000" dirty="0"/>
+          <a:bodyPr/>
+          <a:lstStyle/>
+          <a:p>
+            <a:r>
+              <a:rPr lang="ru-RU" dirty="0"/>
+              <a:t>Интерфейс системы</a:t>
+            </a:r>
+          </a:p>
+        </p:txBody>
+      </p:sp>
+      <p:sp>
+        <p:nvSpPr>
+          <p:cNvPr id="2" name="Номер слайда 1">
+            <a:extLst>
+              <a:ext uri="{FF2B5EF4-FFF2-40B4-BE49-F238E27FC236}">
+                <a16:creationId xmlns:a16="http://schemas.microsoft.com/office/drawing/2014/main" id="{2DA7844C-4845-591E-A755-516346161CEC}"/>
+              </a:ext>
+            </a:extLst>
+          </p:cNvPr>
+          <p:cNvSpPr>
+            <a:spLocks noGrp="1"/>
+          </p:cNvSpPr>
+          <p:nvPr>
+            <p:ph type="sldNum" sz="quarter" idx="12"/>
+          </p:nvPr>
+        </p:nvSpPr>
+        <p:spPr/>
+        <p:txBody>
+          <a:bodyPr/>
+          <a:lstStyle/>
+          <a:p>
+            <a:fld id="{5F9DB6E4-81A8-48FA-A111-413E3E85E768}" type="slidenum">
+              <a:rPr lang="ru-RU" smtClean="0"/>
+              <a:t>18</a:t>
+            </a:fld>
+            <a:endParaRPr lang="ru-RU"/>
           </a:p>
         </p:txBody>
       </p:sp>
       <p:pic>
         <p:nvPicPr>
-          <p:cNvPr id="7" name="Рисунок 6" descr="Задача &quot;Опорный знак на лице&quot;">
-            <a:extLst>
-              <a:ext uri="{FF2B5EF4-FFF2-40B4-BE49-F238E27FC236}">
-                <a16:creationId xmlns:a16="http://schemas.microsoft.com/office/drawing/2014/main" id="{AC6A1973-8F20-E21C-8984-347E22110987}"/>
+          <p:cNvPr id="3" name="Рисунок 2">
+            <a:extLst>
+              <a:ext uri="{FF2B5EF4-FFF2-40B4-BE49-F238E27FC236}">
+                <a16:creationId xmlns:a16="http://schemas.microsoft.com/office/drawing/2014/main" id="{D33FE67C-39AF-9CC6-D363-97D9E422D540}"/>
               </a:ext>
             </a:extLst>
           </p:cNvPr>
@@ -6072,65 +5999,25 @@
           <p:nvPr/>
         </p:nvPicPr>
         <p:blipFill>
-          <a:blip r:embed="rId2">
-            <a:extLst>
-              <a:ext uri="{28A0092B-C50C-407E-A947-70E740481C1C}">
-                <a14:useLocalDpi xmlns:a14="http://schemas.microsoft.com/office/drawing/2010/main" val="0"/>
-              </a:ext>
-            </a:extLst>
-          </a:blip>
-          <a:srcRect/>
+          <a:blip r:embed="rId2"/>
           <a:stretch>
             <a:fillRect/>
           </a:stretch>
         </p:blipFill>
-        <p:spPr bwMode="auto">
-          <a:xfrm>
-            <a:off x="5832411" y="1429115"/>
-            <a:ext cx="5940425" cy="3256280"/>
+        <p:spPr>
+          <a:xfrm>
+            <a:off x="1690963" y="1079214"/>
+            <a:ext cx="9368101" cy="4699572"/>
           </a:xfrm>
           <a:prstGeom prst="rect">
             <a:avLst/>
           </a:prstGeom>
-          <a:noFill/>
-          <a:ln>
-            <a:noFill/>
-          </a:ln>
         </p:spPr>
       </p:pic>
-      <p:sp>
-        <p:nvSpPr>
-          <p:cNvPr id="5" name="Номер слайда 4">
-            <a:extLst>
-              <a:ext uri="{FF2B5EF4-FFF2-40B4-BE49-F238E27FC236}">
-                <a16:creationId xmlns:a16="http://schemas.microsoft.com/office/drawing/2014/main" id="{C938FBF3-4A9B-D591-C9C7-E929397E9F73}"/>
-              </a:ext>
-            </a:extLst>
-          </p:cNvPr>
-          <p:cNvSpPr>
-            <a:spLocks noGrp="1"/>
-          </p:cNvSpPr>
-          <p:nvPr>
-            <p:ph type="sldNum" sz="quarter" idx="12"/>
-          </p:nvPr>
-        </p:nvSpPr>
-        <p:spPr/>
-        <p:txBody>
-          <a:bodyPr/>
-          <a:lstStyle/>
-          <a:p>
-            <a:fld id="{5F9DB6E4-81A8-48FA-A111-413E3E85E768}" type="slidenum">
-              <a:rPr lang="ru-RU" smtClean="0"/>
-              <a:t>18</a:t>
-            </a:fld>
-            <a:endParaRPr lang="ru-RU"/>
-          </a:p>
-        </p:txBody>
-      </p:sp>
     </p:spTree>
     <p:extLst>
       <p:ext uri="{BB962C8B-B14F-4D97-AF65-F5344CB8AC3E}">
-        <p14:creationId xmlns:p14="http://schemas.microsoft.com/office/powerpoint/2010/main" val="441378147"/>
+        <p14:creationId xmlns:p14="http://schemas.microsoft.com/office/powerpoint/2010/main" val="3695925043"/>
       </p:ext>
     </p:extLst>
   </p:cSld>
@@ -6159,10 +6046,10 @@
       </p:grpSpPr>
       <p:sp>
         <p:nvSpPr>
-          <p:cNvPr id="9" name="Заголовок 8">
-            <a:extLst>
-              <a:ext uri="{FF2B5EF4-FFF2-40B4-BE49-F238E27FC236}">
-                <a16:creationId xmlns:a16="http://schemas.microsoft.com/office/drawing/2014/main" id="{97468337-8816-F43C-CDDA-7015138208A6}"/>
+          <p:cNvPr id="2" name="Заголовок 1">
+            <a:extLst>
+              <a:ext uri="{FF2B5EF4-FFF2-40B4-BE49-F238E27FC236}">
+                <a16:creationId xmlns:a16="http://schemas.microsoft.com/office/drawing/2014/main" id="{8E4679AE-9695-41ED-964A-F63B6DC860B9}"/>
               </a:ext>
             </a:extLst>
           </p:cNvPr>
@@ -6175,7 +6062,7 @@
         </p:nvSpPr>
         <p:spPr>
           <a:xfrm>
-            <a:off x="603504" y="93216"/>
+            <a:off x="838200" y="181992"/>
             <a:ext cx="10515600" cy="1325563"/>
           </a:xfrm>
         </p:spPr>
@@ -6185,17 +6072,155 @@
           <a:p>
             <a:r>
               <a:rPr lang="ru-RU" dirty="0"/>
-              <a:t>Интерфейс системы</a:t>
-            </a:r>
-          </a:p>
-        </p:txBody>
-      </p:sp>
-      <p:sp>
-        <p:nvSpPr>
-          <p:cNvPr id="2" name="Номер слайда 1">
-            <a:extLst>
-              <a:ext uri="{FF2B5EF4-FFF2-40B4-BE49-F238E27FC236}">
-                <a16:creationId xmlns:a16="http://schemas.microsoft.com/office/drawing/2014/main" id="{2DA7844C-4845-591E-A755-516346161CEC}"/>
+              <a:t>Заключение</a:t>
+            </a:r>
+          </a:p>
+        </p:txBody>
+      </p:sp>
+      <p:sp>
+        <p:nvSpPr>
+          <p:cNvPr id="3" name="Объект 2">
+            <a:extLst>
+              <a:ext uri="{FF2B5EF4-FFF2-40B4-BE49-F238E27FC236}">
+                <a16:creationId xmlns:a16="http://schemas.microsoft.com/office/drawing/2014/main" id="{8DA6D676-1DC8-4A9C-81A7-79527C288ADC}"/>
+              </a:ext>
+            </a:extLst>
+          </p:cNvPr>
+          <p:cNvSpPr>
+            <a:spLocks noGrp="1"/>
+          </p:cNvSpPr>
+          <p:nvPr>
+            <p:ph idx="1"/>
+          </p:nvPr>
+        </p:nvSpPr>
+        <p:spPr>
+          <a:xfrm>
+            <a:off x="838200" y="1367162"/>
+            <a:ext cx="10515600" cy="5308846"/>
+          </a:xfrm>
+        </p:spPr>
+        <p:txBody>
+          <a:bodyPr>
+            <a:normAutofit fontScale="92500" lnSpcReduction="10000"/>
+          </a:bodyPr>
+          <a:lstStyle/>
+          <a:p>
+            <a:pPr marL="514350" indent="-514350" algn="just">
+              <a:buFont typeface="+mj-lt"/>
+              <a:buAutoNum type="arabicPeriod"/>
+            </a:pPr>
+            <a:r>
+              <a:rPr lang="ru-RU" dirty="0"/>
+              <a:t>Изучена предметная область</a:t>
+            </a:r>
+          </a:p>
+          <a:p>
+            <a:pPr marL="514350" indent="-514350" algn="just">
+              <a:buFont typeface="+mj-lt"/>
+              <a:buAutoNum type="arabicPeriod"/>
+            </a:pPr>
+            <a:r>
+              <a:rPr lang="ru-RU" dirty="0"/>
+              <a:t>Проведён обзор аналогов</a:t>
+            </a:r>
+          </a:p>
+          <a:p>
+            <a:pPr marL="514350" indent="-514350" algn="just">
+              <a:buFont typeface="+mj-lt"/>
+              <a:buAutoNum type="arabicPeriod"/>
+            </a:pPr>
+            <a:r>
+              <a:rPr lang="ru-RU" dirty="0"/>
+              <a:t>Составлен перечень функциональных задач</a:t>
+            </a:r>
+          </a:p>
+          <a:p>
+            <a:pPr marL="514350" indent="-514350" algn="just">
+              <a:buFont typeface="+mj-lt"/>
+              <a:buAutoNum type="arabicPeriod"/>
+            </a:pPr>
+            <a:r>
+              <a:rPr lang="ru-RU" dirty="0"/>
+              <a:t>Выбраны модели ИНС</a:t>
+            </a:r>
+          </a:p>
+          <a:p>
+            <a:pPr marL="514350" indent="-514350" algn="just">
+              <a:buFont typeface="+mj-lt"/>
+              <a:buAutoNum type="arabicPeriod"/>
+            </a:pPr>
+            <a:r>
+              <a:rPr lang="ru-RU" dirty="0"/>
+              <a:t>Спроектирована функциональная модель и декомпозиция</a:t>
+            </a:r>
+          </a:p>
+          <a:p>
+            <a:pPr marL="514350" indent="-514350" algn="just">
+              <a:buFont typeface="+mj-lt"/>
+              <a:buAutoNum type="arabicPeriod"/>
+            </a:pPr>
+            <a:r>
+              <a:rPr lang="ru-RU" dirty="0"/>
+              <a:t>Выбраны средства разработки</a:t>
+            </a:r>
+          </a:p>
+          <a:p>
+            <a:pPr marL="514350" indent="-514350" algn="just">
+              <a:buFont typeface="+mj-lt"/>
+              <a:buAutoNum type="arabicPeriod"/>
+            </a:pPr>
+            <a:r>
+              <a:rPr lang="ru-RU" dirty="0"/>
+              <a:t>Подготовлена пояснительная записка</a:t>
+            </a:r>
+          </a:p>
+          <a:p>
+            <a:pPr algn="just"/>
+            <a:endParaRPr lang="ru-RU" dirty="0"/>
+          </a:p>
+          <a:p>
+            <a:pPr marL="0" indent="0" algn="just">
+              <a:buNone/>
+            </a:pPr>
+            <a:r>
+              <a:rPr lang="ru-RU" dirty="0"/>
+              <a:t>Перспективы развития:</a:t>
+            </a:r>
+          </a:p>
+          <a:p>
+            <a:pPr algn="just"/>
+            <a:r>
+              <a:rPr lang="ru-RU" dirty="0"/>
+              <a:t>Замена эвристических алгоритмов на нейросетевые модели агрегации</a:t>
+            </a:r>
+          </a:p>
+          <a:p>
+            <a:pPr algn="just"/>
+            <a:r>
+              <a:rPr lang="ru-RU" dirty="0"/>
+              <a:t>Оптимизация потоковой </a:t>
+            </a:r>
+            <a:r>
+              <a:rPr lang="ru-RU" dirty="0" err="1"/>
+              <a:t>транскрибации</a:t>
+            </a:r>
+            <a:endParaRPr lang="ru-RU" dirty="0"/>
+          </a:p>
+          <a:p>
+            <a:pPr algn="just"/>
+            <a:r>
+              <a:rPr lang="ru-RU" dirty="0"/>
+              <a:t>Интеграция с корпоративными HRM-системами</a:t>
+            </a:r>
+          </a:p>
+        </p:txBody>
+      </p:sp>
+      <p:sp>
+        <p:nvSpPr>
+          <p:cNvPr id="5" name="Номер слайда 4">
+            <a:extLst>
+              <a:ext uri="{FF2B5EF4-FFF2-40B4-BE49-F238E27FC236}">
+                <a16:creationId xmlns:a16="http://schemas.microsoft.com/office/drawing/2014/main" id="{09D63931-887F-15C8-43DC-CD5EEB99069D}"/>
               </a:ext>
             </a:extLst>
           </p:cNvPr>
@@ -6219,40 +6244,10 @@
           </a:p>
         </p:txBody>
       </p:sp>
-      <p:pic>
-        <p:nvPicPr>
-          <p:cNvPr id="3" name="Рисунок 2">
-            <a:extLst>
-              <a:ext uri="{FF2B5EF4-FFF2-40B4-BE49-F238E27FC236}">
-                <a16:creationId xmlns:a16="http://schemas.microsoft.com/office/drawing/2014/main" id="{D33FE67C-39AF-9CC6-D363-97D9E422D540}"/>
-              </a:ext>
-            </a:extLst>
-          </p:cNvPr>
-          <p:cNvPicPr>
-            <a:picLocks noChangeAspect="1"/>
-          </p:cNvPicPr>
-          <p:nvPr/>
-        </p:nvPicPr>
-        <p:blipFill>
-          <a:blip r:embed="rId2"/>
-          <a:stretch>
-            <a:fillRect/>
-          </a:stretch>
-        </p:blipFill>
-        <p:spPr>
-          <a:xfrm>
-            <a:off x="1690963" y="1079214"/>
-            <a:ext cx="9368101" cy="4699572"/>
-          </a:xfrm>
-          <a:prstGeom prst="rect">
-            <a:avLst/>
-          </a:prstGeom>
-        </p:spPr>
-      </p:pic>
     </p:spTree>
     <p:extLst>
       <p:ext uri="{BB962C8B-B14F-4D97-AF65-F5344CB8AC3E}">
-        <p14:creationId xmlns:p14="http://schemas.microsoft.com/office/powerpoint/2010/main" val="3695925043"/>
+        <p14:creationId xmlns:p14="http://schemas.microsoft.com/office/powerpoint/2010/main" val="3186821950"/>
       </p:ext>
     </p:extLst>
   </p:cSld>
@@ -6554,271 +6549,6 @@
     <p:extLst>
       <p:ext uri="{BB962C8B-B14F-4D97-AF65-F5344CB8AC3E}">
         <p14:creationId xmlns:p14="http://schemas.microsoft.com/office/powerpoint/2010/main" val="4080414093"/>
-      </p:ext>
-    </p:extLst>
-  </p:cSld>
-  <p:clrMapOvr>
-    <a:masterClrMapping/>
-  </p:clrMapOvr>
-</p:sld>
-</file>
-
-<file path=ppt/slides/slide20.xml><?xml version="1.0" encoding="utf-8"?>
-<p:sld xmlns:a="http://schemas.openxmlformats.org/drawingml/2006/main" xmlns:r="http://schemas.openxmlformats.org/officeDocument/2006/relationships" xmlns:p="http://schemas.openxmlformats.org/presentationml/2006/main">
-  <p:cSld>
-    <p:spTree>
-      <p:nvGrpSpPr>
-        <p:cNvPr id="1" name=""/>
-        <p:cNvGrpSpPr/>
-        <p:nvPr/>
-      </p:nvGrpSpPr>
-      <p:grpSpPr>
-        <a:xfrm>
-          <a:off x="0" y="0"/>
-          <a:ext cx="0" cy="0"/>
-          <a:chOff x="0" y="0"/>
-          <a:chExt cx="0" cy="0"/>
-        </a:xfrm>
-      </p:grpSpPr>
-      <p:sp>
-        <p:nvSpPr>
-          <p:cNvPr id="2" name="Заголовок 1">
-            <a:extLst>
-              <a:ext uri="{FF2B5EF4-FFF2-40B4-BE49-F238E27FC236}">
-                <a16:creationId xmlns:a16="http://schemas.microsoft.com/office/drawing/2014/main" id="{8E4679AE-9695-41ED-964A-F63B6DC860B9}"/>
-              </a:ext>
-            </a:extLst>
-          </p:cNvPr>
-          <p:cNvSpPr>
-            <a:spLocks noGrp="1"/>
-          </p:cNvSpPr>
-          <p:nvPr>
-            <p:ph type="title"/>
-          </p:nvPr>
-        </p:nvSpPr>
-        <p:spPr>
-          <a:xfrm>
-            <a:off x="838200" y="181992"/>
-            <a:ext cx="10515600" cy="1325563"/>
-          </a:xfrm>
-        </p:spPr>
-        <p:txBody>
-          <a:bodyPr/>
-          <a:lstStyle/>
-          <a:p>
-            <a:r>
-              <a:rPr lang="ru-RU" dirty="0"/>
-              <a:t>Заключение</a:t>
-            </a:r>
-          </a:p>
-        </p:txBody>
-      </p:sp>
-      <p:sp>
-        <p:nvSpPr>
-          <p:cNvPr id="3" name="Объект 2">
-            <a:extLst>
-              <a:ext uri="{FF2B5EF4-FFF2-40B4-BE49-F238E27FC236}">
-                <a16:creationId xmlns:a16="http://schemas.microsoft.com/office/drawing/2014/main" id="{8DA6D676-1DC8-4A9C-81A7-79527C288ADC}"/>
-              </a:ext>
-            </a:extLst>
-          </p:cNvPr>
-          <p:cNvSpPr>
-            <a:spLocks noGrp="1"/>
-          </p:cNvSpPr>
-          <p:nvPr>
-            <p:ph idx="1"/>
-          </p:nvPr>
-        </p:nvSpPr>
-        <p:spPr>
-          <a:xfrm>
-            <a:off x="838200" y="1367162"/>
-            <a:ext cx="10515600" cy="5308846"/>
-          </a:xfrm>
-        </p:spPr>
-        <p:txBody>
-          <a:bodyPr>
-            <a:normAutofit fontScale="92500" lnSpcReduction="10000"/>
-          </a:bodyPr>
-          <a:lstStyle/>
-          <a:p>
-            <a:pPr marL="514350" indent="-514350" algn="just">
-              <a:buFont typeface="+mj-lt"/>
-              <a:buAutoNum type="arabicPeriod"/>
-            </a:pPr>
-            <a:r>
-              <a:rPr lang="ru-RU" dirty="0"/>
-              <a:t>Изучена предметная область</a:t>
-            </a:r>
-          </a:p>
-          <a:p>
-            <a:pPr marL="514350" indent="-514350" algn="just">
-              <a:buFont typeface="+mj-lt"/>
-              <a:buAutoNum type="arabicPeriod"/>
-            </a:pPr>
-            <a:r>
-              <a:rPr lang="ru-RU" dirty="0"/>
-              <a:t>Проведён обзор аналогов</a:t>
-            </a:r>
-          </a:p>
-          <a:p>
-            <a:pPr marL="514350" indent="-514350" algn="just">
-              <a:buFont typeface="+mj-lt"/>
-              <a:buAutoNum type="arabicPeriod"/>
-            </a:pPr>
-            <a:r>
-              <a:rPr lang="ru-RU" dirty="0"/>
-              <a:t>Составлен перечень функциональных задач</a:t>
-            </a:r>
-          </a:p>
-          <a:p>
-            <a:pPr marL="514350" indent="-514350" algn="just">
-              <a:buFont typeface="+mj-lt"/>
-              <a:buAutoNum type="arabicPeriod"/>
-            </a:pPr>
-            <a:r>
-              <a:rPr lang="ru-RU" dirty="0"/>
-              <a:t>Выбраны модели ИНС (CNN, </a:t>
-            </a:r>
-            <a:r>
-              <a:rPr lang="ru-RU" dirty="0" err="1"/>
-              <a:t>Transformer</a:t>
-            </a:r>
-            <a:r>
-              <a:rPr lang="ru-RU" dirty="0"/>
-              <a:t>, NLP)</a:t>
-            </a:r>
-          </a:p>
-          <a:p>
-            <a:pPr marL="514350" indent="-514350" algn="just">
-              <a:buFont typeface="+mj-lt"/>
-              <a:buAutoNum type="arabicPeriod"/>
-            </a:pPr>
-            <a:r>
-              <a:rPr lang="ru-RU" dirty="0"/>
-              <a:t>Спроектирована функциональная модель и декомпозиция</a:t>
-            </a:r>
-          </a:p>
-          <a:p>
-            <a:pPr marL="514350" indent="-514350" algn="just">
-              <a:buFont typeface="+mj-lt"/>
-              <a:buAutoNum type="arabicPeriod"/>
-            </a:pPr>
-            <a:r>
-              <a:rPr lang="ru-RU" dirty="0"/>
-              <a:t>Выбраны средства разработки (</a:t>
-            </a:r>
-            <a:r>
-              <a:rPr lang="ru-RU" dirty="0" err="1"/>
-              <a:t>React</a:t>
-            </a:r>
-            <a:r>
-              <a:rPr lang="ru-RU" dirty="0"/>
-              <a:t>, Go, Python, </a:t>
-            </a:r>
-            <a:r>
-              <a:rPr lang="ru-RU" dirty="0" err="1"/>
-              <a:t>PostgreSQL</a:t>
-            </a:r>
-            <a:r>
-              <a:rPr lang="ru-RU" dirty="0"/>
-              <a:t>)</a:t>
-            </a:r>
-          </a:p>
-          <a:p>
-            <a:pPr marL="514350" indent="-514350" algn="just">
-              <a:buFont typeface="+mj-lt"/>
-              <a:buAutoNum type="arabicPeriod"/>
-            </a:pPr>
-            <a:r>
-              <a:rPr lang="ru-RU" dirty="0"/>
-              <a:t>Подготовлена пояснительная записка</a:t>
-            </a:r>
-          </a:p>
-          <a:p>
-            <a:pPr algn="just"/>
-            <a:endParaRPr lang="ru-RU" dirty="0"/>
-          </a:p>
-          <a:p>
-            <a:pPr marL="0" indent="0" algn="just">
-              <a:buNone/>
-            </a:pPr>
-            <a:r>
-              <a:rPr lang="ru-RU" dirty="0"/>
-              <a:t>Перспективы развития:</a:t>
-            </a:r>
-          </a:p>
-          <a:p>
-            <a:pPr algn="just"/>
-            <a:r>
-              <a:rPr lang="ru-RU" dirty="0"/>
-              <a:t>Замена эвристических алгоритмов на нейросетевые модели агрегации</a:t>
-            </a:r>
-          </a:p>
-          <a:p>
-            <a:pPr algn="just"/>
-            <a:r>
-              <a:rPr lang="ru-RU" dirty="0"/>
-              <a:t>Оптимизация потоковой </a:t>
-            </a:r>
-            <a:r>
-              <a:rPr lang="ru-RU" dirty="0" err="1"/>
-              <a:t>транскрибации</a:t>
-            </a:r>
-            <a:r>
-              <a:rPr lang="ru-RU" dirty="0"/>
-              <a:t> (</a:t>
-            </a:r>
-            <a:r>
-              <a:rPr lang="ru-RU" dirty="0" err="1"/>
-              <a:t>streaming</a:t>
-            </a:r>
-            <a:r>
-              <a:rPr lang="ru-RU" dirty="0"/>
-              <a:t> ASR)</a:t>
-            </a:r>
-          </a:p>
-          <a:p>
-            <a:pPr algn="just"/>
-            <a:r>
-              <a:rPr lang="ru-RU" dirty="0"/>
-              <a:t>Интеграция с корпоративными HRM-системами</a:t>
-            </a:r>
-          </a:p>
-        </p:txBody>
-      </p:sp>
-      <p:sp>
-        <p:nvSpPr>
-          <p:cNvPr id="5" name="Номер слайда 4">
-            <a:extLst>
-              <a:ext uri="{FF2B5EF4-FFF2-40B4-BE49-F238E27FC236}">
-                <a16:creationId xmlns:a16="http://schemas.microsoft.com/office/drawing/2014/main" id="{09D63931-887F-15C8-43DC-CD5EEB99069D}"/>
-              </a:ext>
-            </a:extLst>
-          </p:cNvPr>
-          <p:cNvSpPr>
-            <a:spLocks noGrp="1"/>
-          </p:cNvSpPr>
-          <p:nvPr>
-            <p:ph type="sldNum" sz="quarter" idx="12"/>
-          </p:nvPr>
-        </p:nvSpPr>
-        <p:spPr/>
-        <p:txBody>
-          <a:bodyPr/>
-          <a:lstStyle/>
-          <a:p>
-            <a:fld id="{5F9DB6E4-81A8-48FA-A111-413E3E85E768}" type="slidenum">
-              <a:rPr lang="ru-RU" smtClean="0"/>
-              <a:t>20</a:t>
-            </a:fld>
-            <a:endParaRPr lang="ru-RU"/>
-          </a:p>
-        </p:txBody>
-      </p:sp>
-    </p:spTree>
-    <p:extLst>
-      <p:ext uri="{BB962C8B-B14F-4D97-AF65-F5344CB8AC3E}">
-        <p14:creationId xmlns:p14="http://schemas.microsoft.com/office/powerpoint/2010/main" val="3186821950"/>
       </p:ext>
     </p:extLst>
   </p:cSld>

--- a/вкр/презентация по_ВКР_Демьянцев_Виталий_Владиславович_606_22.pptx
+++ b/вкр/презентация по_ВКР_Демьянцев_Виталий_Владиславович_606_22.pptx
@@ -5,10 +5,10 @@
     <p:sldMasterId id="2147483648" r:id="rId1"/>
   </p:sldMasterIdLst>
   <p:notesMasterIdLst>
-    <p:notesMasterId r:id="rId21"/>
+    <p:notesMasterId r:id="rId20"/>
   </p:notesMasterIdLst>
   <p:handoutMasterIdLst>
-    <p:handoutMasterId r:id="rId22"/>
+    <p:handoutMasterId r:id="rId21"/>
   </p:handoutMasterIdLst>
   <p:sldIdLst>
     <p:sldId id="256" r:id="rId2"/>
@@ -23,13 +23,12 @@
     <p:sldId id="295" r:id="rId11"/>
     <p:sldId id="259" r:id="rId12"/>
     <p:sldId id="294" r:id="rId13"/>
-    <p:sldId id="266" r:id="rId14"/>
-    <p:sldId id="260" r:id="rId15"/>
-    <p:sldId id="288" r:id="rId16"/>
-    <p:sldId id="302" r:id="rId17"/>
-    <p:sldId id="284" r:id="rId18"/>
-    <p:sldId id="289" r:id="rId19"/>
-    <p:sldId id="280" r:id="rId20"/>
+    <p:sldId id="260" r:id="rId14"/>
+    <p:sldId id="288" r:id="rId15"/>
+    <p:sldId id="302" r:id="rId16"/>
+    <p:sldId id="284" r:id="rId17"/>
+    <p:sldId id="289" r:id="rId18"/>
+    <p:sldId id="280" r:id="rId19"/>
   </p:sldIdLst>
   <p:sldSz cx="12192000" cy="6858000"/>
   <p:notesSz cx="6858000" cy="9144000"/>
@@ -230,7 +229,7 @@
           <a:p>
             <a:fld id="{07640263-EA9F-497A-96B0-1CCF8BC43BB1}" type="datetimeFigureOut">
               <a:rPr lang="ru-RU" smtClean="0"/>
-              <a:t>22.06.2026</a:t>
+              <a:t>26.06.2026</a:t>
             </a:fld>
             <a:endParaRPr lang="ru-RU"/>
           </a:p>
@@ -408,7 +407,7 @@
           <a:p>
             <a:fld id="{66574A11-D777-4A21-A270-6F8A09B2D137}" type="datetimeFigureOut">
               <a:rPr lang="ru-RU" smtClean="0"/>
-              <a:t>22.06.2026</a:t>
+              <a:t>26.06.2026</a:t>
             </a:fld>
             <a:endParaRPr lang="ru-RU"/>
           </a:p>
@@ -837,7 +836,7 @@
           <a:p>
             <a:fld id="{E916E196-4804-4F42-898A-0FC902D9B484}" type="datetime1">
               <a:rPr lang="ru-RU" smtClean="0"/>
-              <a:t>22.06.2026</a:t>
+              <a:t>26.06.2026</a:t>
             </a:fld>
             <a:endParaRPr lang="ru-RU"/>
           </a:p>
@@ -1067,7 +1066,7 @@
           <a:p>
             <a:fld id="{665369D4-ACF4-452B-B065-8EB5038972C3}" type="datetime1">
               <a:rPr lang="ru-RU" smtClean="0"/>
-              <a:t>22.06.2026</a:t>
+              <a:t>26.06.2026</a:t>
             </a:fld>
             <a:endParaRPr lang="ru-RU"/>
           </a:p>
@@ -1297,7 +1296,7 @@
           <a:p>
             <a:fld id="{51B40BE4-505E-422D-8FE2-7C14F619B5A8}" type="datetime1">
               <a:rPr lang="ru-RU" smtClean="0"/>
-              <a:t>22.06.2026</a:t>
+              <a:t>26.06.2026</a:t>
             </a:fld>
             <a:endParaRPr lang="ru-RU"/>
           </a:p>
@@ -1527,7 +1526,7 @@
           <a:p>
             <a:fld id="{303C7D8F-2A26-4A8C-918C-F8DEED5C5692}" type="datetime1">
               <a:rPr lang="ru-RU" smtClean="0"/>
-              <a:t>22.06.2026</a:t>
+              <a:t>26.06.2026</a:t>
             </a:fld>
             <a:endParaRPr lang="ru-RU"/>
           </a:p>
@@ -1838,7 +1837,7 @@
           <a:p>
             <a:fld id="{47F38BAD-298E-4C7C-BB8A-26FD3D33ECCE}" type="datetime1">
               <a:rPr lang="ru-RU" smtClean="0"/>
-              <a:t>22.06.2026</a:t>
+              <a:t>26.06.2026</a:t>
             </a:fld>
             <a:endParaRPr lang="ru-RU"/>
           </a:p>
@@ -2133,7 +2132,7 @@
           <a:p>
             <a:fld id="{4F74C74B-F198-4F1D-A85F-7D813148100B}" type="datetime1">
               <a:rPr lang="ru-RU" smtClean="0"/>
-              <a:t>22.06.2026</a:t>
+              <a:t>26.06.2026</a:t>
             </a:fld>
             <a:endParaRPr lang="ru-RU"/>
           </a:p>
@@ -2576,7 +2575,7 @@
           <a:p>
             <a:fld id="{2BB4B2F3-C8F7-4496-AB1D-5B712B52D4CC}" type="datetime1">
               <a:rPr lang="ru-RU" smtClean="0"/>
-              <a:t>22.06.2026</a:t>
+              <a:t>26.06.2026</a:t>
             </a:fld>
             <a:endParaRPr lang="ru-RU"/>
           </a:p>
@@ -2741,7 +2740,7 @@
           <a:p>
             <a:fld id="{69017ECC-D4AC-4388-A12E-1F5EBDCBE0DE}" type="datetime1">
               <a:rPr lang="ru-RU" smtClean="0"/>
-              <a:t>22.06.2026</a:t>
+              <a:t>26.06.2026</a:t>
             </a:fld>
             <a:endParaRPr lang="ru-RU"/>
           </a:p>
@@ -2870,7 +2869,7 @@
           <a:p>
             <a:fld id="{A7ABE4D9-AEC4-4B77-B4CC-7FBE63FE841C}" type="datetime1">
               <a:rPr lang="ru-RU" smtClean="0"/>
-              <a:t>22.06.2026</a:t>
+              <a:t>26.06.2026</a:t>
             </a:fld>
             <a:endParaRPr lang="ru-RU"/>
           </a:p>
@@ -3206,7 +3205,7 @@
           <a:p>
             <a:fld id="{21664E07-3D79-4A05-BB0B-898AD5671495}" type="datetime1">
               <a:rPr lang="ru-RU" smtClean="0"/>
-              <a:t>22.06.2026</a:t>
+              <a:t>26.06.2026</a:t>
             </a:fld>
             <a:endParaRPr lang="ru-RU"/>
           </a:p>
@@ -3519,7 +3518,7 @@
           <a:p>
             <a:fld id="{69552C21-0914-4B44-973B-AE86C28FD0CC}" type="datetime1">
               <a:rPr lang="ru-RU" smtClean="0"/>
-              <a:t>22.06.2026</a:t>
+              <a:t>26.06.2026</a:t>
             </a:fld>
             <a:endParaRPr lang="ru-RU"/>
           </a:p>
@@ -4738,38 +4737,10 @@
       </p:grpSpPr>
       <p:sp>
         <p:nvSpPr>
-          <p:cNvPr id="2" name="Заголовок 1">
-            <a:extLst>
-              <a:ext uri="{FF2B5EF4-FFF2-40B4-BE49-F238E27FC236}">
-                <a16:creationId xmlns:a16="http://schemas.microsoft.com/office/drawing/2014/main" id="{554A4237-7384-4D65-B40A-9F7802E2C2BF}"/>
-              </a:ext>
-            </a:extLst>
-          </p:cNvPr>
-          <p:cNvSpPr>
-            <a:spLocks noGrp="1"/>
-          </p:cNvSpPr>
-          <p:nvPr>
-            <p:ph type="title"/>
-          </p:nvPr>
-        </p:nvSpPr>
-        <p:spPr/>
-        <p:txBody>
-          <a:bodyPr/>
-          <a:lstStyle/>
-          <a:p>
-            <a:r>
-              <a:rPr lang="ru-RU" dirty="0"/>
-              <a:t>Информационное обеспечение</a:t>
-            </a:r>
-          </a:p>
-        </p:txBody>
-      </p:sp>
-      <p:sp>
-        <p:nvSpPr>
           <p:cNvPr id="3" name="Объект 2">
             <a:extLst>
               <a:ext uri="{FF2B5EF4-FFF2-40B4-BE49-F238E27FC236}">
-                <a16:creationId xmlns:a16="http://schemas.microsoft.com/office/drawing/2014/main" id="{A03513E5-CE54-4AB7-8986-EBEFE16031CF}"/>
+                <a16:creationId xmlns:a16="http://schemas.microsoft.com/office/drawing/2014/main" id="{C9F7A7BF-345D-4464-BA61-1943803CE2E9}"/>
               </a:ext>
             </a:extLst>
           </p:cNvPr>
@@ -4782,65 +4753,146 @@
         </p:nvSpPr>
         <p:spPr>
           <a:xfrm>
-            <a:off x="676656" y="1690688"/>
-            <a:ext cx="10677144" cy="4802187"/>
+            <a:off x="374371" y="898762"/>
+            <a:ext cx="11339093" cy="4011565"/>
           </a:xfrm>
         </p:spPr>
         <p:txBody>
           <a:bodyPr>
-            <a:normAutofit fontScale="92500" lnSpcReduction="10000"/>
+            <a:noAutofit/>
           </a:bodyPr>
           <a:lstStyle/>
           <a:p>
-            <a:pPr algn="just"/>
-            <a:r>
-              <a:rPr lang="ru-RU" dirty="0"/>
-              <a:t>Информационное обеспечение АСУ – совокупность системно-ориентированных данных, описывающих принятый в системе словарь базовых описаний, классификаторы и актуализируемых данных о состоянии информационной модели на всех этапах жизненного цикла.</a:t>
-            </a:r>
-          </a:p>
-          <a:p>
-            <a:pPr algn="just"/>
-            <a:r>
-              <a:rPr lang="ru-RU" dirty="0"/>
-              <a:t>Информационным обеспечением системы является набор обученных нейросетевых моделей, конфигурационных файлов и алгоритмов агрегации, с которыми взаимодействует программный комплекс.</a:t>
-            </a:r>
-          </a:p>
-          <a:p>
-            <a:pPr algn="just"/>
-            <a:r>
-              <a:rPr lang="ru-RU" dirty="0"/>
-              <a:t>Входной информацией является:</a:t>
-            </a:r>
-          </a:p>
-          <a:p>
-            <a:pPr lvl="1" algn="just"/>
-            <a:r>
-              <a:rPr lang="ru-RU" dirty="0"/>
-              <a:t>Видеопоток с веб-камеры </a:t>
-            </a:r>
-          </a:p>
-          <a:p>
-            <a:pPr lvl="1" algn="just"/>
-            <a:r>
-              <a:rPr lang="ru-RU" dirty="0"/>
-              <a:t>Аудиопоток с микрофона</a:t>
-            </a:r>
-          </a:p>
-          <a:p>
-            <a:pPr algn="just"/>
-            <a:r>
-              <a:rPr lang="ru-RU" dirty="0"/>
-              <a:t>Данные поступают непрерывно, обрабатываются в изолированных AI-шлюзах и сохраняются в реляционной СУБД с использованием формата JSONB для гибкого хранения разнородных аналитических событий.</a:t>
-            </a:r>
-          </a:p>
-        </p:txBody>
-      </p:sp>
-      <p:sp>
-        <p:nvSpPr>
-          <p:cNvPr id="4" name="Номер слайда 3">
-            <a:extLst>
-              <a:ext uri="{FF2B5EF4-FFF2-40B4-BE49-F238E27FC236}">
-                <a16:creationId xmlns:a16="http://schemas.microsoft.com/office/drawing/2014/main" id="{CC5BD3B4-94D6-9BF1-6ED5-AA71E42B8AE9}"/>
+            <a:pPr marL="0" indent="0">
+              <a:buNone/>
+            </a:pPr>
+            <a:r>
+              <a:rPr lang="ru-RU" sz="2400" dirty="0"/>
+              <a:t>Технологии:</a:t>
+            </a:r>
+          </a:p>
+          <a:p>
+            <a:r>
+              <a:rPr lang="ru-RU" sz="2400" dirty="0"/>
+              <a:t>MTCNN — детекция лиц и ключевых точек</a:t>
+            </a:r>
+          </a:p>
+          <a:p>
+            <a:r>
+              <a:rPr lang="ru-RU" sz="2400" dirty="0" err="1"/>
+              <a:t>DeepFace</a:t>
+            </a:r>
+            <a:r>
+              <a:rPr lang="ru-RU" sz="2400" dirty="0"/>
+              <a:t> (VGG-Face, Facenet512) — классификация эмоций</a:t>
+            </a:r>
+          </a:p>
+          <a:p>
+            <a:r>
+              <a:rPr lang="ru-RU" sz="2400" dirty="0" err="1"/>
+              <a:t>MediaPipe</a:t>
+            </a:r>
+            <a:r>
+              <a:rPr lang="ru-RU" sz="2400" dirty="0"/>
+              <a:t> Face </a:t>
+            </a:r>
+            <a:r>
+              <a:rPr lang="ru-RU" sz="2400" dirty="0" err="1"/>
+              <a:t>Landmarker</a:t>
+            </a:r>
+            <a:r>
+              <a:rPr lang="ru-RU" sz="2400" dirty="0"/>
+              <a:t> — коэффициенты мимической активности</a:t>
+            </a:r>
+          </a:p>
+          <a:p>
+            <a:pPr marL="0" indent="0">
+              <a:buNone/>
+            </a:pPr>
+            <a:r>
+              <a:rPr lang="ru-RU" sz="2400" dirty="0"/>
+              <a:t>Классификация по модели Пола Экмана:</a:t>
+            </a:r>
+          </a:p>
+          <a:p>
+            <a:r>
+              <a:rPr lang="ru-RU" sz="2400" dirty="0"/>
+              <a:t>Радость</a:t>
+            </a:r>
+          </a:p>
+          <a:p>
+            <a:r>
+              <a:rPr lang="ru-RU" sz="2400" dirty="0"/>
+              <a:t>грусть</a:t>
+            </a:r>
+          </a:p>
+          <a:p>
+            <a:r>
+              <a:rPr lang="ru-RU" sz="2400" dirty="0"/>
+              <a:t>гнев</a:t>
+            </a:r>
+          </a:p>
+          <a:p>
+            <a:r>
+              <a:rPr lang="ru-RU" sz="2400" dirty="0"/>
+              <a:t>Страх</a:t>
+            </a:r>
+          </a:p>
+          <a:p>
+            <a:r>
+              <a:rPr lang="ru-RU" sz="2400" dirty="0"/>
+              <a:t>Удивление</a:t>
+            </a:r>
+          </a:p>
+          <a:p>
+            <a:r>
+              <a:rPr lang="ru-RU" sz="2400" dirty="0"/>
+              <a:t>отвращение</a:t>
+            </a:r>
+          </a:p>
+        </p:txBody>
+      </p:sp>
+      <p:sp>
+        <p:nvSpPr>
+          <p:cNvPr id="2" name="Заголовок 1">
+            <a:extLst>
+              <a:ext uri="{FF2B5EF4-FFF2-40B4-BE49-F238E27FC236}">
+                <a16:creationId xmlns:a16="http://schemas.microsoft.com/office/drawing/2014/main" id="{1B58CB9A-86AF-B0B7-3E9B-73D490908836}"/>
+              </a:ext>
+            </a:extLst>
+          </p:cNvPr>
+          <p:cNvSpPr>
+            <a:spLocks noGrp="1"/>
+          </p:cNvSpPr>
+          <p:nvPr>
+            <p:ph type="title"/>
+          </p:nvPr>
+        </p:nvSpPr>
+        <p:spPr>
+          <a:xfrm>
+            <a:off x="374371" y="103553"/>
+            <a:ext cx="10515600" cy="673688"/>
+          </a:xfrm>
+        </p:spPr>
+        <p:txBody>
+          <a:bodyPr>
+            <a:normAutofit/>
+          </a:bodyPr>
+          <a:lstStyle/>
+          <a:p>
+            <a:r>
+              <a:rPr lang="ru-RU" sz="4000" dirty="0"/>
+              <a:t>Модуль анализа лица и эмоций</a:t>
+            </a:r>
+          </a:p>
+        </p:txBody>
+      </p:sp>
+      <p:sp>
+        <p:nvSpPr>
+          <p:cNvPr id="5" name="Номер слайда 4">
+            <a:extLst>
+              <a:ext uri="{FF2B5EF4-FFF2-40B4-BE49-F238E27FC236}">
+                <a16:creationId xmlns:a16="http://schemas.microsoft.com/office/drawing/2014/main" id="{6AC9E070-DAEE-B241-0A58-56DA4A87F8B3}"/>
               </a:ext>
             </a:extLst>
           </p:cNvPr>
@@ -4860,14 +4912,14 @@
               <a:rPr lang="ru-RU" smtClean="0"/>
               <a:t>13</a:t>
             </a:fld>
-            <a:endParaRPr lang="ru-RU"/>
+            <a:endParaRPr lang="ru-RU" dirty="0"/>
           </a:p>
         </p:txBody>
       </p:sp>
     </p:spTree>
     <p:extLst>
       <p:ext uri="{BB962C8B-B14F-4D97-AF65-F5344CB8AC3E}">
-        <p14:creationId xmlns:p14="http://schemas.microsoft.com/office/powerpoint/2010/main" val="2419490598"/>
+        <p14:creationId xmlns:p14="http://schemas.microsoft.com/office/powerpoint/2010/main" val="3376878861"/>
       </p:ext>
     </p:extLst>
   </p:cSld>
@@ -4912,8 +4964,8 @@
         </p:nvSpPr>
         <p:spPr>
           <a:xfrm>
-            <a:off x="374371" y="898762"/>
-            <a:ext cx="11339093" cy="4011565"/>
+            <a:off x="637032" y="839485"/>
+            <a:ext cx="10515600" cy="5839612"/>
           </a:xfrm>
         </p:spPr>
         <p:txBody>
@@ -4922,91 +4974,151 @@
           </a:bodyPr>
           <a:lstStyle/>
           <a:p>
-            <a:pPr marL="0" indent="0">
+            <a:pPr marL="0" indent="0" algn="just">
               <a:buNone/>
             </a:pPr>
             <a:r>
               <a:rPr lang="ru-RU" sz="2400" dirty="0"/>
-              <a:t>Технологии:</a:t>
-            </a:r>
-          </a:p>
-          <a:p>
+              <a:t>Модель </a:t>
+            </a:r>
+            <a:r>
+              <a:rPr lang="ru-RU" sz="2400" dirty="0" err="1"/>
+              <a:t>Whisper</a:t>
+            </a:r>
             <a:r>
               <a:rPr lang="ru-RU" sz="2400" dirty="0"/>
-              <a:t>MTCNN — детекция лиц и ключевых точек</a:t>
-            </a:r>
-          </a:p>
-          <a:p>
+              <a:t>:</a:t>
+            </a:r>
+          </a:p>
+          <a:p>
+            <a:pPr marL="0" indent="0" algn="just">
+              <a:buNone/>
+            </a:pPr>
+            <a:r>
+              <a:rPr lang="ru-RU" sz="2400" dirty="0"/>
+              <a:t>• </a:t>
+            </a:r>
             <a:r>
               <a:rPr lang="ru-RU" sz="2400" dirty="0" err="1"/>
-              <a:t>DeepFace</a:t>
+              <a:t>Encoder-decoder</a:t>
             </a:r>
             <a:r>
               <a:rPr lang="ru-RU" sz="2400" dirty="0"/>
-              <a:t> (VGG-Face, Facenet512) — классификация эмоций</a:t>
-            </a:r>
-          </a:p>
-          <a:p>
+              <a:t> трансформер</a:t>
+            </a:r>
+          </a:p>
+          <a:p>
+            <a:pPr marL="0" indent="0" algn="just">
+              <a:buNone/>
+            </a:pPr>
+            <a:r>
+              <a:rPr lang="ru-RU" sz="2400" dirty="0"/>
+              <a:t>• Обеспечивает высокое качество </a:t>
+            </a:r>
             <a:r>
               <a:rPr lang="ru-RU" sz="2400" dirty="0" err="1"/>
-              <a:t>MediaPipe</a:t>
+              <a:t>транскрибации</a:t>
             </a:r>
             <a:r>
               <a:rPr lang="ru-RU" sz="2400" dirty="0"/>
-              <a:t> Face </a:t>
+              <a:t> речи</a:t>
+            </a:r>
+          </a:p>
+          <a:p>
+            <a:pPr marL="0" indent="0" algn="just">
+              <a:buNone/>
+            </a:pPr>
+            <a:r>
+              <a:rPr lang="ru-RU" sz="2400" dirty="0"/>
+              <a:t>• Поддержка множества языков</a:t>
+            </a:r>
+          </a:p>
+          <a:p>
+            <a:pPr marL="0" indent="0" algn="just">
+              <a:buNone/>
+            </a:pPr>
+            <a:r>
+              <a:rPr lang="ru-RU" sz="2400" dirty="0"/>
+              <a:t>Оптимизация:</a:t>
+            </a:r>
+          </a:p>
+          <a:p>
+            <a:pPr marL="0" indent="0" algn="just">
+              <a:buNone/>
+            </a:pPr>
+            <a:r>
+              <a:rPr lang="ru-RU" sz="2400" dirty="0"/>
+              <a:t>• Квантование весов (float32 → int8/float16)</a:t>
+            </a:r>
+          </a:p>
+          <a:p>
+            <a:pPr marL="0" indent="0" algn="just">
+              <a:buNone/>
+            </a:pPr>
+            <a:r>
+              <a:rPr lang="ru-RU" sz="2400" dirty="0"/>
+              <a:t>• Пакетная обработка (</a:t>
             </a:r>
             <a:r>
               <a:rPr lang="ru-RU" sz="2400" dirty="0" err="1"/>
-              <a:t>Landmarker</a:t>
+              <a:t>batching</a:t>
             </a:r>
             <a:r>
               <a:rPr lang="ru-RU" sz="2400" dirty="0"/>
-              <a:t> — коэффициенты мимической активности</a:t>
-            </a:r>
-          </a:p>
-          <a:p>
-            <a:pPr marL="0" indent="0">
+              <a:t>)</a:t>
+            </a:r>
+          </a:p>
+          <a:p>
+            <a:pPr marL="0" indent="0" algn="just">
               <a:buNone/>
             </a:pPr>
             <a:r>
               <a:rPr lang="ru-RU" sz="2400" dirty="0"/>
-              <a:t>Классификация по модели Пола Экмана:</a:t>
-            </a:r>
-          </a:p>
-          <a:p>
+              <a:t>• Использование GPU</a:t>
+            </a:r>
+          </a:p>
+          <a:p>
+            <a:pPr marL="0" indent="0" algn="just">
+              <a:buNone/>
+            </a:pPr>
             <a:r>
               <a:rPr lang="ru-RU" sz="2400" dirty="0"/>
-              <a:t>Радость</a:t>
-            </a:r>
-          </a:p>
-          <a:p>
+              <a:t>Результаты:</a:t>
+            </a:r>
+          </a:p>
+          <a:p>
+            <a:pPr marL="0" indent="0" algn="just">
+              <a:buNone/>
+            </a:pPr>
             <a:r>
               <a:rPr lang="ru-RU" sz="2400" dirty="0"/>
-              <a:t>грусть</a:t>
-            </a:r>
-          </a:p>
-          <a:p>
+              <a:t>• </a:t>
+            </a:r>
+            <a:r>
+              <a:rPr lang="ru-RU" sz="2400" dirty="0" err="1"/>
+              <a:t>Транскрибация</a:t>
+            </a:r>
             <a:r>
               <a:rPr lang="ru-RU" sz="2400" dirty="0"/>
-              <a:t>гнев</a:t>
-            </a:r>
-          </a:p>
-          <a:p>
+              <a:t> речи в реальном времени</a:t>
+            </a:r>
+          </a:p>
+          <a:p>
+            <a:pPr marL="0" indent="0" algn="just">
+              <a:buNone/>
+            </a:pPr>
             <a:r>
               <a:rPr lang="ru-RU" sz="2400" dirty="0"/>
-              <a:t>Страх</a:t>
-            </a:r>
-          </a:p>
-          <a:p>
+              <a:t>• Разделение реплик по участникам</a:t>
+            </a:r>
+          </a:p>
+          <a:p>
+            <a:pPr marL="0" indent="0" algn="just">
+              <a:buNone/>
+            </a:pPr>
             <a:r>
               <a:rPr lang="ru-RU" sz="2400" dirty="0"/>
-              <a:t>Удивление</a:t>
-            </a:r>
-          </a:p>
-          <a:p>
-            <a:r>
-              <a:rPr lang="ru-RU" sz="2400" dirty="0"/>
-              <a:t>отвращение</a:t>
+              <a:t>• Временные метки для каждой реплики</a:t>
             </a:r>
           </a:p>
         </p:txBody>
@@ -5029,8 +5141,8 @@
         </p:nvSpPr>
         <p:spPr>
           <a:xfrm>
-            <a:off x="374371" y="103553"/>
-            <a:ext cx="10515600" cy="673688"/>
+            <a:off x="465811" y="176704"/>
+            <a:ext cx="10515600" cy="1325563"/>
           </a:xfrm>
         </p:spPr>
         <p:txBody>
@@ -5041,7 +5153,7 @@
           <a:p>
             <a:r>
               <a:rPr lang="ru-RU" sz="4000" dirty="0"/>
-              <a:t>Модуль анализа лица и эмоций</a:t>
+              <a:t>Модуль распознавания речи</a:t>
             </a:r>
           </a:p>
         </p:txBody>
@@ -5051,7 +5163,7 @@
           <p:cNvPr id="5" name="Номер слайда 4">
             <a:extLst>
               <a:ext uri="{FF2B5EF4-FFF2-40B4-BE49-F238E27FC236}">
-                <a16:creationId xmlns:a16="http://schemas.microsoft.com/office/drawing/2014/main" id="{6AC9E070-DAEE-B241-0A58-56DA4A87F8B3}"/>
+                <a16:creationId xmlns:a16="http://schemas.microsoft.com/office/drawing/2014/main" id="{20F5E886-65AE-3D29-A128-93D0A6C755B6}"/>
               </a:ext>
             </a:extLst>
           </p:cNvPr>
@@ -5071,14 +5183,14 @@
               <a:rPr lang="ru-RU" smtClean="0"/>
               <a:t>14</a:t>
             </a:fld>
-            <a:endParaRPr lang="ru-RU" dirty="0"/>
+            <a:endParaRPr lang="ru-RU"/>
           </a:p>
         </p:txBody>
       </p:sp>
     </p:spTree>
     <p:extLst>
       <p:ext uri="{BB962C8B-B14F-4D97-AF65-F5344CB8AC3E}">
-        <p14:creationId xmlns:p14="http://schemas.microsoft.com/office/powerpoint/2010/main" val="3376878861"/>
+        <p14:creationId xmlns:p14="http://schemas.microsoft.com/office/powerpoint/2010/main" val="281831545"/>
       </p:ext>
     </p:extLst>
   </p:cSld>
@@ -5138,15 +5250,15 @@
             </a:pPr>
             <a:r>
               <a:rPr lang="ru-RU" sz="2400" dirty="0"/>
-              <a:t>Модель </a:t>
+              <a:t>Модуль </a:t>
             </a:r>
             <a:r>
               <a:rPr lang="ru-RU" sz="2400" dirty="0" err="1"/>
-              <a:t>Whisper</a:t>
+              <a:t>Sentiment</a:t>
             </a:r>
             <a:r>
               <a:rPr lang="ru-RU" sz="2400" dirty="0"/>
-              <a:t>:</a:t>
+              <a:t> Analysis:</a:t>
             </a:r>
           </a:p>
           <a:p>
@@ -5155,16 +5267,21 @@
             </a:pPr>
             <a:r>
               <a:rPr lang="ru-RU" sz="2400" dirty="0"/>
-              <a:t>• </a:t>
+              <a:t>• Легковесная </a:t>
             </a:r>
             <a:r>
               <a:rPr lang="ru-RU" sz="2400" dirty="0" err="1"/>
-              <a:t>Encoder-decoder</a:t>
+              <a:t>трансформерная</a:t>
             </a:r>
             <a:r>
               <a:rPr lang="ru-RU" sz="2400" dirty="0"/>
-              <a:t> трансформер</a:t>
-            </a:r>
+              <a:t> модель </a:t>
+            </a:r>
+            <a:r>
+              <a:rPr lang="ru-RU" sz="2400" dirty="0" err="1"/>
+              <a:t>DistilBERT</a:t>
+            </a:r>
+            <a:endParaRPr lang="ru-RU" sz="2400" dirty="0"/>
           </a:p>
           <a:p>
             <a:pPr marL="0" indent="0" algn="just">
@@ -5172,15 +5289,33 @@
             </a:pPr>
             <a:r>
               <a:rPr lang="ru-RU" sz="2400" dirty="0"/>
-              <a:t>• Обеспечивает высокое качество </a:t>
+              <a:t>• Классификация тональности: позитивная / нейтральная / негативная</a:t>
+            </a:r>
+          </a:p>
+          <a:p>
+            <a:pPr marL="0" indent="0" algn="just">
+              <a:buNone/>
+            </a:pPr>
+            <a:r>
+              <a:rPr lang="ru-RU" sz="2400" dirty="0"/>
+              <a:t>Алгоритм работы:</a:t>
+            </a:r>
+          </a:p>
+          <a:p>
+            <a:pPr marL="0" indent="0" algn="just">
+              <a:buNone/>
+            </a:pPr>
+            <a:r>
+              <a:rPr lang="ru-RU" sz="2400" dirty="0"/>
+              <a:t>1. Сегментация и </a:t>
             </a:r>
             <a:r>
               <a:rPr lang="ru-RU" sz="2400" dirty="0" err="1"/>
-              <a:t>транскрибации</a:t>
+              <a:t>токенизация</a:t>
             </a:r>
             <a:r>
               <a:rPr lang="ru-RU" sz="2400" dirty="0"/>
-              <a:t> речи</a:t>
+              <a:t> транскрипта</a:t>
             </a:r>
           </a:p>
           <a:p>
@@ -5189,7 +5324,15 @@
             </a:pPr>
             <a:r>
               <a:rPr lang="ru-RU" sz="2400" dirty="0"/>
-              <a:t>• Поддержка множества языков</a:t>
+              <a:t>2. </a:t>
+            </a:r>
+            <a:r>
+              <a:rPr lang="ru-RU" sz="2400" dirty="0" err="1"/>
+              <a:t>Инференс</a:t>
+            </a:r>
+            <a:r>
+              <a:rPr lang="ru-RU" sz="2400" dirty="0"/>
+              <a:t> модели</a:t>
             </a:r>
           </a:p>
           <a:p>
@@ -5198,7 +5341,7 @@
             </a:pPr>
             <a:r>
               <a:rPr lang="ru-RU" sz="2400" dirty="0"/>
-              <a:t>Оптимизация:</a:t>
+              <a:t>3. Присвоение метки тональности</a:t>
             </a:r>
           </a:p>
           <a:p>
@@ -5207,7 +5350,7 @@
             </a:pPr>
             <a:r>
               <a:rPr lang="ru-RU" sz="2400" dirty="0"/>
-              <a:t>• Квантование весов (float32 → int8/float16)</a:t>
+              <a:t>Интеграция:</a:t>
             </a:r>
           </a:p>
           <a:p>
@@ -5216,68 +5359,41 @@
             </a:pPr>
             <a:r>
               <a:rPr lang="ru-RU" sz="2400" dirty="0"/>
-              <a:t>• Пакетная обработка (</a:t>
+              <a:t>• Сохранение в JSONB с привязкой к временным меткам</a:t>
+            </a:r>
+          </a:p>
+          <a:p>
+            <a:pPr marL="0" indent="0" algn="just">
+              <a:buNone/>
+            </a:pPr>
+            <a:r>
+              <a:rPr lang="ru-RU" sz="2400" dirty="0"/>
+              <a:t>• Сопоставление с визуальными и акустическими признаками</a:t>
+            </a:r>
+          </a:p>
+          <a:p>
+            <a:pPr marL="0" indent="0" algn="just">
+              <a:buNone/>
+            </a:pPr>
+            <a:r>
+              <a:rPr lang="ru-RU" sz="2400" dirty="0"/>
+              <a:t>• Принцип </a:t>
             </a:r>
             <a:r>
               <a:rPr lang="ru-RU" sz="2400" dirty="0" err="1"/>
-              <a:t>batching</a:t>
+              <a:t>late</a:t>
             </a:r>
             <a:r>
               <a:rPr lang="ru-RU" sz="2400" dirty="0"/>
-              <a:t>)</a:t>
-            </a:r>
-          </a:p>
-          <a:p>
-            <a:pPr marL="0" indent="0" algn="just">
-              <a:buNone/>
-            </a:pPr>
+              <a:t> </a:t>
+            </a:r>
+            <a:r>
+              <a:rPr lang="ru-RU" sz="2400" dirty="0" err="1"/>
+              <a:t>fusion</a:t>
+            </a:r>
             <a:r>
               <a:rPr lang="ru-RU" sz="2400" dirty="0"/>
-              <a:t>• Использование GPU</a:t>
-            </a:r>
-          </a:p>
-          <a:p>
-            <a:pPr marL="0" indent="0" algn="just">
-              <a:buNone/>
-            </a:pPr>
-            <a:r>
-              <a:rPr lang="ru-RU" sz="2400" dirty="0"/>
-              <a:t>Результаты:</a:t>
-            </a:r>
-          </a:p>
-          <a:p>
-            <a:pPr marL="0" indent="0" algn="just">
-              <a:buNone/>
-            </a:pPr>
-            <a:r>
-              <a:rPr lang="ru-RU" sz="2400" dirty="0"/>
-              <a:t>• </a:t>
-            </a:r>
-            <a:r>
-              <a:rPr lang="ru-RU" sz="2400" dirty="0" err="1"/>
-              <a:t>Транскрибация</a:t>
-            </a:r>
-            <a:r>
-              <a:rPr lang="ru-RU" sz="2400" dirty="0"/>
-              <a:t> речи в реальном времени</a:t>
-            </a:r>
-          </a:p>
-          <a:p>
-            <a:pPr marL="0" indent="0" algn="just">
-              <a:buNone/>
-            </a:pPr>
-            <a:r>
-              <a:rPr lang="ru-RU" sz="2400" dirty="0"/>
-              <a:t>• Разделение реплик по участникам</a:t>
-            </a:r>
-          </a:p>
-          <a:p>
-            <a:pPr marL="0" indent="0" algn="just">
-              <a:buNone/>
-            </a:pPr>
-            <a:r>
-              <a:rPr lang="ru-RU" sz="2400" dirty="0"/>
-              <a:t>• Временные метки для каждой реплики</a:t>
+              <a:t> при формировании отчёта</a:t>
             </a:r>
           </a:p>
         </p:txBody>
@@ -5312,8 +5428,13 @@
           <a:p>
             <a:r>
               <a:rPr lang="ru-RU" sz="4000" dirty="0"/>
-              <a:t>Модуль распознавания речи</a:t>
-            </a:r>
+              <a:t>Анализ </a:t>
+            </a:r>
+            <a:r>
+              <a:rPr lang="ru-RU" sz="4000"/>
+              <a:t>тональности текста</a:t>
+            </a:r>
+            <a:endParaRPr lang="en-US" sz="4000" dirty="0"/>
           </a:p>
         </p:txBody>
       </p:sp>
@@ -5349,7 +5470,7 @@
     </p:spTree>
     <p:extLst>
       <p:ext uri="{BB962C8B-B14F-4D97-AF65-F5344CB8AC3E}">
-        <p14:creationId xmlns:p14="http://schemas.microsoft.com/office/powerpoint/2010/main" val="281831545"/>
+        <p14:creationId xmlns:p14="http://schemas.microsoft.com/office/powerpoint/2010/main" val="1215583211"/>
       </p:ext>
     </p:extLst>
   </p:cSld>
@@ -5394,189 +5515,8 @@
         </p:nvSpPr>
         <p:spPr>
           <a:xfrm>
-            <a:off x="637032" y="839485"/>
-            <a:ext cx="10515600" cy="5839612"/>
-          </a:xfrm>
-        </p:spPr>
-        <p:txBody>
-          <a:bodyPr>
-            <a:noAutofit/>
-          </a:bodyPr>
-          <a:lstStyle/>
-          <a:p>
-            <a:pPr marL="0" indent="0" algn="just">
-              <a:buNone/>
-            </a:pPr>
-            <a:r>
-              <a:rPr lang="ru-RU" sz="2400" dirty="0"/>
-              <a:t>Модуль </a:t>
-            </a:r>
-            <a:r>
-              <a:rPr lang="ru-RU" sz="2400" dirty="0" err="1"/>
-              <a:t>Sentiment</a:t>
-            </a:r>
-            <a:r>
-              <a:rPr lang="ru-RU" sz="2400" dirty="0"/>
-              <a:t> Analysis:</a:t>
-            </a:r>
-          </a:p>
-          <a:p>
-            <a:pPr marL="0" indent="0" algn="just">
-              <a:buNone/>
-            </a:pPr>
-            <a:r>
-              <a:rPr lang="ru-RU" sz="2400" dirty="0"/>
-              <a:t>• Легковесная </a:t>
-            </a:r>
-            <a:r>
-              <a:rPr lang="ru-RU" sz="2400" dirty="0" err="1"/>
-              <a:t>трансформерная</a:t>
-            </a:r>
-            <a:r>
-              <a:rPr lang="ru-RU" sz="2400" dirty="0"/>
-              <a:t> модель </a:t>
-            </a:r>
-            <a:r>
-              <a:rPr lang="ru-RU" sz="2400" dirty="0" err="1"/>
-              <a:t>DistilBERT</a:t>
-            </a:r>
-            <a:endParaRPr lang="ru-RU" sz="2400" dirty="0"/>
-          </a:p>
-          <a:p>
-            <a:pPr marL="0" indent="0" algn="just">
-              <a:buNone/>
-            </a:pPr>
-            <a:r>
-              <a:rPr lang="ru-RU" sz="2400" dirty="0"/>
-              <a:t>• Классификация тональности: позитивная / нейтральная / негативная</a:t>
-            </a:r>
-          </a:p>
-          <a:p>
-            <a:pPr marL="0" indent="0" algn="just">
-              <a:buNone/>
-            </a:pPr>
-            <a:r>
-              <a:rPr lang="ru-RU" sz="2400" dirty="0"/>
-              <a:t>Алгоритм работы:</a:t>
-            </a:r>
-          </a:p>
-          <a:p>
-            <a:pPr marL="0" indent="0" algn="just">
-              <a:buNone/>
-            </a:pPr>
-            <a:r>
-              <a:rPr lang="ru-RU" sz="2400" dirty="0"/>
-              <a:t>1. Сегментация и </a:t>
-            </a:r>
-            <a:r>
-              <a:rPr lang="ru-RU" sz="2400" dirty="0" err="1"/>
-              <a:t>токенизация</a:t>
-            </a:r>
-            <a:r>
-              <a:rPr lang="ru-RU" sz="2400" dirty="0"/>
-              <a:t> транскрипта</a:t>
-            </a:r>
-          </a:p>
-          <a:p>
-            <a:pPr marL="0" indent="0" algn="just">
-              <a:buNone/>
-            </a:pPr>
-            <a:r>
-              <a:rPr lang="ru-RU" sz="2400" dirty="0"/>
-              <a:t>2. </a:t>
-            </a:r>
-            <a:r>
-              <a:rPr lang="ru-RU" sz="2400" dirty="0" err="1"/>
-              <a:t>Инференс</a:t>
-            </a:r>
-            <a:r>
-              <a:rPr lang="ru-RU" sz="2400" dirty="0"/>
-              <a:t> модели</a:t>
-            </a:r>
-          </a:p>
-          <a:p>
-            <a:pPr marL="0" indent="0" algn="just">
-              <a:buNone/>
-            </a:pPr>
-            <a:r>
-              <a:rPr lang="ru-RU" sz="2400" dirty="0"/>
-              <a:t>3. Присвоение метки тональности</a:t>
-            </a:r>
-          </a:p>
-          <a:p>
-            <a:pPr marL="0" indent="0" algn="just">
-              <a:buNone/>
-            </a:pPr>
-            <a:r>
-              <a:rPr lang="ru-RU" sz="2400" dirty="0"/>
-              <a:t>Интеграция:</a:t>
-            </a:r>
-          </a:p>
-          <a:p>
-            <a:pPr marL="0" indent="0" algn="just">
-              <a:buNone/>
-            </a:pPr>
-            <a:r>
-              <a:rPr lang="ru-RU" sz="2400" dirty="0"/>
-              <a:t>• Сохранение в JSONB с привязкой к временным меткам</a:t>
-            </a:r>
-          </a:p>
-          <a:p>
-            <a:pPr marL="0" indent="0" algn="just">
-              <a:buNone/>
-            </a:pPr>
-            <a:r>
-              <a:rPr lang="ru-RU" sz="2400" dirty="0"/>
-              <a:t>• Сопоставление с визуальными и акустическими признаками</a:t>
-            </a:r>
-          </a:p>
-          <a:p>
-            <a:pPr marL="0" indent="0" algn="just">
-              <a:buNone/>
-            </a:pPr>
-            <a:r>
-              <a:rPr lang="ru-RU" sz="2400" dirty="0"/>
-              <a:t>• Принцип </a:t>
-            </a:r>
-            <a:r>
-              <a:rPr lang="ru-RU" sz="2400" dirty="0" err="1"/>
-              <a:t>late</a:t>
-            </a:r>
-            <a:r>
-              <a:rPr lang="ru-RU" sz="2400" dirty="0"/>
-              <a:t> </a:t>
-            </a:r>
-            <a:r>
-              <a:rPr lang="ru-RU" sz="2400" dirty="0" err="1"/>
-              <a:t>fusion</a:t>
-            </a:r>
-            <a:r>
-              <a:rPr lang="ru-RU" sz="2400" dirty="0"/>
-              <a:t> при формировании отчёта</a:t>
-            </a:r>
-          </a:p>
-        </p:txBody>
-      </p:sp>
-      <p:sp>
-        <p:nvSpPr>
-          <p:cNvPr id="2" name="Заголовок 1">
-            <a:extLst>
-              <a:ext uri="{FF2B5EF4-FFF2-40B4-BE49-F238E27FC236}">
-                <a16:creationId xmlns:a16="http://schemas.microsoft.com/office/drawing/2014/main" id="{1B58CB9A-86AF-B0B7-3E9B-73D490908836}"/>
-              </a:ext>
-            </a:extLst>
-          </p:cNvPr>
-          <p:cNvSpPr>
-            <a:spLocks noGrp="1"/>
-          </p:cNvSpPr>
-          <p:nvPr>
-            <p:ph type="title"/>
-          </p:nvPr>
-        </p:nvSpPr>
-        <p:spPr>
-          <a:xfrm>
-            <a:off x="465811" y="176704"/>
-            <a:ext cx="10515600" cy="1325563"/>
+            <a:off x="419164" y="969118"/>
+            <a:ext cx="4856924" cy="5839612"/>
           </a:xfrm>
         </p:spPr>
         <p:txBody>
@@ -5585,24 +5525,191 @@
           </a:bodyPr>
           <a:lstStyle/>
           <a:p>
+            <a:pPr algn="just"/>
+            <a:r>
+              <a:rPr lang="ru-RU" sz="1800" dirty="0"/>
+              <a:t>В связи с необходимостью более детального анализа мимики и положения головы в пространстве, в систему интегрирована модель </a:t>
+            </a:r>
+            <a:r>
+              <a:rPr lang="ru-RU" sz="1800" dirty="0" err="1"/>
+              <a:t>MediaPipe</a:t>
+            </a:r>
+            <a:r>
+              <a:rPr lang="ru-RU" sz="1800" dirty="0"/>
+              <a:t> Face </a:t>
+            </a:r>
+            <a:r>
+              <a:rPr lang="ru-RU" sz="1800" dirty="0" err="1"/>
+              <a:t>Landmarker</a:t>
+            </a:r>
+            <a:r>
+              <a:rPr lang="ru-RU" sz="1800" dirty="0"/>
+              <a:t> от Google.</a:t>
+            </a:r>
+          </a:p>
+          <a:p>
+            <a:pPr algn="just"/>
+            <a:r>
+              <a:rPr lang="ru-RU" sz="1800" dirty="0"/>
+              <a:t>На вход модели подаётся выровненное изображение лица. Модель строит плотную сетку из 468 трёхмерных ключевых точек, охватывающих контуры глаз, бровей, носа, губ и овала лица.</a:t>
+            </a:r>
+          </a:p>
+          <a:p>
+            <a:pPr algn="just"/>
+            <a:r>
+              <a:rPr lang="ru-RU" sz="1800" dirty="0"/>
+              <a:t>На выходе формируются </a:t>
+            </a:r>
+            <a:r>
+              <a:rPr lang="ru-RU" sz="1800" dirty="0" err="1"/>
+              <a:t>blendshape</a:t>
+            </a:r>
+            <a:r>
+              <a:rPr lang="ru-RU" sz="1800" dirty="0"/>
+              <a:t>-коэффициенты (активность групп лицевых мышц), углы поворота головы (</a:t>
+            </a:r>
+            <a:r>
+              <a:rPr lang="ru-RU" sz="1800" dirty="0" err="1"/>
+              <a:t>yaw</a:t>
+            </a:r>
+            <a:r>
+              <a:rPr lang="ru-RU" sz="1800" dirty="0"/>
+              <a:t>, </a:t>
+            </a:r>
+            <a:r>
+              <a:rPr lang="ru-RU" sz="1800" dirty="0" err="1"/>
+              <a:t>pitch</a:t>
+            </a:r>
+            <a:r>
+              <a:rPr lang="ru-RU" sz="1800" dirty="0"/>
+              <a:t>, </a:t>
+            </a:r>
+            <a:r>
+              <a:rPr lang="ru-RU" sz="1800" dirty="0" err="1"/>
+              <a:t>roll</a:t>
+            </a:r>
+            <a:r>
+              <a:rPr lang="ru-RU" sz="1800" dirty="0"/>
+              <a:t>) и данные для отслеживания </a:t>
+            </a:r>
+            <a:r>
+              <a:rPr lang="ru-RU" sz="1800" dirty="0" err="1"/>
+              <a:t>микровыражений</a:t>
+            </a:r>
+            <a:r>
+              <a:rPr lang="ru-RU" sz="1800" dirty="0"/>
+              <a:t>.</a:t>
+            </a:r>
+          </a:p>
+          <a:p>
+            <a:pPr algn="just"/>
+            <a:r>
+              <a:rPr lang="ru-RU" sz="1800" dirty="0"/>
+              <a:t>Модель перезаписывает и обогащает базовые данные классификации, позволяя системе учитывать не только статические эмоции, но и динамику мимики</a:t>
+            </a:r>
+            <a:r>
+              <a:rPr lang="en-US" sz="1800" dirty="0"/>
+              <a:t>.</a:t>
+            </a:r>
+            <a:endParaRPr lang="ru-RU" sz="1800" dirty="0"/>
+          </a:p>
+        </p:txBody>
+      </p:sp>
+      <p:sp>
+        <p:nvSpPr>
+          <p:cNvPr id="2" name="Заголовок 1">
+            <a:extLst>
+              <a:ext uri="{FF2B5EF4-FFF2-40B4-BE49-F238E27FC236}">
+                <a16:creationId xmlns:a16="http://schemas.microsoft.com/office/drawing/2014/main" id="{1B58CB9A-86AF-B0B7-3E9B-73D490908836}"/>
+              </a:ext>
+            </a:extLst>
+          </p:cNvPr>
+          <p:cNvSpPr>
+            <a:spLocks noGrp="1"/>
+          </p:cNvSpPr>
+          <p:nvPr>
+            <p:ph type="title"/>
+          </p:nvPr>
+        </p:nvSpPr>
+        <p:spPr>
+          <a:xfrm>
+            <a:off x="419164" y="103552"/>
+            <a:ext cx="10515600" cy="1325563"/>
+          </a:xfrm>
+        </p:spPr>
+        <p:txBody>
+          <a:bodyPr>
+            <a:normAutofit/>
+          </a:bodyPr>
+          <a:lstStyle/>
+          <a:p>
             <a:r>
               <a:rPr lang="ru-RU" sz="4000" dirty="0"/>
-              <a:t>Анализ </a:t>
-            </a:r>
-            <a:r>
-              <a:rPr lang="ru-RU" sz="4000"/>
-              <a:t>тональности текста</a:t>
+              <a:t>Модель </a:t>
+            </a:r>
+            <a:r>
+              <a:rPr lang="en-US" sz="4000" dirty="0" err="1"/>
+              <a:t>MediaPipe</a:t>
+            </a:r>
+            <a:r>
+              <a:rPr lang="en-US" sz="4000" dirty="0"/>
+              <a:t> Face </a:t>
+            </a:r>
+            <a:r>
+              <a:rPr lang="en-US" sz="4000" dirty="0" err="1"/>
+              <a:t>Landmarker</a:t>
             </a:r>
             <a:endParaRPr lang="en-US" sz="4000" dirty="0"/>
           </a:p>
         </p:txBody>
       </p:sp>
+      <p:pic>
+        <p:nvPicPr>
+          <p:cNvPr id="7" name="Рисунок 6" descr="Задача &quot;Опорный знак на лице&quot;">
+            <a:extLst>
+              <a:ext uri="{FF2B5EF4-FFF2-40B4-BE49-F238E27FC236}">
+                <a16:creationId xmlns:a16="http://schemas.microsoft.com/office/drawing/2014/main" id="{AC6A1973-8F20-E21C-8984-347E22110987}"/>
+              </a:ext>
+            </a:extLst>
+          </p:cNvPr>
+          <p:cNvPicPr>
+            <a:picLocks noChangeAspect="1"/>
+          </p:cNvPicPr>
+          <p:nvPr/>
+        </p:nvPicPr>
+        <p:blipFill>
+          <a:blip r:embed="rId2">
+            <a:extLst>
+              <a:ext uri="{28A0092B-C50C-407E-A947-70E740481C1C}">
+                <a14:useLocalDpi xmlns:a14="http://schemas.microsoft.com/office/drawing/2010/main" val="0"/>
+              </a:ext>
+            </a:extLst>
+          </a:blip>
+          <a:srcRect/>
+          <a:stretch>
+            <a:fillRect/>
+          </a:stretch>
+        </p:blipFill>
+        <p:spPr bwMode="auto">
+          <a:xfrm>
+            <a:off x="5832411" y="1429115"/>
+            <a:ext cx="5940425" cy="3256280"/>
+          </a:xfrm>
+          <a:prstGeom prst="rect">
+            <a:avLst/>
+          </a:prstGeom>
+          <a:noFill/>
+          <a:ln>
+            <a:noFill/>
+          </a:ln>
+        </p:spPr>
+      </p:pic>
       <p:sp>
         <p:nvSpPr>
           <p:cNvPr id="5" name="Номер слайда 4">
             <a:extLst>
               <a:ext uri="{FF2B5EF4-FFF2-40B4-BE49-F238E27FC236}">
-                <a16:creationId xmlns:a16="http://schemas.microsoft.com/office/drawing/2014/main" id="{20F5E886-65AE-3D29-A128-93D0A6C755B6}"/>
+                <a16:creationId xmlns:a16="http://schemas.microsoft.com/office/drawing/2014/main" id="{C938FBF3-4A9B-D591-C9C7-E929397E9F73}"/>
               </a:ext>
             </a:extLst>
           </p:cNvPr>
@@ -5629,7 +5736,7 @@
     </p:spTree>
     <p:extLst>
       <p:ext uri="{BB962C8B-B14F-4D97-AF65-F5344CB8AC3E}">
-        <p14:creationId xmlns:p14="http://schemas.microsoft.com/office/powerpoint/2010/main" val="1215583211"/>
+        <p14:creationId xmlns:p14="http://schemas.microsoft.com/office/powerpoint/2010/main" val="441378147"/>
       </p:ext>
     </p:extLst>
   </p:cSld>
@@ -5658,176 +5765,72 @@
       </p:grpSpPr>
       <p:sp>
         <p:nvSpPr>
-          <p:cNvPr id="3" name="Объект 2">
-            <a:extLst>
-              <a:ext uri="{FF2B5EF4-FFF2-40B4-BE49-F238E27FC236}">
-                <a16:creationId xmlns:a16="http://schemas.microsoft.com/office/drawing/2014/main" id="{C9F7A7BF-345D-4464-BA61-1943803CE2E9}"/>
-              </a:ext>
-            </a:extLst>
-          </p:cNvPr>
-          <p:cNvSpPr>
-            <a:spLocks noGrp="1"/>
-          </p:cNvSpPr>
-          <p:nvPr>
-            <p:ph idx="1"/>
+          <p:cNvPr id="9" name="Заголовок 8">
+            <a:extLst>
+              <a:ext uri="{FF2B5EF4-FFF2-40B4-BE49-F238E27FC236}">
+                <a16:creationId xmlns:a16="http://schemas.microsoft.com/office/drawing/2014/main" id="{97468337-8816-F43C-CDDA-7015138208A6}"/>
+              </a:ext>
+            </a:extLst>
+          </p:cNvPr>
+          <p:cNvSpPr>
+            <a:spLocks noGrp="1"/>
+          </p:cNvSpPr>
+          <p:nvPr>
+            <p:ph type="title"/>
           </p:nvPr>
         </p:nvSpPr>
         <p:spPr>
           <a:xfrm>
-            <a:off x="419164" y="969118"/>
-            <a:ext cx="4856924" cy="5839612"/>
-          </a:xfrm>
-        </p:spPr>
-        <p:txBody>
-          <a:bodyPr>
-            <a:normAutofit/>
-          </a:bodyPr>
+            <a:off x="603504" y="93216"/>
+            <a:ext cx="10515600" cy="1325563"/>
+          </a:xfrm>
+        </p:spPr>
+        <p:txBody>
+          <a:bodyPr/>
           <a:lstStyle/>
           <a:p>
-            <a:pPr algn="just"/>
-            <a:r>
-              <a:rPr lang="ru-RU" sz="1800" dirty="0"/>
-              <a:t>В связи с необходимостью более детального анализа мимики и положения головы в пространстве, в систему интегрирована модель </a:t>
-            </a:r>
-            <a:r>
-              <a:rPr lang="ru-RU" sz="1800" dirty="0" err="1"/>
-              <a:t>MediaPipe</a:t>
-            </a:r>
-            <a:r>
-              <a:rPr lang="ru-RU" sz="1800" dirty="0"/>
-              <a:t> Face </a:t>
-            </a:r>
-            <a:r>
-              <a:rPr lang="ru-RU" sz="1800" dirty="0" err="1"/>
-              <a:t>Landmarker</a:t>
-            </a:r>
-            <a:r>
-              <a:rPr lang="ru-RU" sz="1800" dirty="0"/>
-              <a:t> от Google.</a:t>
-            </a:r>
-          </a:p>
-          <a:p>
-            <a:pPr algn="just"/>
-            <a:r>
-              <a:rPr lang="ru-RU" sz="1800" dirty="0"/>
-              <a:t>На вход модели подаётся выровненное изображение лица. Модель строит плотную сетку из 468 трёхмерных ключевых точек, охватывающих контуры глаз, бровей, носа, губ и овала лица.</a:t>
-            </a:r>
-          </a:p>
-          <a:p>
-            <a:pPr algn="just"/>
-            <a:r>
-              <a:rPr lang="ru-RU" sz="1800" dirty="0"/>
-              <a:t>На выходе формируются </a:t>
-            </a:r>
-            <a:r>
-              <a:rPr lang="ru-RU" sz="1800" dirty="0" err="1"/>
-              <a:t>blendshape</a:t>
-            </a:r>
-            <a:r>
-              <a:rPr lang="ru-RU" sz="1800" dirty="0"/>
-              <a:t>-коэффициенты (активность групп лицевых мышц), углы поворота головы (</a:t>
-            </a:r>
-            <a:r>
-              <a:rPr lang="ru-RU" sz="1800" dirty="0" err="1"/>
-              <a:t>yaw</a:t>
-            </a:r>
-            <a:r>
-              <a:rPr lang="ru-RU" sz="1800" dirty="0"/>
-              <a:t>, </a:t>
-            </a:r>
-            <a:r>
-              <a:rPr lang="ru-RU" sz="1800" dirty="0" err="1"/>
-              <a:t>pitch</a:t>
-            </a:r>
-            <a:r>
-              <a:rPr lang="ru-RU" sz="1800" dirty="0"/>
-              <a:t>, </a:t>
-            </a:r>
-            <a:r>
-              <a:rPr lang="ru-RU" sz="1800" dirty="0" err="1"/>
-              <a:t>roll</a:t>
-            </a:r>
-            <a:r>
-              <a:rPr lang="ru-RU" sz="1800" dirty="0"/>
-              <a:t>) и данные для отслеживания </a:t>
-            </a:r>
-            <a:r>
-              <a:rPr lang="ru-RU" sz="1800" dirty="0" err="1"/>
-              <a:t>микровыражений</a:t>
-            </a:r>
-            <a:r>
-              <a:rPr lang="ru-RU" sz="1800" dirty="0"/>
-              <a:t>.</a:t>
-            </a:r>
-          </a:p>
-          <a:p>
-            <a:pPr algn="just"/>
-            <a:r>
-              <a:rPr lang="ru-RU" sz="1800" dirty="0"/>
-              <a:t>Модель перезаписывает и обогащает базовые данные классификации, позволяя системе учитывать не только статические эмоции, но и динамику мимики</a:t>
-            </a:r>
-            <a:r>
-              <a:rPr lang="en-US" sz="1800" dirty="0"/>
-              <a:t>.</a:t>
-            </a:r>
-            <a:endParaRPr lang="ru-RU" sz="1800" dirty="0"/>
-          </a:p>
-        </p:txBody>
-      </p:sp>
-      <p:sp>
-        <p:nvSpPr>
-          <p:cNvPr id="2" name="Заголовок 1">
-            <a:extLst>
-              <a:ext uri="{FF2B5EF4-FFF2-40B4-BE49-F238E27FC236}">
-                <a16:creationId xmlns:a16="http://schemas.microsoft.com/office/drawing/2014/main" id="{1B58CB9A-86AF-B0B7-3E9B-73D490908836}"/>
-              </a:ext>
-            </a:extLst>
-          </p:cNvPr>
-          <p:cNvSpPr>
-            <a:spLocks noGrp="1"/>
-          </p:cNvSpPr>
-          <p:nvPr>
-            <p:ph type="title"/>
-          </p:nvPr>
-        </p:nvSpPr>
-        <p:spPr>
-          <a:xfrm>
-            <a:off x="419164" y="103552"/>
-            <a:ext cx="10515600" cy="1325563"/>
-          </a:xfrm>
-        </p:spPr>
-        <p:txBody>
-          <a:bodyPr>
-            <a:normAutofit/>
-          </a:bodyPr>
+            <a:r>
+              <a:rPr lang="ru-RU" dirty="0"/>
+              <a:t>Интерфейс системы</a:t>
+            </a:r>
+          </a:p>
+        </p:txBody>
+      </p:sp>
+      <p:sp>
+        <p:nvSpPr>
+          <p:cNvPr id="2" name="Номер слайда 1">
+            <a:extLst>
+              <a:ext uri="{FF2B5EF4-FFF2-40B4-BE49-F238E27FC236}">
+                <a16:creationId xmlns:a16="http://schemas.microsoft.com/office/drawing/2014/main" id="{2DA7844C-4845-591E-A755-516346161CEC}"/>
+              </a:ext>
+            </a:extLst>
+          </p:cNvPr>
+          <p:cNvSpPr>
+            <a:spLocks noGrp="1"/>
+          </p:cNvSpPr>
+          <p:nvPr>
+            <p:ph type="sldNum" sz="quarter" idx="12"/>
+          </p:nvPr>
+        </p:nvSpPr>
+        <p:spPr/>
+        <p:txBody>
+          <a:bodyPr/>
           <a:lstStyle/>
           <a:p>
-            <a:r>
-              <a:rPr lang="ru-RU" sz="4000" dirty="0"/>
-              <a:t>Модель </a:t>
-            </a:r>
-            <a:r>
-              <a:rPr lang="en-US" sz="4000" dirty="0" err="1"/>
-              <a:t>MediaPipe</a:t>
-            </a:r>
-            <a:r>
-              <a:rPr lang="en-US" sz="4000" dirty="0"/>
-              <a:t> Face </a:t>
-            </a:r>
-            <a:r>
-              <a:rPr lang="en-US" sz="4000" dirty="0" err="1"/>
-              <a:t>Landmarker</a:t>
-            </a:r>
-            <a:endParaRPr lang="en-US" sz="4000" dirty="0"/>
+            <a:fld id="{5F9DB6E4-81A8-48FA-A111-413E3E85E768}" type="slidenum">
+              <a:rPr lang="ru-RU" smtClean="0"/>
+              <a:t>17</a:t>
+            </a:fld>
+            <a:endParaRPr lang="ru-RU"/>
           </a:p>
         </p:txBody>
       </p:sp>
       <p:pic>
         <p:nvPicPr>
-          <p:cNvPr id="7" name="Рисунок 6" descr="Задача &quot;Опорный знак на лице&quot;">
-            <a:extLst>
-              <a:ext uri="{FF2B5EF4-FFF2-40B4-BE49-F238E27FC236}">
-                <a16:creationId xmlns:a16="http://schemas.microsoft.com/office/drawing/2014/main" id="{AC6A1973-8F20-E21C-8984-347E22110987}"/>
+          <p:cNvPr id="3" name="Рисунок 2">
+            <a:extLst>
+              <a:ext uri="{FF2B5EF4-FFF2-40B4-BE49-F238E27FC236}">
+                <a16:creationId xmlns:a16="http://schemas.microsoft.com/office/drawing/2014/main" id="{D33FE67C-39AF-9CC6-D363-97D9E422D540}"/>
               </a:ext>
             </a:extLst>
           </p:cNvPr>
@@ -5837,65 +5840,25 @@
           <p:nvPr/>
         </p:nvPicPr>
         <p:blipFill>
-          <a:blip r:embed="rId2">
-            <a:extLst>
-              <a:ext uri="{28A0092B-C50C-407E-A947-70E740481C1C}">
-                <a14:useLocalDpi xmlns:a14="http://schemas.microsoft.com/office/drawing/2010/main" val="0"/>
-              </a:ext>
-            </a:extLst>
-          </a:blip>
-          <a:srcRect/>
+          <a:blip r:embed="rId2"/>
           <a:stretch>
             <a:fillRect/>
           </a:stretch>
         </p:blipFill>
-        <p:spPr bwMode="auto">
-          <a:xfrm>
-            <a:off x="5832411" y="1429115"/>
-            <a:ext cx="5940425" cy="3256280"/>
+        <p:spPr>
+          <a:xfrm>
+            <a:off x="1690963" y="1079214"/>
+            <a:ext cx="9368101" cy="4699572"/>
           </a:xfrm>
           <a:prstGeom prst="rect">
             <a:avLst/>
           </a:prstGeom>
-          <a:noFill/>
-          <a:ln>
-            <a:noFill/>
-          </a:ln>
         </p:spPr>
       </p:pic>
-      <p:sp>
-        <p:nvSpPr>
-          <p:cNvPr id="5" name="Номер слайда 4">
-            <a:extLst>
-              <a:ext uri="{FF2B5EF4-FFF2-40B4-BE49-F238E27FC236}">
-                <a16:creationId xmlns:a16="http://schemas.microsoft.com/office/drawing/2014/main" id="{C938FBF3-4A9B-D591-C9C7-E929397E9F73}"/>
-              </a:ext>
-            </a:extLst>
-          </p:cNvPr>
-          <p:cNvSpPr>
-            <a:spLocks noGrp="1"/>
-          </p:cNvSpPr>
-          <p:nvPr>
-            <p:ph type="sldNum" sz="quarter" idx="12"/>
-          </p:nvPr>
-        </p:nvSpPr>
-        <p:spPr/>
-        <p:txBody>
-          <a:bodyPr/>
-          <a:lstStyle/>
-          <a:p>
-            <a:fld id="{5F9DB6E4-81A8-48FA-A111-413E3E85E768}" type="slidenum">
-              <a:rPr lang="ru-RU" smtClean="0"/>
-              <a:t>17</a:t>
-            </a:fld>
-            <a:endParaRPr lang="ru-RU"/>
-          </a:p>
-        </p:txBody>
-      </p:sp>
     </p:spTree>
     <p:extLst>
       <p:ext uri="{BB962C8B-B14F-4D97-AF65-F5344CB8AC3E}">
-        <p14:creationId xmlns:p14="http://schemas.microsoft.com/office/powerpoint/2010/main" val="441378147"/>
+        <p14:creationId xmlns:p14="http://schemas.microsoft.com/office/powerpoint/2010/main" val="3695925043"/>
       </p:ext>
     </p:extLst>
   </p:cSld>
@@ -5924,128 +5887,6 @@
       </p:grpSpPr>
       <p:sp>
         <p:nvSpPr>
-          <p:cNvPr id="9" name="Заголовок 8">
-            <a:extLst>
-              <a:ext uri="{FF2B5EF4-FFF2-40B4-BE49-F238E27FC236}">
-                <a16:creationId xmlns:a16="http://schemas.microsoft.com/office/drawing/2014/main" id="{97468337-8816-F43C-CDDA-7015138208A6}"/>
-              </a:ext>
-            </a:extLst>
-          </p:cNvPr>
-          <p:cNvSpPr>
-            <a:spLocks noGrp="1"/>
-          </p:cNvSpPr>
-          <p:nvPr>
-            <p:ph type="title"/>
-          </p:nvPr>
-        </p:nvSpPr>
-        <p:spPr>
-          <a:xfrm>
-            <a:off x="603504" y="93216"/>
-            <a:ext cx="10515600" cy="1325563"/>
-          </a:xfrm>
-        </p:spPr>
-        <p:txBody>
-          <a:bodyPr/>
-          <a:lstStyle/>
-          <a:p>
-            <a:r>
-              <a:rPr lang="ru-RU" dirty="0"/>
-              <a:t>Интерфейс системы</a:t>
-            </a:r>
-          </a:p>
-        </p:txBody>
-      </p:sp>
-      <p:sp>
-        <p:nvSpPr>
-          <p:cNvPr id="2" name="Номер слайда 1">
-            <a:extLst>
-              <a:ext uri="{FF2B5EF4-FFF2-40B4-BE49-F238E27FC236}">
-                <a16:creationId xmlns:a16="http://schemas.microsoft.com/office/drawing/2014/main" id="{2DA7844C-4845-591E-A755-516346161CEC}"/>
-              </a:ext>
-            </a:extLst>
-          </p:cNvPr>
-          <p:cNvSpPr>
-            <a:spLocks noGrp="1"/>
-          </p:cNvSpPr>
-          <p:nvPr>
-            <p:ph type="sldNum" sz="quarter" idx="12"/>
-          </p:nvPr>
-        </p:nvSpPr>
-        <p:spPr/>
-        <p:txBody>
-          <a:bodyPr/>
-          <a:lstStyle/>
-          <a:p>
-            <a:fld id="{5F9DB6E4-81A8-48FA-A111-413E3E85E768}" type="slidenum">
-              <a:rPr lang="ru-RU" smtClean="0"/>
-              <a:t>18</a:t>
-            </a:fld>
-            <a:endParaRPr lang="ru-RU"/>
-          </a:p>
-        </p:txBody>
-      </p:sp>
-      <p:pic>
-        <p:nvPicPr>
-          <p:cNvPr id="3" name="Рисунок 2">
-            <a:extLst>
-              <a:ext uri="{FF2B5EF4-FFF2-40B4-BE49-F238E27FC236}">
-                <a16:creationId xmlns:a16="http://schemas.microsoft.com/office/drawing/2014/main" id="{D33FE67C-39AF-9CC6-D363-97D9E422D540}"/>
-              </a:ext>
-            </a:extLst>
-          </p:cNvPr>
-          <p:cNvPicPr>
-            <a:picLocks noChangeAspect="1"/>
-          </p:cNvPicPr>
-          <p:nvPr/>
-        </p:nvPicPr>
-        <p:blipFill>
-          <a:blip r:embed="rId2"/>
-          <a:stretch>
-            <a:fillRect/>
-          </a:stretch>
-        </p:blipFill>
-        <p:spPr>
-          <a:xfrm>
-            <a:off x="1690963" y="1079214"/>
-            <a:ext cx="9368101" cy="4699572"/>
-          </a:xfrm>
-          <a:prstGeom prst="rect">
-            <a:avLst/>
-          </a:prstGeom>
-        </p:spPr>
-      </p:pic>
-    </p:spTree>
-    <p:extLst>
-      <p:ext uri="{BB962C8B-B14F-4D97-AF65-F5344CB8AC3E}">
-        <p14:creationId xmlns:p14="http://schemas.microsoft.com/office/powerpoint/2010/main" val="3695925043"/>
-      </p:ext>
-    </p:extLst>
-  </p:cSld>
-  <p:clrMapOvr>
-    <a:masterClrMapping/>
-  </p:clrMapOvr>
-</p:sld>
-</file>
-
-<file path=ppt/slides/slide19.xml><?xml version="1.0" encoding="utf-8"?>
-<p:sld xmlns:a="http://schemas.openxmlformats.org/drawingml/2006/main" xmlns:r="http://schemas.openxmlformats.org/officeDocument/2006/relationships" xmlns:p="http://schemas.openxmlformats.org/presentationml/2006/main">
-  <p:cSld>
-    <p:spTree>
-      <p:nvGrpSpPr>
-        <p:cNvPr id="1" name=""/>
-        <p:cNvGrpSpPr/>
-        <p:nvPr/>
-      </p:nvGrpSpPr>
-      <p:grpSpPr>
-        <a:xfrm>
-          <a:off x="0" y="0"/>
-          <a:ext cx="0" cy="0"/>
-          <a:chOff x="0" y="0"/>
-          <a:chExt cx="0" cy="0"/>
-        </a:xfrm>
-      </p:grpSpPr>
-      <p:sp>
-        <p:nvSpPr>
           <p:cNvPr id="2" name="Заголовок 1">
             <a:extLst>
               <a:ext uri="{FF2B5EF4-FFF2-40B4-BE49-F238E27FC236}">
@@ -6238,7 +6079,7 @@
           <a:p>
             <a:fld id="{5F9DB6E4-81A8-48FA-A111-413E3E85E768}" type="slidenum">
               <a:rPr lang="ru-RU" smtClean="0"/>
-              <a:t>19</a:t>
+              <a:t>18</a:t>
             </a:fld>
             <a:endParaRPr lang="ru-RU"/>
           </a:p>
@@ -6767,160 +6608,10 @@
           <a:lstStyle/>
           <a:p>
             <a:r>
-              <a:rPr lang="ru-RU" dirty="0"/>
+              <a:rPr lang="ru-RU"/>
               <a:t>Существующие решения:</a:t>
             </a:r>
-          </a:p>
-        </p:txBody>
-      </p:sp>
-      <p:sp>
-        <p:nvSpPr>
-          <p:cNvPr id="3" name="Объект 2">
-            <a:extLst>
-              <a:ext uri="{FF2B5EF4-FFF2-40B4-BE49-F238E27FC236}">
-                <a16:creationId xmlns:a16="http://schemas.microsoft.com/office/drawing/2014/main" id="{A0F3E649-ADA8-4250-87FF-0757785BBB12}"/>
-              </a:ext>
-            </a:extLst>
-          </p:cNvPr>
-          <p:cNvSpPr>
-            <a:spLocks noGrp="1"/>
-          </p:cNvSpPr>
-          <p:nvPr>
-            <p:ph idx="1"/>
-          </p:nvPr>
-        </p:nvSpPr>
-        <p:spPr>
-          <a:xfrm>
-            <a:off x="523783" y="1118586"/>
-            <a:ext cx="10830017" cy="5513033"/>
-          </a:xfrm>
-        </p:spPr>
-        <p:txBody>
-          <a:bodyPr>
-            <a:normAutofit fontScale="85000" lnSpcReduction="20000"/>
-          </a:bodyPr>
-          <a:lstStyle/>
-          <a:p>
-            <a:pPr algn="just"/>
-            <a:r>
-              <a:rPr lang="ru-RU" dirty="0" err="1"/>
-              <a:t>Affectiva</a:t>
-            </a:r>
-            <a:r>
-              <a:rPr lang="ru-RU" dirty="0"/>
-              <a:t> (компьютерное зрение) — высокая точность, но нет </a:t>
-            </a:r>
-            <a:r>
-              <a:rPr lang="ru-RU" dirty="0" err="1"/>
-              <a:t>аудиоанализа</a:t>
-            </a:r>
             <a:endParaRPr lang="ru-RU" dirty="0"/>
-          </a:p>
-          <a:p>
-            <a:pPr algn="just"/>
-            <a:r>
-              <a:rPr lang="ru-RU" dirty="0" err="1"/>
-              <a:t>Beyond</a:t>
-            </a:r>
-            <a:r>
-              <a:rPr lang="ru-RU" dirty="0"/>
-              <a:t> </a:t>
-            </a:r>
-            <a:r>
-              <a:rPr lang="ru-RU" dirty="0" err="1"/>
-              <a:t>Verbal</a:t>
-            </a:r>
-            <a:r>
-              <a:rPr lang="ru-RU" dirty="0"/>
-              <a:t> (</a:t>
-            </a:r>
-            <a:r>
-              <a:rPr lang="ru-RU" dirty="0" err="1"/>
-              <a:t>аудиоанализ</a:t>
-            </a:r>
-            <a:r>
-              <a:rPr lang="ru-RU" dirty="0"/>
-              <a:t>) — устойчивость к помехам, но нет визуальных данных</a:t>
-            </a:r>
-          </a:p>
-          <a:p>
-            <a:pPr algn="just"/>
-            <a:r>
-              <a:rPr lang="ru-RU" dirty="0" err="1"/>
-              <a:t>Emotient</a:t>
-            </a:r>
-            <a:r>
-              <a:rPr lang="ru-RU" dirty="0"/>
-              <a:t> (мультимодальные) — высокая точность, но дорогая и не адаптирована под РФ</a:t>
-            </a:r>
-          </a:p>
-          <a:p>
-            <a:pPr algn="just"/>
-            <a:endParaRPr lang="ru-RU" dirty="0"/>
-          </a:p>
-          <a:p>
-            <a:pPr marL="0" indent="0" algn="just">
-              <a:buNone/>
-            </a:pPr>
-            <a:r>
-              <a:rPr lang="ru-RU" dirty="0"/>
-              <a:t>Недостатки аналогов:</a:t>
-            </a:r>
-          </a:p>
-          <a:p>
-            <a:pPr algn="just"/>
-            <a:r>
-              <a:rPr lang="ru-RU" dirty="0"/>
-              <a:t>Высокая стоимость лицензий</a:t>
-            </a:r>
-          </a:p>
-          <a:p>
-            <a:pPr algn="just"/>
-            <a:r>
-              <a:rPr lang="ru-RU" dirty="0"/>
-              <a:t>Отсутствие адаптации под HR-сценарии</a:t>
-            </a:r>
-          </a:p>
-          <a:p>
-            <a:pPr algn="just"/>
-            <a:r>
-              <a:rPr lang="ru-RU" dirty="0"/>
-              <a:t>Риски несоответствия ФЗ-152</a:t>
-            </a:r>
-          </a:p>
-          <a:p>
-            <a:pPr algn="just"/>
-            <a:endParaRPr lang="ru-RU" dirty="0"/>
-          </a:p>
-          <a:p>
-            <a:pPr marL="0" indent="0" algn="just">
-              <a:buNone/>
-            </a:pPr>
-            <a:r>
-              <a:rPr lang="ru-RU" dirty="0"/>
-              <a:t>Разрабатываемая система:</a:t>
-            </a:r>
-          </a:p>
-          <a:p>
-            <a:pPr algn="just"/>
-            <a:r>
-              <a:rPr lang="ru-RU" dirty="0"/>
-              <a:t>Специализация под HR</a:t>
-            </a:r>
-          </a:p>
-          <a:p>
-            <a:pPr algn="just"/>
-            <a:r>
-              <a:rPr lang="ru-RU" dirty="0"/>
-              <a:t>Локальная обработка данных</a:t>
-            </a:r>
-          </a:p>
-          <a:p>
-            <a:pPr algn="just"/>
-            <a:r>
-              <a:rPr lang="ru-RU" dirty="0"/>
-              <a:t>Открытый стек</a:t>
-            </a:r>
           </a:p>
         </p:txBody>
       </p:sp>
@@ -6953,6 +6644,809 @@
           </a:p>
         </p:txBody>
       </p:sp>
+      <p:graphicFrame>
+        <p:nvGraphicFramePr>
+          <p:cNvPr id="10" name="Таблица 9">
+            <a:extLst>
+              <a:ext uri="{FF2B5EF4-FFF2-40B4-BE49-F238E27FC236}">
+                <a16:creationId xmlns:a16="http://schemas.microsoft.com/office/drawing/2014/main" id="{4F19A448-2E80-EDC0-066C-E1187FA6CA58}"/>
+              </a:ext>
+            </a:extLst>
+          </p:cNvPr>
+          <p:cNvGraphicFramePr>
+            <a:graphicFrameLocks noGrp="1"/>
+          </p:cNvGraphicFramePr>
+          <p:nvPr>
+            <p:extLst>
+              <p:ext uri="{D42A27DB-BD31-4B8C-83A1-F6EECF244321}">
+                <p14:modId xmlns:p14="http://schemas.microsoft.com/office/powerpoint/2010/main" val="1264586088"/>
+              </p:ext>
+            </p:extLst>
+          </p:nvPr>
+        </p:nvGraphicFramePr>
+        <p:xfrm>
+          <a:off x="463857" y="841248"/>
+          <a:ext cx="11264285" cy="5486402"/>
+        </p:xfrm>
+        <a:graphic>
+          <a:graphicData uri="http://schemas.openxmlformats.org/drawingml/2006/table">
+            <a:tbl>
+              <a:tblPr firstRow="1" bandRow="1">
+                <a:tableStyleId>{5C22544A-7EE6-4342-B048-85BDC9FD1C3A}</a:tableStyleId>
+              </a:tblPr>
+              <a:tblGrid>
+                <a:gridCol w="2252857">
+                  <a:extLst>
+                    <a:ext uri="{9D8B030D-6E8A-4147-A177-3AD203B41FA5}">
+                      <a16:colId xmlns:a16="http://schemas.microsoft.com/office/drawing/2014/main" val="2457689854"/>
+                    </a:ext>
+                  </a:extLst>
+                </a:gridCol>
+                <a:gridCol w="2252857">
+                  <a:extLst>
+                    <a:ext uri="{9D8B030D-6E8A-4147-A177-3AD203B41FA5}">
+                      <a16:colId xmlns:a16="http://schemas.microsoft.com/office/drawing/2014/main" val="3851339300"/>
+                    </a:ext>
+                  </a:extLst>
+                </a:gridCol>
+                <a:gridCol w="2252857">
+                  <a:extLst>
+                    <a:ext uri="{9D8B030D-6E8A-4147-A177-3AD203B41FA5}">
+                      <a16:colId xmlns:a16="http://schemas.microsoft.com/office/drawing/2014/main" val="2582452567"/>
+                    </a:ext>
+                  </a:extLst>
+                </a:gridCol>
+                <a:gridCol w="2252857">
+                  <a:extLst>
+                    <a:ext uri="{9D8B030D-6E8A-4147-A177-3AD203B41FA5}">
+                      <a16:colId xmlns:a16="http://schemas.microsoft.com/office/drawing/2014/main" val="187986983"/>
+                    </a:ext>
+                  </a:extLst>
+                </a:gridCol>
+                <a:gridCol w="2252857">
+                  <a:extLst>
+                    <a:ext uri="{9D8B030D-6E8A-4147-A177-3AD203B41FA5}">
+                      <a16:colId xmlns:a16="http://schemas.microsoft.com/office/drawing/2014/main" val="388870918"/>
+                    </a:ext>
+                  </a:extLst>
+                </a:gridCol>
+              </a:tblGrid>
+              <a:tr h="1063518">
+                <a:tc>
+                  <a:txBody>
+                    <a:bodyPr/>
+                    <a:lstStyle/>
+                    <a:p>
+                      <a:pPr algn="l"/>
+                      <a:r>
+                        <a:rPr lang="ru-RU" sz="1800" b="1" kern="1200" dirty="0">
+                          <a:solidFill>
+                            <a:schemeClr val="lt1"/>
+                          </a:solidFill>
+                          <a:effectLst/>
+                          <a:latin typeface="+mn-lt"/>
+                          <a:ea typeface="+mn-ea"/>
+                          <a:cs typeface="+mn-cs"/>
+                        </a:rPr>
+                        <a:t>Критерий</a:t>
+                      </a:r>
+                      <a:endParaRPr lang="ru-RU" dirty="0"/>
+                    </a:p>
+                  </a:txBody>
+                  <a:tcPr/>
+                </a:tc>
+                <a:tc>
+                  <a:txBody>
+                    <a:bodyPr/>
+                    <a:lstStyle/>
+                    <a:p>
+                      <a:pPr algn="l"/>
+                      <a:r>
+                        <a:rPr lang="en-US" sz="1800" b="1" kern="1200" dirty="0" err="1">
+                          <a:solidFill>
+                            <a:schemeClr val="lt1"/>
+                          </a:solidFill>
+                          <a:effectLst/>
+                          <a:latin typeface="+mn-lt"/>
+                          <a:ea typeface="+mn-ea"/>
+                          <a:cs typeface="+mn-cs"/>
+                        </a:rPr>
+                        <a:t>Affectiva</a:t>
+                      </a:r>
+                      <a:endParaRPr lang="ru-RU" dirty="0"/>
+                    </a:p>
+                  </a:txBody>
+                  <a:tcPr/>
+                </a:tc>
+                <a:tc>
+                  <a:txBody>
+                    <a:bodyPr/>
+                    <a:lstStyle/>
+                    <a:p>
+                      <a:pPr algn="l"/>
+                      <a:r>
+                        <a:rPr lang="en-US" sz="1800" b="1" kern="1200" dirty="0">
+                          <a:solidFill>
+                            <a:schemeClr val="lt1"/>
+                          </a:solidFill>
+                          <a:effectLst/>
+                          <a:latin typeface="+mn-lt"/>
+                          <a:ea typeface="+mn-ea"/>
+                          <a:cs typeface="+mn-cs"/>
+                        </a:rPr>
+                        <a:t>Beyond Verbal</a:t>
+                      </a:r>
+                      <a:endParaRPr lang="ru-RU" dirty="0"/>
+                    </a:p>
+                  </a:txBody>
+                  <a:tcPr/>
+                </a:tc>
+                <a:tc>
+                  <a:txBody>
+                    <a:bodyPr/>
+                    <a:lstStyle/>
+                    <a:p>
+                      <a:pPr algn="l"/>
+                      <a:r>
+                        <a:rPr lang="en-US" sz="1800" b="1" kern="1200" dirty="0" err="1">
+                          <a:solidFill>
+                            <a:schemeClr val="lt1"/>
+                          </a:solidFill>
+                          <a:effectLst/>
+                          <a:latin typeface="+mn-lt"/>
+                          <a:ea typeface="+mn-ea"/>
+                          <a:cs typeface="+mn-cs"/>
+                        </a:rPr>
+                        <a:t>Emotient</a:t>
+                      </a:r>
+                      <a:endParaRPr lang="ru-RU" dirty="0"/>
+                    </a:p>
+                  </a:txBody>
+                  <a:tcPr/>
+                </a:tc>
+                <a:tc>
+                  <a:txBody>
+                    <a:bodyPr/>
+                    <a:lstStyle/>
+                    <a:p>
+                      <a:pPr algn="l"/>
+                      <a:r>
+                        <a:rPr lang="ru-RU" sz="1800" b="1" kern="1200" dirty="0">
+                          <a:solidFill>
+                            <a:schemeClr val="lt1"/>
+                          </a:solidFill>
+                          <a:effectLst/>
+                          <a:latin typeface="+mn-lt"/>
+                          <a:ea typeface="+mn-ea"/>
+                          <a:cs typeface="+mn-cs"/>
+                        </a:rPr>
+                        <a:t>Разрабатываемая</a:t>
+                      </a:r>
+                      <a:endParaRPr lang="ru-RU" dirty="0"/>
+                    </a:p>
+                  </a:txBody>
+                  <a:tcPr/>
+                </a:tc>
+                <a:extLst>
+                  <a:ext uri="{0D108BD9-81ED-4DB2-BD59-A6C34878D82A}">
+                    <a16:rowId xmlns:a16="http://schemas.microsoft.com/office/drawing/2014/main" val="2815556778"/>
+                  </a:ext>
+                </a:extLst>
+              </a:tr>
+              <a:tr h="1063518">
+                <a:tc>
+                  <a:txBody>
+                    <a:bodyPr/>
+                    <a:lstStyle/>
+                    <a:p>
+                      <a:pPr algn="l"/>
+                      <a:r>
+                        <a:rPr lang="ru-RU" sz="1800" kern="1200">
+                          <a:solidFill>
+                            <a:schemeClr val="dk1"/>
+                          </a:solidFill>
+                          <a:effectLst/>
+                          <a:latin typeface="+mn-lt"/>
+                          <a:ea typeface="+mn-ea"/>
+                          <a:cs typeface="+mn-cs"/>
+                        </a:rPr>
+                        <a:t>Мультимодальность</a:t>
+                      </a:r>
+                      <a:endParaRPr lang="ru-RU" dirty="0"/>
+                    </a:p>
+                  </a:txBody>
+                  <a:tcPr/>
+                </a:tc>
+                <a:tc>
+                  <a:txBody>
+                    <a:bodyPr/>
+                    <a:lstStyle/>
+                    <a:p>
+                      <a:pPr algn="l"/>
+                      <a:r>
+                        <a:rPr lang="ru-RU" sz="1800" kern="1200" dirty="0">
+                          <a:solidFill>
+                            <a:schemeClr val="dk1"/>
+                          </a:solidFill>
+                          <a:effectLst/>
+                          <a:latin typeface="+mn-lt"/>
+                          <a:ea typeface="+mn-ea"/>
+                          <a:cs typeface="+mn-cs"/>
+                        </a:rPr>
+                        <a:t>❌</a:t>
+                      </a:r>
+                      <a:endParaRPr lang="ru-RU" dirty="0"/>
+                    </a:p>
+                  </a:txBody>
+                  <a:tcPr/>
+                </a:tc>
+                <a:tc>
+                  <a:txBody>
+                    <a:bodyPr/>
+                    <a:lstStyle/>
+                    <a:p>
+                      <a:pPr algn="l"/>
+                      <a:r>
+                        <a:rPr lang="ru-RU" sz="1800" kern="1200" dirty="0">
+                          <a:solidFill>
+                            <a:schemeClr val="dk1"/>
+                          </a:solidFill>
+                          <a:effectLst/>
+                          <a:latin typeface="+mn-lt"/>
+                          <a:ea typeface="+mn-ea"/>
+                          <a:cs typeface="+mn-cs"/>
+                        </a:rPr>
+                        <a:t>❌</a:t>
+                      </a:r>
+                      <a:endParaRPr lang="ru-RU" dirty="0"/>
+                    </a:p>
+                  </a:txBody>
+                  <a:tcPr/>
+                </a:tc>
+                <a:tc>
+                  <a:txBody>
+                    <a:bodyPr/>
+                    <a:lstStyle/>
+                    <a:p>
+                      <a:pPr algn="l"/>
+                      <a:r>
+                        <a:rPr lang="ru-RU" sz="1800" kern="1200" dirty="0">
+                          <a:solidFill>
+                            <a:schemeClr val="dk1"/>
+                          </a:solidFill>
+                          <a:effectLst/>
+                          <a:latin typeface="+mn-lt"/>
+                          <a:ea typeface="+mn-ea"/>
+                          <a:cs typeface="+mn-cs"/>
+                        </a:rPr>
+                        <a:t>✅</a:t>
+                      </a:r>
+                      <a:endParaRPr lang="ru-RU" dirty="0"/>
+                    </a:p>
+                  </a:txBody>
+                  <a:tcPr/>
+                </a:tc>
+                <a:tc>
+                  <a:txBody>
+                    <a:bodyPr/>
+                    <a:lstStyle/>
+                    <a:p>
+                      <a:pPr algn="l"/>
+                      <a:r>
+                        <a:rPr lang="ru-RU" sz="1800" kern="1200" dirty="0">
+                          <a:solidFill>
+                            <a:schemeClr val="dk1"/>
+                          </a:solidFill>
+                          <a:effectLst/>
+                          <a:latin typeface="+mn-lt"/>
+                          <a:ea typeface="+mn-ea"/>
+                          <a:cs typeface="+mn-cs"/>
+                        </a:rPr>
+                        <a:t>✅</a:t>
+                      </a:r>
+                      <a:endParaRPr lang="ru-RU" dirty="0"/>
+                    </a:p>
+                  </a:txBody>
+                  <a:tcPr/>
+                </a:tc>
+                <a:extLst>
+                  <a:ext uri="{0D108BD9-81ED-4DB2-BD59-A6C34878D82A}">
+                    <a16:rowId xmlns:a16="http://schemas.microsoft.com/office/drawing/2014/main" val="3681111159"/>
+                  </a:ext>
+                </a:extLst>
+              </a:tr>
+              <a:tr h="1063518">
+                <a:tc>
+                  <a:txBody>
+                    <a:bodyPr/>
+                    <a:lstStyle/>
+                    <a:p>
+                      <a:pPr algn="l"/>
+                      <a:r>
+                        <a:rPr lang="ru-RU" sz="1800" kern="1200" dirty="0">
+                          <a:solidFill>
+                            <a:schemeClr val="dk1"/>
+                          </a:solidFill>
+                          <a:effectLst/>
+                          <a:latin typeface="+mn-lt"/>
+                          <a:ea typeface="+mn-ea"/>
+                          <a:cs typeface="+mn-cs"/>
+                        </a:rPr>
+                        <a:t>Адаптация под HR</a:t>
+                      </a:r>
+                      <a:endParaRPr lang="ru-RU" dirty="0"/>
+                    </a:p>
+                  </a:txBody>
+                  <a:tcPr/>
+                </a:tc>
+                <a:tc>
+                  <a:txBody>
+                    <a:bodyPr/>
+                    <a:lstStyle/>
+                    <a:p>
+                      <a:pPr algn="l"/>
+                      <a:r>
+                        <a:rPr lang="ru-RU" sz="1800" kern="1200" dirty="0">
+                          <a:solidFill>
+                            <a:schemeClr val="dk1"/>
+                          </a:solidFill>
+                          <a:effectLst/>
+                          <a:latin typeface="+mn-lt"/>
+                          <a:ea typeface="+mn-ea"/>
+                          <a:cs typeface="+mn-cs"/>
+                        </a:rPr>
+                        <a:t>Средняя</a:t>
+                      </a:r>
+                      <a:endParaRPr lang="ru-RU" dirty="0"/>
+                    </a:p>
+                  </a:txBody>
+                  <a:tcPr/>
+                </a:tc>
+                <a:tc>
+                  <a:txBody>
+                    <a:bodyPr/>
+                    <a:lstStyle/>
+                    <a:p>
+                      <a:pPr algn="l"/>
+                      <a:r>
+                        <a:rPr lang="ru-RU" sz="1800" kern="1200" dirty="0">
+                          <a:solidFill>
+                            <a:schemeClr val="dk1"/>
+                          </a:solidFill>
+                          <a:effectLst/>
+                          <a:latin typeface="+mn-lt"/>
+                          <a:ea typeface="+mn-ea"/>
+                          <a:cs typeface="+mn-cs"/>
+                        </a:rPr>
+                        <a:t>Низкая</a:t>
+                      </a:r>
+                      <a:endParaRPr lang="ru-RU" dirty="0"/>
+                    </a:p>
+                  </a:txBody>
+                  <a:tcPr/>
+                </a:tc>
+                <a:tc>
+                  <a:txBody>
+                    <a:bodyPr/>
+                    <a:lstStyle/>
+                    <a:p>
+                      <a:pPr algn="l"/>
+                      <a:r>
+                        <a:rPr lang="ru-RU" sz="1800" kern="1200" dirty="0">
+                          <a:solidFill>
+                            <a:schemeClr val="dk1"/>
+                          </a:solidFill>
+                          <a:effectLst/>
+                          <a:latin typeface="+mn-lt"/>
+                          <a:ea typeface="+mn-ea"/>
+                          <a:cs typeface="+mn-cs"/>
+                        </a:rPr>
+                        <a:t>Высокая</a:t>
+                      </a:r>
+                      <a:endParaRPr lang="ru-RU" dirty="0"/>
+                    </a:p>
+                  </a:txBody>
+                  <a:tcPr/>
+                </a:tc>
+                <a:tc>
+                  <a:txBody>
+                    <a:bodyPr/>
+                    <a:lstStyle/>
+                    <a:p>
+                      <a:pPr algn="l"/>
+                      <a:r>
+                        <a:rPr lang="ru-RU" sz="1800" kern="1200" dirty="0">
+                          <a:solidFill>
+                            <a:schemeClr val="dk1"/>
+                          </a:solidFill>
+                          <a:effectLst/>
+                          <a:latin typeface="+mn-lt"/>
+                          <a:ea typeface="+mn-ea"/>
+                          <a:cs typeface="+mn-cs"/>
+                        </a:rPr>
+                        <a:t>Высокая</a:t>
+                      </a:r>
+                      <a:endParaRPr lang="ru-RU" dirty="0"/>
+                    </a:p>
+                  </a:txBody>
+                  <a:tcPr/>
+                </a:tc>
+                <a:extLst>
+                  <a:ext uri="{0D108BD9-81ED-4DB2-BD59-A6C34878D82A}">
+                    <a16:rowId xmlns:a16="http://schemas.microsoft.com/office/drawing/2014/main" val="2021033714"/>
+                  </a:ext>
+                </a:extLst>
+              </a:tr>
+              <a:tr h="1063518">
+                <a:tc>
+                  <a:txBody>
+                    <a:bodyPr/>
+                    <a:lstStyle/>
+                    <a:p>
+                      <a:pPr algn="l"/>
+                      <a:r>
+                        <a:rPr lang="ru-RU" sz="1800" kern="1200" dirty="0">
+                          <a:solidFill>
+                            <a:schemeClr val="dk1"/>
+                          </a:solidFill>
+                          <a:effectLst/>
+                          <a:latin typeface="+mn-lt"/>
+                          <a:ea typeface="+mn-ea"/>
+                          <a:cs typeface="+mn-cs"/>
+                        </a:rPr>
+                        <a:t>Соответствие ФЗ-152</a:t>
+                      </a:r>
+                      <a:endParaRPr lang="ru-RU" dirty="0"/>
+                    </a:p>
+                  </a:txBody>
+                  <a:tcPr/>
+                </a:tc>
+                <a:tc>
+                  <a:txBody>
+                    <a:bodyPr/>
+                    <a:lstStyle/>
+                    <a:p>
+                      <a:pPr algn="l"/>
+                      <a:r>
+                        <a:rPr lang="ru-RU" sz="1800" kern="1200" dirty="0">
+                          <a:solidFill>
+                            <a:schemeClr val="dk1"/>
+                          </a:solidFill>
+                          <a:effectLst/>
+                          <a:latin typeface="+mn-lt"/>
+                          <a:ea typeface="+mn-ea"/>
+                          <a:cs typeface="+mn-cs"/>
+                        </a:rPr>
+                        <a:t>❌</a:t>
+                      </a:r>
+                      <a:endParaRPr lang="ru-RU" dirty="0"/>
+                    </a:p>
+                  </a:txBody>
+                  <a:tcPr/>
+                </a:tc>
+                <a:tc>
+                  <a:txBody>
+                    <a:bodyPr/>
+                    <a:lstStyle/>
+                    <a:p>
+                      <a:pPr algn="l"/>
+                      <a:r>
+                        <a:rPr lang="ru-RU" sz="1800" kern="1200" dirty="0">
+                          <a:solidFill>
+                            <a:schemeClr val="dk1"/>
+                          </a:solidFill>
+                          <a:effectLst/>
+                          <a:latin typeface="+mn-lt"/>
+                          <a:ea typeface="+mn-ea"/>
+                          <a:cs typeface="+mn-cs"/>
+                        </a:rPr>
+                        <a:t>❌</a:t>
+                      </a:r>
+                      <a:endParaRPr lang="ru-RU" dirty="0"/>
+                    </a:p>
+                  </a:txBody>
+                  <a:tcPr/>
+                </a:tc>
+                <a:tc>
+                  <a:txBody>
+                    <a:bodyPr/>
+                    <a:lstStyle/>
+                    <a:p>
+                      <a:pPr algn="l"/>
+                      <a:r>
+                        <a:rPr lang="ru-RU" sz="1800" kern="1200" dirty="0">
+                          <a:solidFill>
+                            <a:schemeClr val="dk1"/>
+                          </a:solidFill>
+                          <a:effectLst/>
+                          <a:latin typeface="+mn-lt"/>
+                          <a:ea typeface="+mn-ea"/>
+                          <a:cs typeface="+mn-cs"/>
+                        </a:rPr>
+                        <a:t>❌</a:t>
+                      </a:r>
+                      <a:endParaRPr lang="ru-RU" dirty="0"/>
+                    </a:p>
+                  </a:txBody>
+                  <a:tcPr/>
+                </a:tc>
+                <a:tc>
+                  <a:txBody>
+                    <a:bodyPr/>
+                    <a:lstStyle/>
+                    <a:p>
+                      <a:pPr algn="l"/>
+                      <a:r>
+                        <a:rPr lang="ru-RU" sz="1800" kern="1200" dirty="0">
+                          <a:solidFill>
+                            <a:schemeClr val="dk1"/>
+                          </a:solidFill>
+                          <a:effectLst/>
+                          <a:latin typeface="+mn-lt"/>
+                          <a:ea typeface="+mn-ea"/>
+                          <a:cs typeface="+mn-cs"/>
+                        </a:rPr>
+                        <a:t>✅</a:t>
+                      </a:r>
+                      <a:endParaRPr lang="ru-RU" dirty="0"/>
+                    </a:p>
+                  </a:txBody>
+                  <a:tcPr/>
+                </a:tc>
+                <a:extLst>
+                  <a:ext uri="{0D108BD9-81ED-4DB2-BD59-A6C34878D82A}">
+                    <a16:rowId xmlns:a16="http://schemas.microsoft.com/office/drawing/2014/main" val="1625816237"/>
+                  </a:ext>
+                </a:extLst>
+              </a:tr>
+              <a:tr h="616165">
+                <a:tc>
+                  <a:txBody>
+                    <a:bodyPr/>
+                    <a:lstStyle/>
+                    <a:p>
+                      <a:pPr algn="l"/>
+                      <a:r>
+                        <a:rPr lang="ru-RU" sz="1800" kern="1200" dirty="0">
+                          <a:solidFill>
+                            <a:schemeClr val="dk1"/>
+                          </a:solidFill>
+                          <a:effectLst/>
+                          <a:latin typeface="+mn-lt"/>
+                          <a:ea typeface="+mn-ea"/>
+                          <a:cs typeface="+mn-cs"/>
+                        </a:rPr>
+                        <a:t>Лицензии</a:t>
+                      </a:r>
+                      <a:endParaRPr lang="ru-RU" dirty="0"/>
+                    </a:p>
+                  </a:txBody>
+                  <a:tcPr/>
+                </a:tc>
+                <a:tc>
+                  <a:txBody>
+                    <a:bodyPr/>
+                    <a:lstStyle/>
+                    <a:p>
+                      <a:pPr algn="l"/>
+                      <a:r>
+                        <a:rPr lang="ru-RU" sz="1800" kern="1200" dirty="0">
+                          <a:solidFill>
+                            <a:schemeClr val="dk1"/>
+                          </a:solidFill>
+                          <a:effectLst/>
+                          <a:latin typeface="+mn-lt"/>
+                          <a:ea typeface="+mn-ea"/>
+                          <a:cs typeface="+mn-cs"/>
+                        </a:rPr>
+                        <a:t>Да</a:t>
+                      </a:r>
+                      <a:endParaRPr lang="ru-RU" dirty="0"/>
+                    </a:p>
+                  </a:txBody>
+                  <a:tcPr/>
+                </a:tc>
+                <a:tc>
+                  <a:txBody>
+                    <a:bodyPr/>
+                    <a:lstStyle/>
+                    <a:p>
+                      <a:pPr algn="l"/>
+                      <a:r>
+                        <a:rPr lang="ru-RU" sz="1800" kern="1200" dirty="0">
+                          <a:solidFill>
+                            <a:schemeClr val="dk1"/>
+                          </a:solidFill>
+                          <a:effectLst/>
+                          <a:latin typeface="+mn-lt"/>
+                          <a:ea typeface="+mn-ea"/>
+                          <a:cs typeface="+mn-cs"/>
+                        </a:rPr>
+                        <a:t>Да</a:t>
+                      </a:r>
+                      <a:endParaRPr lang="ru-RU" dirty="0"/>
+                    </a:p>
+                  </a:txBody>
+                  <a:tcPr/>
+                </a:tc>
+                <a:tc>
+                  <a:txBody>
+                    <a:bodyPr/>
+                    <a:lstStyle/>
+                    <a:p>
+                      <a:pPr algn="l"/>
+                      <a:r>
+                        <a:rPr lang="ru-RU" sz="1800" kern="1200" dirty="0">
+                          <a:solidFill>
+                            <a:schemeClr val="dk1"/>
+                          </a:solidFill>
+                          <a:effectLst/>
+                          <a:latin typeface="+mn-lt"/>
+                          <a:ea typeface="+mn-ea"/>
+                          <a:cs typeface="+mn-cs"/>
+                        </a:rPr>
+                        <a:t>Да</a:t>
+                      </a:r>
+                      <a:endParaRPr lang="ru-RU" dirty="0"/>
+                    </a:p>
+                  </a:txBody>
+                  <a:tcPr/>
+                </a:tc>
+                <a:tc>
+                  <a:txBody>
+                    <a:bodyPr/>
+                    <a:lstStyle/>
+                    <a:p>
+                      <a:pPr algn="l"/>
+                      <a:r>
+                        <a:rPr lang="ru-RU" sz="1800" kern="1200" dirty="0">
+                          <a:solidFill>
+                            <a:schemeClr val="dk1"/>
+                          </a:solidFill>
+                          <a:effectLst/>
+                          <a:latin typeface="+mn-lt"/>
+                          <a:ea typeface="+mn-ea"/>
+                          <a:cs typeface="+mn-cs"/>
+                        </a:rPr>
+                        <a:t>Нет</a:t>
+                      </a:r>
+                      <a:endParaRPr lang="ru-RU" dirty="0"/>
+                    </a:p>
+                  </a:txBody>
+                  <a:tcPr/>
+                </a:tc>
+                <a:extLst>
+                  <a:ext uri="{0D108BD9-81ED-4DB2-BD59-A6C34878D82A}">
+                    <a16:rowId xmlns:a16="http://schemas.microsoft.com/office/drawing/2014/main" val="3243918633"/>
+                  </a:ext>
+                </a:extLst>
+              </a:tr>
+              <a:tr h="616165">
+                <a:tc>
+                  <a:txBody>
+                    <a:bodyPr/>
+                    <a:lstStyle/>
+                    <a:p>
+                      <a:pPr algn="l"/>
+                      <a:r>
+                        <a:rPr lang="ru-RU" sz="1800" kern="1200" dirty="0">
+                          <a:solidFill>
+                            <a:schemeClr val="dk1"/>
+                          </a:solidFill>
+                          <a:effectLst/>
+                          <a:latin typeface="+mn-lt"/>
+                          <a:ea typeface="+mn-ea"/>
+                          <a:cs typeface="+mn-cs"/>
+                        </a:rPr>
+                        <a:t>Стоимость</a:t>
+                      </a:r>
+                      <a:endParaRPr lang="ru-RU" dirty="0"/>
+                    </a:p>
+                  </a:txBody>
+                  <a:tcPr/>
+                </a:tc>
+                <a:tc>
+                  <a:txBody>
+                    <a:bodyPr/>
+                    <a:lstStyle/>
+                    <a:p>
+                      <a:pPr algn="l"/>
+                      <a:r>
+                        <a:rPr lang="ru-RU" sz="1800" kern="1200" dirty="0">
+                          <a:solidFill>
+                            <a:schemeClr val="dk1"/>
+                          </a:solidFill>
+                          <a:effectLst/>
+                          <a:latin typeface="+mn-lt"/>
+                          <a:ea typeface="+mn-ea"/>
+                          <a:cs typeface="+mn-cs"/>
+                        </a:rPr>
+                        <a:t>Высокая</a:t>
+                      </a:r>
+                      <a:endParaRPr lang="ru-RU" dirty="0"/>
+                    </a:p>
+                  </a:txBody>
+                  <a:tcPr/>
+                </a:tc>
+                <a:tc>
+                  <a:txBody>
+                    <a:bodyPr/>
+                    <a:lstStyle/>
+                    <a:p>
+                      <a:pPr algn="l"/>
+                      <a:r>
+                        <a:rPr lang="ru-RU" sz="1800" kern="1200" dirty="0">
+                          <a:solidFill>
+                            <a:schemeClr val="dk1"/>
+                          </a:solidFill>
+                          <a:effectLst/>
+                          <a:latin typeface="+mn-lt"/>
+                          <a:ea typeface="+mn-ea"/>
+                          <a:cs typeface="+mn-cs"/>
+                        </a:rPr>
+                        <a:t>Средняя</a:t>
+                      </a:r>
+                      <a:endParaRPr lang="ru-RU" dirty="0"/>
+                    </a:p>
+                  </a:txBody>
+                  <a:tcPr/>
+                </a:tc>
+                <a:tc>
+                  <a:txBody>
+                    <a:bodyPr/>
+                    <a:lstStyle/>
+                    <a:p>
+                      <a:pPr algn="l"/>
+                      <a:r>
+                        <a:rPr lang="ru-RU" sz="1800" kern="1200" dirty="0">
+                          <a:solidFill>
+                            <a:schemeClr val="dk1"/>
+                          </a:solidFill>
+                          <a:effectLst/>
+                          <a:latin typeface="+mn-lt"/>
+                          <a:ea typeface="+mn-ea"/>
+                          <a:cs typeface="+mn-cs"/>
+                        </a:rPr>
+                        <a:t>Высокая</a:t>
+                      </a:r>
+                      <a:endParaRPr lang="ru-RU" dirty="0"/>
+                    </a:p>
+                  </a:txBody>
+                  <a:tcPr/>
+                </a:tc>
+                <a:tc>
+                  <a:txBody>
+                    <a:bodyPr/>
+                    <a:lstStyle/>
+                    <a:p>
+                      <a:pPr algn="l"/>
+                      <a:r>
+                        <a:rPr lang="ru-RU" sz="1800" kern="1200" dirty="0">
+                          <a:solidFill>
+                            <a:schemeClr val="dk1"/>
+                          </a:solidFill>
+                          <a:effectLst/>
+                          <a:latin typeface="+mn-lt"/>
+                          <a:ea typeface="+mn-ea"/>
+                          <a:cs typeface="+mn-cs"/>
+                        </a:rPr>
+                        <a:t>Средняя</a:t>
+                      </a:r>
+                      <a:endParaRPr lang="ru-RU" dirty="0"/>
+                    </a:p>
+                  </a:txBody>
+                  <a:tcPr/>
+                </a:tc>
+                <a:extLst>
+                  <a:ext uri="{0D108BD9-81ED-4DB2-BD59-A6C34878D82A}">
+                    <a16:rowId xmlns:a16="http://schemas.microsoft.com/office/drawing/2014/main" val="3785919561"/>
+                  </a:ext>
+                </a:extLst>
+              </a:tr>
+            </a:tbl>
+          </a:graphicData>
+        </a:graphic>
+      </p:graphicFrame>
     </p:spTree>
     <p:extLst>
       <p:ext uri="{BB962C8B-B14F-4D97-AF65-F5344CB8AC3E}">
@@ -7190,10 +7684,10 @@
       </p:sp>
       <p:pic>
         <p:nvPicPr>
-          <p:cNvPr id="3" name="Рисунок 2">
-            <a:extLst>
-              <a:ext uri="{FF2B5EF4-FFF2-40B4-BE49-F238E27FC236}">
-                <a16:creationId xmlns:a16="http://schemas.microsoft.com/office/drawing/2014/main" id="{5E362F01-AE84-4346-82B7-CE5CD579C6A1}"/>
+          <p:cNvPr id="6" name="Рисунок 5" descr="Изображение выглядит как текст, снимок экрана, дизайн&#10;&#10;Автоматически созданное описание">
+            <a:extLst>
+              <a:ext uri="{FF2B5EF4-FFF2-40B4-BE49-F238E27FC236}">
+                <a16:creationId xmlns:a16="http://schemas.microsoft.com/office/drawing/2014/main" id="{B4E2FE8A-B52E-1775-6EAF-34DCDCC96125}"/>
               </a:ext>
             </a:extLst>
           </p:cNvPr>
@@ -7210,23 +7704,18 @@
               </a:ext>
             </a:extLst>
           </a:blip>
-          <a:srcRect/>
           <a:stretch>
             <a:fillRect/>
           </a:stretch>
         </p:blipFill>
-        <p:spPr bwMode="auto">
-          <a:xfrm>
-            <a:off x="2566320" y="747103"/>
-            <a:ext cx="7059359" cy="5774467"/>
+        <p:spPr>
+          <a:xfrm>
+            <a:off x="2241538" y="702279"/>
+            <a:ext cx="7496822" cy="5987506"/>
           </a:xfrm>
           <a:prstGeom prst="rect">
             <a:avLst/>
           </a:prstGeom>
-          <a:noFill/>
-          <a:ln>
-            <a:noFill/>
-          </a:ln>
         </p:spPr>
       </p:pic>
     </p:spTree>
@@ -7328,10 +7817,10 @@
       </p:sp>
       <p:pic>
         <p:nvPicPr>
-          <p:cNvPr id="4" name="Рисунок 3">
-            <a:extLst>
-              <a:ext uri="{FF2B5EF4-FFF2-40B4-BE49-F238E27FC236}">
-                <a16:creationId xmlns:a16="http://schemas.microsoft.com/office/drawing/2014/main" id="{3EE813B2-5909-97D5-A0AC-B0D2CB6E62E9}"/>
+          <p:cNvPr id="6" name="Рисунок 5" descr="Изображение выглядит как снимок экрана, текст, диаграмма, дизайн&#10;&#10;Автоматически созданное описание">
+            <a:extLst>
+              <a:ext uri="{FF2B5EF4-FFF2-40B4-BE49-F238E27FC236}">
+                <a16:creationId xmlns:a16="http://schemas.microsoft.com/office/drawing/2014/main" id="{3F509977-BFDF-72D9-952F-A84708F22553}"/>
               </a:ext>
             </a:extLst>
           </p:cNvPr>
@@ -7341,30 +7830,25 @@
           <p:nvPr/>
         </p:nvPicPr>
         <p:blipFill>
-          <a:blip r:embed="rId2" cstate="print">
+          <a:blip r:embed="rId2">
             <a:extLst>
               <a:ext uri="{28A0092B-C50C-407E-A947-70E740481C1C}">
                 <a14:useLocalDpi xmlns:a14="http://schemas.microsoft.com/office/drawing/2010/main" val="0"/>
               </a:ext>
             </a:extLst>
           </a:blip>
-          <a:srcRect/>
           <a:stretch>
             <a:fillRect/>
           </a:stretch>
         </p:blipFill>
-        <p:spPr bwMode="auto">
-          <a:xfrm>
-            <a:off x="938525" y="969264"/>
-            <a:ext cx="10314950" cy="5360282"/>
+        <p:spPr>
+          <a:xfrm>
+            <a:off x="8627" y="713231"/>
+            <a:ext cx="11926444" cy="6076538"/>
           </a:xfrm>
           <a:prstGeom prst="rect">
             <a:avLst/>
           </a:prstGeom>
-          <a:noFill/>
-          <a:ln>
-            <a:noFill/>
-          </a:ln>
         </p:spPr>
       </p:pic>
     </p:spTree>
